--- a/CLASE-02/01-CLASE-02-CKA.pptx
+++ b/CLASE-02/01-CLASE-02-CKA.pptx
@@ -3208,80 +3208,30 @@
           </a:p>
         </p:txBody>
       </p:sp>
-      <p:sp>
-        <p:nvSpPr>
-          <p:cNvPr id="4" name="Freeform 3"/>
-          <p:cNvSpPr/>
-          <p:nvPr/>
-        </p:nvSpPr>
-        <p:spPr>
-          <a:xfrm>
-            <a:off x="9720832" y="400000"/>
-            <a:ext cx="2242335" cy="2186114"/>
-          </a:xfrm>
-          <a:custGeom>
-            <a:avLst/>
-            <a:gdLst/>
-            <a:ahLst/>
-            <a:cxnLst/>
-            <a:rect l="l" t="t" r="r" b="b"/>
-            <a:pathLst>
-              <a:path w="2242335" h="2186114">
-                <a:moveTo>
-                  <a:pt x="1121168" y="0"/>
-                </a:moveTo>
-                <a:lnTo>
-                  <a:pt x="2020274" y="432986"/>
-                </a:lnTo>
-                <a:lnTo>
-                  <a:pt x="2242335" y="1405899"/>
-                </a:lnTo>
-                <a:lnTo>
-                  <a:pt x="1620134" y="2186114"/>
-                </a:lnTo>
-                <a:lnTo>
-                  <a:pt x="622201" y="2186114"/>
-                </a:lnTo>
-                <a:lnTo>
-                  <a:pt x="0" y="1405899"/>
-                </a:lnTo>
-                <a:lnTo>
-                  <a:pt x="222061" y="432986"/>
-                </a:lnTo>
-                <a:close/>
-              </a:path>
-            </a:pathLst>
-          </a:custGeom>
-          <a:noFill/>
-          <a:ln w="28575">
-            <a:solidFill>
-              <a:srgbClr val="26354E"/>
-            </a:solidFill>
-          </a:ln>
-          <a:effectLst/>
-        </p:spPr>
-        <p:style>
-          <a:lnRef idx="1">
-            <a:schemeClr val="accent1"/>
-          </a:lnRef>
-          <a:fillRef idx="3">
-            <a:schemeClr val="accent1"/>
-          </a:fillRef>
-          <a:effectRef idx="2">
-            <a:schemeClr val="accent1"/>
-          </a:effectRef>
-          <a:fontRef idx="minor">
-            <a:schemeClr val="lt1"/>
-          </a:fontRef>
-        </p:style>
-        <p:txBody>
-          <a:bodyPr rtlCol="0" anchor="ctr"/>
-          <a:lstStyle/>
-          <a:p>
-            <a:pPr algn="ctr"/>
-          </a:p>
-        </p:txBody>
-      </p:sp>
+      <p:pic>
+        <p:nvPicPr>
+          <p:cNvPr id="4" name="Picture 3" descr="kubernetes.png"/>
+          <p:cNvPicPr>
+            <a:picLocks noChangeAspect="1"/>
+          </p:cNvPicPr>
+          <p:nvPr/>
+        </p:nvPicPr>
+        <p:blipFill>
+          <a:blip r:embed="rId2"/>
+          <a:stretch>
+            <a:fillRect/>
+          </a:stretch>
+        </p:blipFill>
+        <p:spPr>
+          <a:xfrm>
+            <a:off x="9642000" y="1000000"/>
+            <a:ext cx="1650000" cy="1650000"/>
+          </a:xfrm>
+          <a:prstGeom prst="rect">
+            <a:avLst/>
+          </a:prstGeom>
+        </p:spPr>
+      </p:pic>
       <p:sp>
         <p:nvSpPr>
           <p:cNvPr id="5" name="TextBox 4"/>
@@ -4253,7 +4203,7 @@
         <p:spPr>
           <a:xfrm>
             <a:off x="620000" y="560000"/>
-            <a:ext cx="10952000" cy="620000"/>
+            <a:ext cx="10052000" cy="620000"/>
           </a:xfrm>
           <a:prstGeom prst="rect">
             <a:avLst/>
@@ -4476,18 +4426,264 @@
       </p:sp>
       <p:sp>
         <p:nvSpPr>
-          <p:cNvPr id="8" name="Rounded Rectangle 7"/>
+          <p:cNvPr id="8" name="Oval 7"/>
           <p:cNvSpPr/>
           <p:nvPr/>
         </p:nvSpPr>
         <p:spPr>
           <a:xfrm>
-            <a:off x="620000" y="1670000"/>
-            <a:ext cx="2625500" cy="660000"/>
+            <a:off x="10996000" y="390200"/>
+            <a:ext cx="76800" cy="76800"/>
+          </a:xfrm>
+          <a:prstGeom prst="ellipse">
+            <a:avLst/>
+          </a:prstGeom>
+          <a:solidFill>
+            <a:srgbClr val="74A6FF"/>
+          </a:solidFill>
+          <a:ln w="6350">
+            <a:solidFill>
+              <a:srgbClr val="74A6FF"/>
+            </a:solidFill>
+          </a:ln>
+          <a:effectLst/>
+        </p:spPr>
+        <p:style>
+          <a:lnRef idx="1">
+            <a:schemeClr val="accent1"/>
+          </a:lnRef>
+          <a:fillRef idx="3">
+            <a:schemeClr val="accent1"/>
+          </a:fillRef>
+          <a:effectRef idx="2">
+            <a:schemeClr val="accent1"/>
+          </a:effectRef>
+          <a:fontRef idx="minor">
+            <a:schemeClr val="lt1"/>
+          </a:fontRef>
+        </p:style>
+        <p:txBody>
+          <a:bodyPr rtlCol="0" anchor="ctr"/>
+          <a:lstStyle/>
+          <a:p>
+            <a:pPr algn="ctr"/>
+          </a:p>
+        </p:txBody>
+      </p:sp>
+      <p:cxnSp>
+        <p:nvCxnSpPr>
+          <p:cNvPr id="9" name="Connector 8"/>
+          <p:cNvCxnSpPr/>
+          <p:nvPr/>
+        </p:nvCxnSpPr>
+        <p:spPr>
+          <a:xfrm>
+            <a:off x="11136800" y="428600"/>
+            <a:ext cx="371200" cy="0"/>
+          </a:xfrm>
+          <a:prstGeom prst="line">
+            <a:avLst/>
+          </a:prstGeom>
+          <a:ln w="38100">
+            <a:solidFill>
+              <a:srgbClr val="74A6FF"/>
+            </a:solidFill>
+          </a:ln>
+          <a:effectLst/>
+        </p:spPr>
+        <p:style>
+          <a:lnRef idx="2">
+            <a:schemeClr val="accent1"/>
+          </a:lnRef>
+          <a:fillRef idx="0">
+            <a:schemeClr val="accent1"/>
+          </a:fillRef>
+          <a:effectRef idx="1">
+            <a:schemeClr val="accent1"/>
+          </a:effectRef>
+          <a:fontRef idx="minor">
+            <a:schemeClr val="tx1"/>
+          </a:fontRef>
+        </p:style>
+      </p:cxnSp>
+      <p:sp>
+        <p:nvSpPr>
+          <p:cNvPr id="10" name="Oval 9"/>
+          <p:cNvSpPr/>
+          <p:nvPr/>
+        </p:nvSpPr>
+        <p:spPr>
+          <a:xfrm>
+            <a:off x="10996000" y="543800"/>
+            <a:ext cx="76800" cy="76800"/>
+          </a:xfrm>
+          <a:prstGeom prst="ellipse">
+            <a:avLst/>
+          </a:prstGeom>
+          <a:solidFill>
+            <a:srgbClr val="74A6FF"/>
+          </a:solidFill>
+          <a:ln w="6350">
+            <a:solidFill>
+              <a:srgbClr val="74A6FF"/>
+            </a:solidFill>
+          </a:ln>
+          <a:effectLst/>
+        </p:spPr>
+        <p:style>
+          <a:lnRef idx="1">
+            <a:schemeClr val="accent1"/>
+          </a:lnRef>
+          <a:fillRef idx="3">
+            <a:schemeClr val="accent1"/>
+          </a:fillRef>
+          <a:effectRef idx="2">
+            <a:schemeClr val="accent1"/>
+          </a:effectRef>
+          <a:fontRef idx="minor">
+            <a:schemeClr val="lt1"/>
+          </a:fontRef>
+        </p:style>
+        <p:txBody>
+          <a:bodyPr rtlCol="0" anchor="ctr"/>
+          <a:lstStyle/>
+          <a:p>
+            <a:pPr algn="ctr"/>
+          </a:p>
+        </p:txBody>
+      </p:sp>
+      <p:cxnSp>
+        <p:nvCxnSpPr>
+          <p:cNvPr id="11" name="Connector 10"/>
+          <p:cNvCxnSpPr/>
+          <p:nvPr/>
+        </p:nvCxnSpPr>
+        <p:spPr>
+          <a:xfrm>
+            <a:off x="11136800" y="582200"/>
+            <a:ext cx="371200" cy="0"/>
+          </a:xfrm>
+          <a:prstGeom prst="line">
+            <a:avLst/>
+          </a:prstGeom>
+          <a:ln w="38100">
+            <a:solidFill>
+              <a:srgbClr val="74A6FF"/>
+            </a:solidFill>
+          </a:ln>
+          <a:effectLst/>
+        </p:spPr>
+        <p:style>
+          <a:lnRef idx="2">
+            <a:schemeClr val="accent1"/>
+          </a:lnRef>
+          <a:fillRef idx="0">
+            <a:schemeClr val="accent1"/>
+          </a:fillRef>
+          <a:effectRef idx="1">
+            <a:schemeClr val="accent1"/>
+          </a:effectRef>
+          <a:fontRef idx="minor">
+            <a:schemeClr val="tx1"/>
+          </a:fontRef>
+        </p:style>
+      </p:cxnSp>
+      <p:sp>
+        <p:nvSpPr>
+          <p:cNvPr id="12" name="Oval 11"/>
+          <p:cNvSpPr/>
+          <p:nvPr/>
+        </p:nvSpPr>
+        <p:spPr>
+          <a:xfrm>
+            <a:off x="10996000" y="697400"/>
+            <a:ext cx="76800" cy="76800"/>
+          </a:xfrm>
+          <a:prstGeom prst="ellipse">
+            <a:avLst/>
+          </a:prstGeom>
+          <a:solidFill>
+            <a:srgbClr val="74A6FF"/>
+          </a:solidFill>
+          <a:ln w="6350">
+            <a:solidFill>
+              <a:srgbClr val="74A6FF"/>
+            </a:solidFill>
+          </a:ln>
+          <a:effectLst/>
+        </p:spPr>
+        <p:style>
+          <a:lnRef idx="1">
+            <a:schemeClr val="accent1"/>
+          </a:lnRef>
+          <a:fillRef idx="3">
+            <a:schemeClr val="accent1"/>
+          </a:fillRef>
+          <a:effectRef idx="2">
+            <a:schemeClr val="accent1"/>
+          </a:effectRef>
+          <a:fontRef idx="minor">
+            <a:schemeClr val="lt1"/>
+          </a:fontRef>
+        </p:style>
+        <p:txBody>
+          <a:bodyPr rtlCol="0" anchor="ctr"/>
+          <a:lstStyle/>
+          <a:p>
+            <a:pPr algn="ctr"/>
+          </a:p>
+        </p:txBody>
+      </p:sp>
+      <p:cxnSp>
+        <p:nvCxnSpPr>
+          <p:cNvPr id="13" name="Connector 12"/>
+          <p:cNvCxnSpPr/>
+          <p:nvPr/>
+        </p:nvCxnSpPr>
+        <p:spPr>
+          <a:xfrm>
+            <a:off x="11136800" y="735800"/>
+            <a:ext cx="371200" cy="0"/>
+          </a:xfrm>
+          <a:prstGeom prst="line">
+            <a:avLst/>
+          </a:prstGeom>
+          <a:ln w="38100">
+            <a:solidFill>
+              <a:srgbClr val="74A6FF"/>
+            </a:solidFill>
+          </a:ln>
+          <a:effectLst/>
+        </p:spPr>
+        <p:style>
+          <a:lnRef idx="2">
+            <a:schemeClr val="accent1"/>
+          </a:lnRef>
+          <a:fillRef idx="0">
+            <a:schemeClr val="accent1"/>
+          </a:fillRef>
+          <a:effectRef idx="1">
+            <a:schemeClr val="accent1"/>
+          </a:effectRef>
+          <a:fontRef idx="minor">
+            <a:schemeClr val="tx1"/>
+          </a:fontRef>
+        </p:style>
+      </p:cxnSp>
+      <p:sp>
+        <p:nvSpPr>
+          <p:cNvPr id="14" name="Rounded Rectangle 13"/>
+          <p:cNvSpPr/>
+          <p:nvPr/>
+        </p:nvSpPr>
+        <p:spPr>
+          <a:xfrm>
+            <a:off x="620000" y="1710000"/>
+            <a:ext cx="2580500" cy="680000"/>
           </a:xfrm>
           <a:prstGeom prst="roundRect">
             <a:avLst>
-              <a:gd name="adj" fmla="val 12000"/>
+              <a:gd name="adj" fmla="val 11000"/>
             </a:avLst>
           </a:prstGeom>
           <a:solidFill>
@@ -4526,14 +4722,14 @@
       </p:sp>
       <p:sp>
         <p:nvSpPr>
-          <p:cNvPr id="9" name="TextBox 8"/>
+          <p:cNvPr id="15" name="TextBox 14"/>
           <p:cNvSpPr txBox="1"/>
           <p:nvPr/>
         </p:nvSpPr>
         <p:spPr>
           <a:xfrm>
-            <a:off x="690000" y="1670000"/>
-            <a:ext cx="2485500" cy="660000"/>
+            <a:off x="690000" y="1710000"/>
+            <a:ext cx="2440500" cy="680000"/>
           </a:xfrm>
           <a:prstGeom prst="rect">
             <a:avLst/>
@@ -4570,66 +4766,57 @@
           </a:p>
         </p:txBody>
       </p:sp>
-      <p:sp>
-        <p:nvSpPr>
-          <p:cNvPr id="10" name="TextBox 9"/>
-          <p:cNvSpPr txBox="1"/>
-          <p:nvPr/>
-        </p:nvSpPr>
-        <p:spPr>
-          <a:xfrm>
-            <a:off x="3205500" y="1670000"/>
-            <a:ext cx="230000" cy="660000"/>
-          </a:xfrm>
-          <a:prstGeom prst="rect">
-            <a:avLst/>
-          </a:prstGeom>
-          <a:noFill/>
-        </p:spPr>
-        <p:txBody>
-          <a:bodyPr wrap="square" anchor="ctr" lIns="0" rIns="0" tIns="0" bIns="0">
-            <a:noAutofit/>
-          </a:bodyPr>
-          <a:lstStyle/>
-          <a:p>
-            <a:pPr algn="ctr" marL="0" indent="0">
-              <a:lnSpc>
-                <a:spcPct val="100000"/>
-              </a:lnSpc>
-              <a:spcBef>
-                <a:spcPts val="0"/>
-              </a:spcBef>
-              <a:spcAft>
-                <a:spcPts val="0"/>
-              </a:spcAft>
-              <a:buNone/>
-            </a:pPr>
-            <a:r>
-              <a:rPr sz="1500" b="0" i="0">
-                <a:solidFill>
-                  <a:srgbClr val="74A6FF"/>
-                </a:solidFill>
-                <a:latin typeface="Segoe UI"/>
-              </a:rPr>
-              <a:t>→</a:t>
-            </a:r>
-          </a:p>
-        </p:txBody>
-      </p:sp>
-      <p:sp>
-        <p:nvSpPr>
-          <p:cNvPr id="11" name="Rounded Rectangle 10"/>
+      <p:cxnSp>
+        <p:nvCxnSpPr>
+          <p:cNvPr id="16" name="Connector 15"/>
+          <p:cNvCxnSpPr/>
+          <p:nvPr/>
+        </p:nvCxnSpPr>
+        <p:spPr>
+          <a:xfrm>
+            <a:off x="3224500" y="2050000"/>
+            <a:ext cx="162000" cy="0"/>
+          </a:xfrm>
+          <a:prstGeom prst="line">
+            <a:avLst/>
+          </a:prstGeom>
+          <a:ln w="22225">
+            <a:solidFill>
+              <a:srgbClr val="74A6FF"/>
+            </a:solidFill>
+            <a:tailEnd type="triangle" w="med" len="med"/>
+          </a:ln>
+          <a:effectLst/>
+        </p:spPr>
+        <p:style>
+          <a:lnRef idx="2">
+            <a:schemeClr val="accent1"/>
+          </a:lnRef>
+          <a:fillRef idx="0">
+            <a:schemeClr val="accent1"/>
+          </a:fillRef>
+          <a:effectRef idx="1">
+            <a:schemeClr val="accent1"/>
+          </a:effectRef>
+          <a:fontRef idx="minor">
+            <a:schemeClr val="tx1"/>
+          </a:fontRef>
+        </p:style>
+      </p:cxnSp>
+      <p:sp>
+        <p:nvSpPr>
+          <p:cNvPr id="17" name="Rounded Rectangle 16"/>
           <p:cNvSpPr/>
           <p:nvPr/>
         </p:nvSpPr>
         <p:spPr>
           <a:xfrm>
-            <a:off x="3395500" y="1670000"/>
-            <a:ext cx="2625500" cy="660000"/>
+            <a:off x="3410500" y="1710000"/>
+            <a:ext cx="2580500" cy="680000"/>
           </a:xfrm>
           <a:prstGeom prst="roundRect">
             <a:avLst>
-              <a:gd name="adj" fmla="val 12000"/>
+              <a:gd name="adj" fmla="val 11000"/>
             </a:avLst>
           </a:prstGeom>
           <a:solidFill>
@@ -4668,14 +4855,14 @@
       </p:sp>
       <p:sp>
         <p:nvSpPr>
-          <p:cNvPr id="12" name="TextBox 11"/>
+          <p:cNvPr id="18" name="TextBox 17"/>
           <p:cNvSpPr txBox="1"/>
           <p:nvPr/>
         </p:nvSpPr>
         <p:spPr>
           <a:xfrm>
-            <a:off x="3465500" y="1670000"/>
-            <a:ext cx="2485500" cy="660000"/>
+            <a:off x="3480500" y="1710000"/>
+            <a:ext cx="2440500" cy="680000"/>
           </a:xfrm>
           <a:prstGeom prst="rect">
             <a:avLst/>
@@ -4712,66 +4899,57 @@
           </a:p>
         </p:txBody>
       </p:sp>
-      <p:sp>
-        <p:nvSpPr>
-          <p:cNvPr id="13" name="TextBox 12"/>
-          <p:cNvSpPr txBox="1"/>
-          <p:nvPr/>
-        </p:nvSpPr>
-        <p:spPr>
-          <a:xfrm>
-            <a:off x="5981000" y="1670000"/>
-            <a:ext cx="230000" cy="660000"/>
-          </a:xfrm>
-          <a:prstGeom prst="rect">
-            <a:avLst/>
-          </a:prstGeom>
-          <a:noFill/>
-        </p:spPr>
-        <p:txBody>
-          <a:bodyPr wrap="square" anchor="ctr" lIns="0" rIns="0" tIns="0" bIns="0">
-            <a:noAutofit/>
-          </a:bodyPr>
-          <a:lstStyle/>
-          <a:p>
-            <a:pPr algn="ctr" marL="0" indent="0">
-              <a:lnSpc>
-                <a:spcPct val="100000"/>
-              </a:lnSpc>
-              <a:spcBef>
-                <a:spcPts val="0"/>
-              </a:spcBef>
-              <a:spcAft>
-                <a:spcPts val="0"/>
-              </a:spcAft>
-              <a:buNone/>
-            </a:pPr>
-            <a:r>
-              <a:rPr sz="1500" b="0" i="0">
-                <a:solidFill>
-                  <a:srgbClr val="74A6FF"/>
-                </a:solidFill>
-                <a:latin typeface="Segoe UI"/>
-              </a:rPr>
-              <a:t>→</a:t>
-            </a:r>
-          </a:p>
-        </p:txBody>
-      </p:sp>
-      <p:sp>
-        <p:nvSpPr>
-          <p:cNvPr id="14" name="Rounded Rectangle 13"/>
+      <p:cxnSp>
+        <p:nvCxnSpPr>
+          <p:cNvPr id="19" name="Connector 18"/>
+          <p:cNvCxnSpPr/>
+          <p:nvPr/>
+        </p:nvCxnSpPr>
+        <p:spPr>
+          <a:xfrm>
+            <a:off x="6015000" y="2050000"/>
+            <a:ext cx="162000" cy="0"/>
+          </a:xfrm>
+          <a:prstGeom prst="line">
+            <a:avLst/>
+          </a:prstGeom>
+          <a:ln w="22225">
+            <a:solidFill>
+              <a:srgbClr val="74A6FF"/>
+            </a:solidFill>
+            <a:tailEnd type="triangle" w="med" len="med"/>
+          </a:ln>
+          <a:effectLst/>
+        </p:spPr>
+        <p:style>
+          <a:lnRef idx="2">
+            <a:schemeClr val="accent1"/>
+          </a:lnRef>
+          <a:fillRef idx="0">
+            <a:schemeClr val="accent1"/>
+          </a:fillRef>
+          <a:effectRef idx="1">
+            <a:schemeClr val="accent1"/>
+          </a:effectRef>
+          <a:fontRef idx="minor">
+            <a:schemeClr val="tx1"/>
+          </a:fontRef>
+        </p:style>
+      </p:cxnSp>
+      <p:sp>
+        <p:nvSpPr>
+          <p:cNvPr id="20" name="Rounded Rectangle 19"/>
           <p:cNvSpPr/>
           <p:nvPr/>
         </p:nvSpPr>
         <p:spPr>
           <a:xfrm>
-            <a:off x="6171000" y="1670000"/>
-            <a:ext cx="2625500" cy="660000"/>
+            <a:off x="6201000" y="1710000"/>
+            <a:ext cx="2580500" cy="680000"/>
           </a:xfrm>
           <a:prstGeom prst="roundRect">
             <a:avLst>
-              <a:gd name="adj" fmla="val 12000"/>
+              <a:gd name="adj" fmla="val 11000"/>
             </a:avLst>
           </a:prstGeom>
           <a:solidFill>
@@ -4810,14 +4988,14 @@
       </p:sp>
       <p:sp>
         <p:nvSpPr>
-          <p:cNvPr id="15" name="TextBox 14"/>
+          <p:cNvPr id="21" name="TextBox 20"/>
           <p:cNvSpPr txBox="1"/>
           <p:nvPr/>
         </p:nvSpPr>
         <p:spPr>
           <a:xfrm>
-            <a:off x="6241000" y="1670000"/>
-            <a:ext cx="2485500" cy="660000"/>
+            <a:off x="6271000" y="1710000"/>
+            <a:ext cx="2440500" cy="680000"/>
           </a:xfrm>
           <a:prstGeom prst="rect">
             <a:avLst/>
@@ -4854,66 +5032,57 @@
           </a:p>
         </p:txBody>
       </p:sp>
-      <p:sp>
-        <p:nvSpPr>
-          <p:cNvPr id="16" name="TextBox 15"/>
-          <p:cNvSpPr txBox="1"/>
-          <p:nvPr/>
-        </p:nvSpPr>
-        <p:spPr>
-          <a:xfrm>
-            <a:off x="8756500" y="1670000"/>
-            <a:ext cx="230000" cy="660000"/>
-          </a:xfrm>
-          <a:prstGeom prst="rect">
-            <a:avLst/>
-          </a:prstGeom>
-          <a:noFill/>
-        </p:spPr>
-        <p:txBody>
-          <a:bodyPr wrap="square" anchor="ctr" lIns="0" rIns="0" tIns="0" bIns="0">
-            <a:noAutofit/>
-          </a:bodyPr>
-          <a:lstStyle/>
-          <a:p>
-            <a:pPr algn="ctr" marL="0" indent="0">
-              <a:lnSpc>
-                <a:spcPct val="100000"/>
-              </a:lnSpc>
-              <a:spcBef>
-                <a:spcPts val="0"/>
-              </a:spcBef>
-              <a:spcAft>
-                <a:spcPts val="0"/>
-              </a:spcAft>
-              <a:buNone/>
-            </a:pPr>
-            <a:r>
-              <a:rPr sz="1500" b="0" i="0">
-                <a:solidFill>
-                  <a:srgbClr val="74A6FF"/>
-                </a:solidFill>
-                <a:latin typeface="Segoe UI"/>
-              </a:rPr>
-              <a:t>→</a:t>
-            </a:r>
-          </a:p>
-        </p:txBody>
-      </p:sp>
-      <p:sp>
-        <p:nvSpPr>
-          <p:cNvPr id="17" name="Rounded Rectangle 16"/>
+      <p:cxnSp>
+        <p:nvCxnSpPr>
+          <p:cNvPr id="22" name="Connector 21"/>
+          <p:cNvCxnSpPr/>
+          <p:nvPr/>
+        </p:nvCxnSpPr>
+        <p:spPr>
+          <a:xfrm>
+            <a:off x="8805500" y="2050000"/>
+            <a:ext cx="162000" cy="0"/>
+          </a:xfrm>
+          <a:prstGeom prst="line">
+            <a:avLst/>
+          </a:prstGeom>
+          <a:ln w="22225">
+            <a:solidFill>
+              <a:srgbClr val="74A6FF"/>
+            </a:solidFill>
+            <a:tailEnd type="triangle" w="med" len="med"/>
+          </a:ln>
+          <a:effectLst/>
+        </p:spPr>
+        <p:style>
+          <a:lnRef idx="2">
+            <a:schemeClr val="accent1"/>
+          </a:lnRef>
+          <a:fillRef idx="0">
+            <a:schemeClr val="accent1"/>
+          </a:fillRef>
+          <a:effectRef idx="1">
+            <a:schemeClr val="accent1"/>
+          </a:effectRef>
+          <a:fontRef idx="minor">
+            <a:schemeClr val="tx1"/>
+          </a:fontRef>
+        </p:style>
+      </p:cxnSp>
+      <p:sp>
+        <p:nvSpPr>
+          <p:cNvPr id="23" name="Rounded Rectangle 22"/>
           <p:cNvSpPr/>
           <p:nvPr/>
         </p:nvSpPr>
         <p:spPr>
           <a:xfrm>
-            <a:off x="8946500" y="1670000"/>
-            <a:ext cx="2625500" cy="660000"/>
+            <a:off x="8991500" y="1710000"/>
+            <a:ext cx="2580500" cy="680000"/>
           </a:xfrm>
           <a:prstGeom prst="roundRect">
             <a:avLst>
-              <a:gd name="adj" fmla="val 12000"/>
+              <a:gd name="adj" fmla="val 11000"/>
             </a:avLst>
           </a:prstGeom>
           <a:solidFill>
@@ -4952,14 +5121,14 @@
       </p:sp>
       <p:sp>
         <p:nvSpPr>
-          <p:cNvPr id="18" name="TextBox 17"/>
+          <p:cNvPr id="24" name="TextBox 23"/>
           <p:cNvSpPr txBox="1"/>
           <p:nvPr/>
         </p:nvSpPr>
         <p:spPr>
           <a:xfrm>
-            <a:off x="9016500" y="1670000"/>
-            <a:ext cx="2485500" cy="660000"/>
+            <a:off x="9061500" y="1710000"/>
+            <a:ext cx="2440500" cy="680000"/>
           </a:xfrm>
           <a:prstGeom prst="rect">
             <a:avLst/>
@@ -4996,66 +5165,57 @@
           </a:p>
         </p:txBody>
       </p:sp>
-      <p:sp>
-        <p:nvSpPr>
-          <p:cNvPr id="19" name="TextBox 18"/>
-          <p:cNvSpPr txBox="1"/>
-          <p:nvPr/>
-        </p:nvSpPr>
-        <p:spPr>
-          <a:xfrm>
-            <a:off x="10159250" y="2300000"/>
-            <a:ext cx="200000" cy="210000"/>
-          </a:xfrm>
-          <a:prstGeom prst="rect">
-            <a:avLst/>
-          </a:prstGeom>
-          <a:noFill/>
-        </p:spPr>
-        <p:txBody>
-          <a:bodyPr wrap="square" anchor="ctr" lIns="0" rIns="0" tIns="0" bIns="0">
-            <a:noAutofit/>
-          </a:bodyPr>
-          <a:lstStyle/>
-          <a:p>
-            <a:pPr algn="ctr" marL="0" indent="0">
-              <a:lnSpc>
-                <a:spcPct val="100000"/>
-              </a:lnSpc>
-              <a:spcBef>
-                <a:spcPts val="0"/>
-              </a:spcBef>
-              <a:spcAft>
-                <a:spcPts val="0"/>
-              </a:spcAft>
-              <a:buNone/>
-            </a:pPr>
-            <a:r>
-              <a:rPr sz="1400" b="0" i="0">
-                <a:solidFill>
-                  <a:srgbClr val="74A6FF"/>
-                </a:solidFill>
-                <a:latin typeface="Segoe UI"/>
-              </a:rPr>
-              <a:t>↓</a:t>
-            </a:r>
-          </a:p>
-        </p:txBody>
-      </p:sp>
-      <p:sp>
-        <p:nvSpPr>
-          <p:cNvPr id="20" name="Rounded Rectangle 19"/>
+      <p:cxnSp>
+        <p:nvCxnSpPr>
+          <p:cNvPr id="25" name="Connector 24"/>
+          <p:cNvCxnSpPr/>
+          <p:nvPr/>
+        </p:nvCxnSpPr>
+        <p:spPr>
+          <a:xfrm>
+            <a:off x="10281750" y="2416000"/>
+            <a:ext cx="0" cy="208000"/>
+          </a:xfrm>
+          <a:prstGeom prst="line">
+            <a:avLst/>
+          </a:prstGeom>
+          <a:ln w="22225">
+            <a:solidFill>
+              <a:srgbClr val="74A6FF"/>
+            </a:solidFill>
+            <a:tailEnd type="triangle" w="med" len="med"/>
+          </a:ln>
+          <a:effectLst/>
+        </p:spPr>
+        <p:style>
+          <a:lnRef idx="2">
+            <a:schemeClr val="accent1"/>
+          </a:lnRef>
+          <a:fillRef idx="0">
+            <a:schemeClr val="accent1"/>
+          </a:fillRef>
+          <a:effectRef idx="1">
+            <a:schemeClr val="accent1"/>
+          </a:effectRef>
+          <a:fontRef idx="minor">
+            <a:schemeClr val="tx1"/>
+          </a:fontRef>
+        </p:style>
+      </p:cxnSp>
+      <p:sp>
+        <p:nvSpPr>
+          <p:cNvPr id="26" name="Rounded Rectangle 25"/>
           <p:cNvSpPr/>
           <p:nvPr/>
         </p:nvSpPr>
         <p:spPr>
           <a:xfrm>
-            <a:off x="620000" y="2480000"/>
-            <a:ext cx="2625500" cy="660000"/>
+            <a:off x="620000" y="2650000"/>
+            <a:ext cx="2580500" cy="680000"/>
           </a:xfrm>
           <a:prstGeom prst="roundRect">
             <a:avLst>
-              <a:gd name="adj" fmla="val 12000"/>
+              <a:gd name="adj" fmla="val 11000"/>
             </a:avLst>
           </a:prstGeom>
           <a:solidFill>
@@ -5094,14 +5254,14 @@
       </p:sp>
       <p:sp>
         <p:nvSpPr>
-          <p:cNvPr id="21" name="TextBox 20"/>
+          <p:cNvPr id="27" name="TextBox 26"/>
           <p:cNvSpPr txBox="1"/>
           <p:nvPr/>
         </p:nvSpPr>
         <p:spPr>
           <a:xfrm>
-            <a:off x="690000" y="2480000"/>
-            <a:ext cx="2485500" cy="660000"/>
+            <a:off x="690000" y="2650000"/>
+            <a:ext cx="2440500" cy="680000"/>
           </a:xfrm>
           <a:prstGeom prst="rect">
             <a:avLst/>
@@ -5138,66 +5298,57 @@
           </a:p>
         </p:txBody>
       </p:sp>
-      <p:sp>
-        <p:nvSpPr>
-          <p:cNvPr id="22" name="TextBox 21"/>
-          <p:cNvSpPr txBox="1"/>
-          <p:nvPr/>
-        </p:nvSpPr>
-        <p:spPr>
-          <a:xfrm>
-            <a:off x="3205500" y="2480000"/>
-            <a:ext cx="230000" cy="660000"/>
-          </a:xfrm>
-          <a:prstGeom prst="rect">
-            <a:avLst/>
-          </a:prstGeom>
-          <a:noFill/>
-        </p:spPr>
-        <p:txBody>
-          <a:bodyPr wrap="square" anchor="ctr" lIns="0" rIns="0" tIns="0" bIns="0">
-            <a:noAutofit/>
-          </a:bodyPr>
-          <a:lstStyle/>
-          <a:p>
-            <a:pPr algn="ctr" marL="0" indent="0">
-              <a:lnSpc>
-                <a:spcPct val="100000"/>
-              </a:lnSpc>
-              <a:spcBef>
-                <a:spcPts val="0"/>
-              </a:spcBef>
-              <a:spcAft>
-                <a:spcPts val="0"/>
-              </a:spcAft>
-              <a:buNone/>
-            </a:pPr>
-            <a:r>
-              <a:rPr sz="1500" b="0" i="0">
-                <a:solidFill>
-                  <a:srgbClr val="74A6FF"/>
-                </a:solidFill>
-                <a:latin typeface="Segoe UI"/>
-              </a:rPr>
-              <a:t>→</a:t>
-            </a:r>
-          </a:p>
-        </p:txBody>
-      </p:sp>
-      <p:sp>
-        <p:nvSpPr>
-          <p:cNvPr id="23" name="Rounded Rectangle 22"/>
+      <p:cxnSp>
+        <p:nvCxnSpPr>
+          <p:cNvPr id="28" name="Connector 27"/>
+          <p:cNvCxnSpPr/>
+          <p:nvPr/>
+        </p:nvCxnSpPr>
+        <p:spPr>
+          <a:xfrm>
+            <a:off x="3224500" y="2990000"/>
+            <a:ext cx="162000" cy="0"/>
+          </a:xfrm>
+          <a:prstGeom prst="line">
+            <a:avLst/>
+          </a:prstGeom>
+          <a:ln w="22225">
+            <a:solidFill>
+              <a:srgbClr val="74A6FF"/>
+            </a:solidFill>
+            <a:tailEnd type="triangle" w="med" len="med"/>
+          </a:ln>
+          <a:effectLst/>
+        </p:spPr>
+        <p:style>
+          <a:lnRef idx="2">
+            <a:schemeClr val="accent1"/>
+          </a:lnRef>
+          <a:fillRef idx="0">
+            <a:schemeClr val="accent1"/>
+          </a:fillRef>
+          <a:effectRef idx="1">
+            <a:schemeClr val="accent1"/>
+          </a:effectRef>
+          <a:fontRef idx="minor">
+            <a:schemeClr val="tx1"/>
+          </a:fontRef>
+        </p:style>
+      </p:cxnSp>
+      <p:sp>
+        <p:nvSpPr>
+          <p:cNvPr id="29" name="Rounded Rectangle 28"/>
           <p:cNvSpPr/>
           <p:nvPr/>
         </p:nvSpPr>
         <p:spPr>
           <a:xfrm>
-            <a:off x="3395500" y="2480000"/>
-            <a:ext cx="2625500" cy="660000"/>
+            <a:off x="3410500" y="2650000"/>
+            <a:ext cx="2580500" cy="680000"/>
           </a:xfrm>
           <a:prstGeom prst="roundRect">
             <a:avLst>
-              <a:gd name="adj" fmla="val 12000"/>
+              <a:gd name="adj" fmla="val 11000"/>
             </a:avLst>
           </a:prstGeom>
           <a:solidFill>
@@ -5236,14 +5387,14 @@
       </p:sp>
       <p:sp>
         <p:nvSpPr>
-          <p:cNvPr id="24" name="TextBox 23"/>
+          <p:cNvPr id="30" name="TextBox 29"/>
           <p:cNvSpPr txBox="1"/>
           <p:nvPr/>
         </p:nvSpPr>
         <p:spPr>
           <a:xfrm>
-            <a:off x="3465500" y="2480000"/>
-            <a:ext cx="2485500" cy="660000"/>
+            <a:off x="3480500" y="2650000"/>
+            <a:ext cx="2440500" cy="680000"/>
           </a:xfrm>
           <a:prstGeom prst="rect">
             <a:avLst/>
@@ -5280,66 +5431,57 @@
           </a:p>
         </p:txBody>
       </p:sp>
-      <p:sp>
-        <p:nvSpPr>
-          <p:cNvPr id="25" name="TextBox 24"/>
-          <p:cNvSpPr txBox="1"/>
-          <p:nvPr/>
-        </p:nvSpPr>
-        <p:spPr>
-          <a:xfrm>
-            <a:off x="5981000" y="2480000"/>
-            <a:ext cx="230000" cy="660000"/>
-          </a:xfrm>
-          <a:prstGeom prst="rect">
-            <a:avLst/>
-          </a:prstGeom>
-          <a:noFill/>
-        </p:spPr>
-        <p:txBody>
-          <a:bodyPr wrap="square" anchor="ctr" lIns="0" rIns="0" tIns="0" bIns="0">
-            <a:noAutofit/>
-          </a:bodyPr>
-          <a:lstStyle/>
-          <a:p>
-            <a:pPr algn="ctr" marL="0" indent="0">
-              <a:lnSpc>
-                <a:spcPct val="100000"/>
-              </a:lnSpc>
-              <a:spcBef>
-                <a:spcPts val="0"/>
-              </a:spcBef>
-              <a:spcAft>
-                <a:spcPts val="0"/>
-              </a:spcAft>
-              <a:buNone/>
-            </a:pPr>
-            <a:r>
-              <a:rPr sz="1500" b="0" i="0">
-                <a:solidFill>
-                  <a:srgbClr val="74A6FF"/>
-                </a:solidFill>
-                <a:latin typeface="Segoe UI"/>
-              </a:rPr>
-              <a:t>→</a:t>
-            </a:r>
-          </a:p>
-        </p:txBody>
-      </p:sp>
-      <p:sp>
-        <p:nvSpPr>
-          <p:cNvPr id="26" name="Rounded Rectangle 25"/>
+      <p:cxnSp>
+        <p:nvCxnSpPr>
+          <p:cNvPr id="31" name="Connector 30"/>
+          <p:cNvCxnSpPr/>
+          <p:nvPr/>
+        </p:nvCxnSpPr>
+        <p:spPr>
+          <a:xfrm>
+            <a:off x="6015000" y="2990000"/>
+            <a:ext cx="162000" cy="0"/>
+          </a:xfrm>
+          <a:prstGeom prst="line">
+            <a:avLst/>
+          </a:prstGeom>
+          <a:ln w="22225">
+            <a:solidFill>
+              <a:srgbClr val="74A6FF"/>
+            </a:solidFill>
+            <a:tailEnd type="triangle" w="med" len="med"/>
+          </a:ln>
+          <a:effectLst/>
+        </p:spPr>
+        <p:style>
+          <a:lnRef idx="2">
+            <a:schemeClr val="accent1"/>
+          </a:lnRef>
+          <a:fillRef idx="0">
+            <a:schemeClr val="accent1"/>
+          </a:fillRef>
+          <a:effectRef idx="1">
+            <a:schemeClr val="accent1"/>
+          </a:effectRef>
+          <a:fontRef idx="minor">
+            <a:schemeClr val="tx1"/>
+          </a:fontRef>
+        </p:style>
+      </p:cxnSp>
+      <p:sp>
+        <p:nvSpPr>
+          <p:cNvPr id="32" name="Rounded Rectangle 31"/>
           <p:cNvSpPr/>
           <p:nvPr/>
         </p:nvSpPr>
         <p:spPr>
           <a:xfrm>
-            <a:off x="6171000" y="2480000"/>
-            <a:ext cx="2625500" cy="660000"/>
+            <a:off x="6201000" y="2650000"/>
+            <a:ext cx="2580500" cy="680000"/>
           </a:xfrm>
           <a:prstGeom prst="roundRect">
             <a:avLst>
-              <a:gd name="adj" fmla="val 12000"/>
+              <a:gd name="adj" fmla="val 11000"/>
             </a:avLst>
           </a:prstGeom>
           <a:solidFill>
@@ -5378,14 +5520,14 @@
       </p:sp>
       <p:sp>
         <p:nvSpPr>
-          <p:cNvPr id="27" name="TextBox 26"/>
+          <p:cNvPr id="33" name="TextBox 32"/>
           <p:cNvSpPr txBox="1"/>
           <p:nvPr/>
         </p:nvSpPr>
         <p:spPr>
           <a:xfrm>
-            <a:off x="6241000" y="2480000"/>
-            <a:ext cx="2485500" cy="660000"/>
+            <a:off x="6271000" y="2650000"/>
+            <a:ext cx="2440500" cy="680000"/>
           </a:xfrm>
           <a:prstGeom prst="rect">
             <a:avLst/>
@@ -5422,66 +5564,57 @@
           </a:p>
         </p:txBody>
       </p:sp>
-      <p:sp>
-        <p:nvSpPr>
-          <p:cNvPr id="28" name="TextBox 27"/>
-          <p:cNvSpPr txBox="1"/>
-          <p:nvPr/>
-        </p:nvSpPr>
-        <p:spPr>
-          <a:xfrm>
-            <a:off x="8756500" y="2480000"/>
-            <a:ext cx="230000" cy="660000"/>
-          </a:xfrm>
-          <a:prstGeom prst="rect">
-            <a:avLst/>
-          </a:prstGeom>
-          <a:noFill/>
-        </p:spPr>
-        <p:txBody>
-          <a:bodyPr wrap="square" anchor="ctr" lIns="0" rIns="0" tIns="0" bIns="0">
-            <a:noAutofit/>
-          </a:bodyPr>
-          <a:lstStyle/>
-          <a:p>
-            <a:pPr algn="ctr" marL="0" indent="0">
-              <a:lnSpc>
-                <a:spcPct val="100000"/>
-              </a:lnSpc>
-              <a:spcBef>
-                <a:spcPts val="0"/>
-              </a:spcBef>
-              <a:spcAft>
-                <a:spcPts val="0"/>
-              </a:spcAft>
-              <a:buNone/>
-            </a:pPr>
-            <a:r>
-              <a:rPr sz="1500" b="0" i="0">
-                <a:solidFill>
-                  <a:srgbClr val="74A6FF"/>
-                </a:solidFill>
-                <a:latin typeface="Segoe UI"/>
-              </a:rPr>
-              <a:t>→</a:t>
-            </a:r>
-          </a:p>
-        </p:txBody>
-      </p:sp>
-      <p:sp>
-        <p:nvSpPr>
-          <p:cNvPr id="29" name="Rounded Rectangle 28"/>
+      <p:cxnSp>
+        <p:nvCxnSpPr>
+          <p:cNvPr id="34" name="Connector 33"/>
+          <p:cNvCxnSpPr/>
+          <p:nvPr/>
+        </p:nvCxnSpPr>
+        <p:spPr>
+          <a:xfrm>
+            <a:off x="8805500" y="2990000"/>
+            <a:ext cx="162000" cy="0"/>
+          </a:xfrm>
+          <a:prstGeom prst="line">
+            <a:avLst/>
+          </a:prstGeom>
+          <a:ln w="22225">
+            <a:solidFill>
+              <a:srgbClr val="74A6FF"/>
+            </a:solidFill>
+            <a:tailEnd type="triangle" w="med" len="med"/>
+          </a:ln>
+          <a:effectLst/>
+        </p:spPr>
+        <p:style>
+          <a:lnRef idx="2">
+            <a:schemeClr val="accent1"/>
+          </a:lnRef>
+          <a:fillRef idx="0">
+            <a:schemeClr val="accent1"/>
+          </a:fillRef>
+          <a:effectRef idx="1">
+            <a:schemeClr val="accent1"/>
+          </a:effectRef>
+          <a:fontRef idx="minor">
+            <a:schemeClr val="tx1"/>
+          </a:fontRef>
+        </p:style>
+      </p:cxnSp>
+      <p:sp>
+        <p:nvSpPr>
+          <p:cNvPr id="35" name="Rounded Rectangle 34"/>
           <p:cNvSpPr/>
           <p:nvPr/>
         </p:nvSpPr>
         <p:spPr>
           <a:xfrm>
-            <a:off x="8946500" y="2480000"/>
-            <a:ext cx="2625500" cy="660000"/>
+            <a:off x="8991500" y="2650000"/>
+            <a:ext cx="2580500" cy="680000"/>
           </a:xfrm>
           <a:prstGeom prst="roundRect">
             <a:avLst>
-              <a:gd name="adj" fmla="val 12000"/>
+              <a:gd name="adj" fmla="val 11000"/>
             </a:avLst>
           </a:prstGeom>
           <a:solidFill>
@@ -5520,14 +5653,14 @@
       </p:sp>
       <p:sp>
         <p:nvSpPr>
-          <p:cNvPr id="30" name="TextBox 29"/>
+          <p:cNvPr id="36" name="TextBox 35"/>
           <p:cNvSpPr txBox="1"/>
           <p:nvPr/>
         </p:nvSpPr>
         <p:spPr>
           <a:xfrm>
-            <a:off x="9016500" y="2480000"/>
-            <a:ext cx="2485500" cy="660000"/>
+            <a:off x="9061500" y="2650000"/>
+            <a:ext cx="2440500" cy="680000"/>
           </a:xfrm>
           <a:prstGeom prst="rect">
             <a:avLst/>
@@ -5566,13 +5699,13 @@
       </p:sp>
       <p:sp>
         <p:nvSpPr>
-          <p:cNvPr id="31" name="Rounded Rectangle 30"/>
+          <p:cNvPr id="37" name="Rounded Rectangle 36"/>
           <p:cNvSpPr/>
           <p:nvPr/>
         </p:nvSpPr>
         <p:spPr>
           <a:xfrm>
-            <a:off x="620000" y="3460000"/>
+            <a:off x="620000" y="3690000"/>
             <a:ext cx="10952000" cy="2070000"/>
           </a:xfrm>
           <a:prstGeom prst="roundRect">
@@ -5616,13 +5749,13 @@
       </p:sp>
       <p:sp>
         <p:nvSpPr>
-          <p:cNvPr id="32" name="Rectangle 31"/>
+          <p:cNvPr id="38" name="Rectangle 37"/>
           <p:cNvSpPr/>
           <p:nvPr/>
         </p:nvSpPr>
         <p:spPr>
           <a:xfrm>
-            <a:off x="650000" y="3484000"/>
+            <a:off x="650000" y="3714000"/>
             <a:ext cx="40000" cy="2022000"/>
           </a:xfrm>
           <a:prstGeom prst="rect">
@@ -5662,13 +5795,13 @@
       </p:sp>
       <p:sp>
         <p:nvSpPr>
-          <p:cNvPr id="33" name="TextBox 32"/>
+          <p:cNvPr id="39" name="TextBox 38"/>
           <p:cNvSpPr txBox="1"/>
           <p:nvPr/>
         </p:nvSpPr>
         <p:spPr>
           <a:xfrm>
-            <a:off x="880000" y="3700000"/>
+            <a:off x="880000" y="3930000"/>
             <a:ext cx="10432000" cy="1670000"/>
           </a:xfrm>
           <a:prstGeom prst="rect">
@@ -5907,7 +6040,7 @@
         <p:spPr>
           <a:xfrm>
             <a:off x="620000" y="560000"/>
-            <a:ext cx="10952000" cy="620000"/>
+            <a:ext cx="10052000" cy="620000"/>
           </a:xfrm>
           <a:prstGeom prst="rect">
             <a:avLst/>
@@ -6130,7 +6263,151 @@
       </p:sp>
       <p:sp>
         <p:nvSpPr>
-          <p:cNvPr id="8" name="TextBox 7"/>
+          <p:cNvPr id="8" name="Freeform 7"/>
+          <p:cNvSpPr/>
+          <p:nvPr/>
+        </p:nvSpPr>
+        <p:spPr>
+          <a:xfrm>
+            <a:off x="10970400" y="326200"/>
+            <a:ext cx="563200" cy="512000"/>
+          </a:xfrm>
+          <a:custGeom>
+            <a:avLst/>
+            <a:gdLst/>
+            <a:ahLst/>
+            <a:cxnLst/>
+            <a:rect l="l" t="t" r="r" b="b"/>
+            <a:pathLst>
+              <a:path w="563200" h="512000">
+                <a:moveTo>
+                  <a:pt x="281600" y="0"/>
+                </a:moveTo>
+                <a:lnTo>
+                  <a:pt x="563200" y="512000"/>
+                </a:lnTo>
+                <a:lnTo>
+                  <a:pt x="0" y="512000"/>
+                </a:lnTo>
+                <a:close/>
+              </a:path>
+            </a:pathLst>
+          </a:custGeom>
+          <a:noFill/>
+          <a:ln w="38100">
+            <a:solidFill>
+              <a:srgbClr val="F0C96B"/>
+            </a:solidFill>
+          </a:ln>
+          <a:effectLst/>
+        </p:spPr>
+        <p:style>
+          <a:lnRef idx="1">
+            <a:schemeClr val="accent1"/>
+          </a:lnRef>
+          <a:fillRef idx="3">
+            <a:schemeClr val="accent1"/>
+          </a:fillRef>
+          <a:effectRef idx="2">
+            <a:schemeClr val="accent1"/>
+          </a:effectRef>
+          <a:fontRef idx="minor">
+            <a:schemeClr val="lt1"/>
+          </a:fontRef>
+        </p:style>
+        <p:txBody>
+          <a:bodyPr rtlCol="0" anchor="ctr"/>
+          <a:lstStyle/>
+          <a:p>
+            <a:pPr algn="ctr"/>
+          </a:p>
+        </p:txBody>
+      </p:sp>
+      <p:cxnSp>
+        <p:nvCxnSpPr>
+          <p:cNvPr id="9" name="Connector 8"/>
+          <p:cNvCxnSpPr/>
+          <p:nvPr/>
+        </p:nvCxnSpPr>
+        <p:spPr>
+          <a:xfrm>
+            <a:off x="11252000" y="518200"/>
+            <a:ext cx="0" cy="153600"/>
+          </a:xfrm>
+          <a:prstGeom prst="line">
+            <a:avLst/>
+          </a:prstGeom>
+          <a:ln w="49530">
+            <a:solidFill>
+              <a:srgbClr val="F0C96B"/>
+            </a:solidFill>
+          </a:ln>
+          <a:effectLst/>
+        </p:spPr>
+        <p:style>
+          <a:lnRef idx="2">
+            <a:schemeClr val="accent1"/>
+          </a:lnRef>
+          <a:fillRef idx="0">
+            <a:schemeClr val="accent1"/>
+          </a:fillRef>
+          <a:effectRef idx="1">
+            <a:schemeClr val="accent1"/>
+          </a:effectRef>
+          <a:fontRef idx="minor">
+            <a:schemeClr val="tx1"/>
+          </a:fontRef>
+        </p:style>
+      </p:cxnSp>
+      <p:sp>
+        <p:nvSpPr>
+          <p:cNvPr id="10" name="Oval 9"/>
+          <p:cNvSpPr/>
+          <p:nvPr/>
+        </p:nvSpPr>
+        <p:spPr>
+          <a:xfrm>
+            <a:off x="11220000" y="716600"/>
+            <a:ext cx="64000" cy="64000"/>
+          </a:xfrm>
+          <a:prstGeom prst="ellipse">
+            <a:avLst/>
+          </a:prstGeom>
+          <a:solidFill>
+            <a:srgbClr val="F0C96B"/>
+          </a:solidFill>
+          <a:ln w="6350">
+            <a:solidFill>
+              <a:srgbClr val="F0C96B"/>
+            </a:solidFill>
+          </a:ln>
+          <a:effectLst/>
+        </p:spPr>
+        <p:style>
+          <a:lnRef idx="1">
+            <a:schemeClr val="accent1"/>
+          </a:lnRef>
+          <a:fillRef idx="3">
+            <a:schemeClr val="accent1"/>
+          </a:fillRef>
+          <a:effectRef idx="2">
+            <a:schemeClr val="accent1"/>
+          </a:effectRef>
+          <a:fontRef idx="minor">
+            <a:schemeClr val="lt1"/>
+          </a:fontRef>
+        </p:style>
+        <p:txBody>
+          <a:bodyPr rtlCol="0" anchor="ctr"/>
+          <a:lstStyle/>
+          <a:p>
+            <a:pPr algn="ctr"/>
+          </a:p>
+        </p:txBody>
+      </p:sp>
+      <p:sp>
+        <p:nvSpPr>
+          <p:cNvPr id="11" name="TextBox 10"/>
           <p:cNvSpPr txBox="1"/>
           <p:nvPr/>
         </p:nvSpPr>
@@ -6176,7 +6453,7 @@
       </p:sp>
       <p:sp>
         <p:nvSpPr>
-          <p:cNvPr id="9" name="Rounded Rectangle 8"/>
+          <p:cNvPr id="12" name="Rounded Rectangle 11"/>
           <p:cNvSpPr/>
           <p:nvPr/>
         </p:nvSpPr>
@@ -6226,7 +6503,7 @@
       </p:sp>
       <p:sp>
         <p:nvSpPr>
-          <p:cNvPr id="10" name="Rectangle 9"/>
+          <p:cNvPr id="13" name="Rectangle 12"/>
           <p:cNvSpPr/>
           <p:nvPr/>
         </p:nvSpPr>
@@ -6272,7 +6549,7 @@
       </p:sp>
       <p:sp>
         <p:nvSpPr>
-          <p:cNvPr id="11" name="TextBox 10"/>
+          <p:cNvPr id="14" name="TextBox 13"/>
           <p:cNvSpPr txBox="1"/>
           <p:nvPr/>
         </p:nvSpPr>
@@ -6454,7 +6731,7 @@
         <p:spPr>
           <a:xfrm>
             <a:off x="620000" y="560000"/>
-            <a:ext cx="10952000" cy="620000"/>
+            <a:ext cx="10052000" cy="620000"/>
           </a:xfrm>
           <a:prstGeom prst="rect">
             <a:avLst/>
@@ -6675,9 +6952,33 @@
           </a:p>
         </p:txBody>
       </p:sp>
-      <p:sp>
-        <p:nvSpPr>
-          <p:cNvPr id="8" name="Rounded Rectangle 7"/>
+      <p:pic>
+        <p:nvPicPr>
+          <p:cNvPr id="8" name="Picture 7" descr="control-plane.png"/>
+          <p:cNvPicPr>
+            <a:picLocks noChangeAspect="1"/>
+          </p:cNvPicPr>
+          <p:nvPr/>
+        </p:nvPicPr>
+        <p:blipFill>
+          <a:blip r:embed="rId2"/>
+          <a:stretch>
+            <a:fillRect/>
+          </a:stretch>
+        </p:blipFill>
+        <p:spPr>
+          <a:xfrm>
+            <a:off x="10932000" y="275000"/>
+            <a:ext cx="640000" cy="640000"/>
+          </a:xfrm>
+          <a:prstGeom prst="rect">
+            <a:avLst/>
+          </a:prstGeom>
+        </p:spPr>
+      </p:pic>
+      <p:sp>
+        <p:nvSpPr>
+          <p:cNvPr id="9" name="Rounded Rectangle 8"/>
           <p:cNvSpPr/>
           <p:nvPr/>
         </p:nvSpPr>
@@ -6727,7 +7028,7 @@
       </p:sp>
       <p:sp>
         <p:nvSpPr>
-          <p:cNvPr id="9" name="Rectangle 8"/>
+          <p:cNvPr id="10" name="Rectangle 9"/>
           <p:cNvSpPr/>
           <p:nvPr/>
         </p:nvSpPr>
@@ -6773,7 +7074,7 @@
       </p:sp>
       <p:sp>
         <p:nvSpPr>
-          <p:cNvPr id="10" name="TextBox 9"/>
+          <p:cNvPr id="11" name="TextBox 10"/>
           <p:cNvSpPr txBox="1"/>
           <p:nvPr/>
         </p:nvSpPr>
@@ -6819,7 +7120,7 @@
       </p:sp>
       <p:sp>
         <p:nvSpPr>
-          <p:cNvPr id="11" name="TextBox 10"/>
+          <p:cNvPr id="12" name="TextBox 11"/>
           <p:cNvSpPr txBox="1"/>
           <p:nvPr/>
         </p:nvSpPr>
@@ -6982,7 +7283,7 @@
       </p:sp>
       <p:sp>
         <p:nvSpPr>
-          <p:cNvPr id="12" name="Rounded Rectangle 11"/>
+          <p:cNvPr id="13" name="Rounded Rectangle 12"/>
           <p:cNvSpPr/>
           <p:nvPr/>
         </p:nvSpPr>
@@ -7032,7 +7333,7 @@
       </p:sp>
       <p:sp>
         <p:nvSpPr>
-          <p:cNvPr id="13" name="Rectangle 12"/>
+          <p:cNvPr id="14" name="Rectangle 13"/>
           <p:cNvSpPr/>
           <p:nvPr/>
         </p:nvSpPr>
@@ -7078,7 +7379,7 @@
       </p:sp>
       <p:sp>
         <p:nvSpPr>
-          <p:cNvPr id="14" name="TextBox 13"/>
+          <p:cNvPr id="15" name="TextBox 14"/>
           <p:cNvSpPr txBox="1"/>
           <p:nvPr/>
         </p:nvSpPr>
@@ -7124,7 +7425,7 @@
       </p:sp>
       <p:sp>
         <p:nvSpPr>
-          <p:cNvPr id="15" name="TextBox 14"/>
+          <p:cNvPr id="16" name="TextBox 15"/>
           <p:cNvSpPr txBox="1"/>
           <p:nvPr/>
         </p:nvSpPr>
@@ -7176,7 +7477,7 @@
       </p:sp>
       <p:sp>
         <p:nvSpPr>
-          <p:cNvPr id="16" name="Rounded Rectangle 15"/>
+          <p:cNvPr id="17" name="Rounded Rectangle 16"/>
           <p:cNvSpPr/>
           <p:nvPr/>
         </p:nvSpPr>
@@ -7226,7 +7527,7 @@
       </p:sp>
       <p:sp>
         <p:nvSpPr>
-          <p:cNvPr id="17" name="Rectangle 16"/>
+          <p:cNvPr id="18" name="Rectangle 17"/>
           <p:cNvSpPr/>
           <p:nvPr/>
         </p:nvSpPr>
@@ -7272,7 +7573,7 @@
       </p:sp>
       <p:sp>
         <p:nvSpPr>
-          <p:cNvPr id="18" name="TextBox 17"/>
+          <p:cNvPr id="19" name="TextBox 18"/>
           <p:cNvSpPr txBox="1"/>
           <p:nvPr/>
         </p:nvSpPr>
@@ -8108,7 +8409,149 @@
       </p:sp>
       <p:sp>
         <p:nvSpPr>
-          <p:cNvPr id="16" name="Rounded Rectangle 15"/>
+          <p:cNvPr id="16" name="Freeform 15"/>
+          <p:cNvSpPr/>
+          <p:nvPr/>
+        </p:nvSpPr>
+        <p:spPr>
+          <a:xfrm>
+            <a:off x="9590000" y="1418800"/>
+            <a:ext cx="784000" cy="842800"/>
+          </a:xfrm>
+          <a:custGeom>
+            <a:avLst/>
+            <a:gdLst/>
+            <a:ahLst/>
+            <a:cxnLst/>
+            <a:rect l="l" t="t" r="r" b="b"/>
+            <a:pathLst>
+              <a:path w="784000" h="842800">
+                <a:moveTo>
+                  <a:pt x="235200" y="0"/>
+                </a:moveTo>
+                <a:lnTo>
+                  <a:pt x="235200" y="333200"/>
+                </a:lnTo>
+                <a:lnTo>
+                  <a:pt x="0" y="842800"/>
+                </a:lnTo>
+                <a:lnTo>
+                  <a:pt x="784000" y="842800"/>
+                </a:lnTo>
+                <a:lnTo>
+                  <a:pt x="548800" y="333200"/>
+                </a:lnTo>
+                <a:lnTo>
+                  <a:pt x="548800" y="0"/>
+                </a:lnTo>
+              </a:path>
+            </a:pathLst>
+          </a:custGeom>
+          <a:noFill/>
+          <a:ln w="33020">
+            <a:solidFill>
+              <a:srgbClr val="74A6FF"/>
+            </a:solidFill>
+          </a:ln>
+          <a:effectLst/>
+        </p:spPr>
+        <p:style>
+          <a:lnRef idx="1">
+            <a:schemeClr val="accent1"/>
+          </a:lnRef>
+          <a:fillRef idx="3">
+            <a:schemeClr val="accent1"/>
+          </a:fillRef>
+          <a:effectRef idx="2">
+            <a:schemeClr val="accent1"/>
+          </a:effectRef>
+          <a:fontRef idx="minor">
+            <a:schemeClr val="lt1"/>
+          </a:fontRef>
+        </p:style>
+        <p:txBody>
+          <a:bodyPr rtlCol="0" anchor="ctr"/>
+          <a:lstStyle/>
+          <a:p>
+            <a:pPr algn="ctr"/>
+          </a:p>
+        </p:txBody>
+      </p:sp>
+      <p:cxnSp>
+        <p:nvCxnSpPr>
+          <p:cNvPr id="17" name="Connector 16"/>
+          <p:cNvCxnSpPr/>
+          <p:nvPr/>
+        </p:nvCxnSpPr>
+        <p:spPr>
+          <a:xfrm>
+            <a:off x="9766400" y="1418800"/>
+            <a:ext cx="431200" cy="0"/>
+          </a:xfrm>
+          <a:prstGeom prst="line">
+            <a:avLst/>
+          </a:prstGeom>
+          <a:ln w="33020">
+            <a:solidFill>
+              <a:srgbClr val="74A6FF"/>
+            </a:solidFill>
+          </a:ln>
+          <a:effectLst/>
+        </p:spPr>
+        <p:style>
+          <a:lnRef idx="2">
+            <a:schemeClr val="accent1"/>
+          </a:lnRef>
+          <a:fillRef idx="0">
+            <a:schemeClr val="accent1"/>
+          </a:fillRef>
+          <a:effectRef idx="1">
+            <a:schemeClr val="accent1"/>
+          </a:effectRef>
+          <a:fontRef idx="minor">
+            <a:schemeClr val="tx1"/>
+          </a:fontRef>
+        </p:style>
+      </p:cxnSp>
+      <p:cxnSp>
+        <p:nvCxnSpPr>
+          <p:cNvPr id="18" name="Connector 17"/>
+          <p:cNvCxnSpPr/>
+          <p:nvPr/>
+        </p:nvCxnSpPr>
+        <p:spPr>
+          <a:xfrm>
+            <a:off x="9727200" y="2006800"/>
+            <a:ext cx="509600" cy="0"/>
+          </a:xfrm>
+          <a:prstGeom prst="line">
+            <a:avLst/>
+          </a:prstGeom>
+          <a:ln w="33020">
+            <a:solidFill>
+              <a:srgbClr val="74A6FF"/>
+            </a:solidFill>
+          </a:ln>
+          <a:effectLst/>
+        </p:spPr>
+        <p:style>
+          <a:lnRef idx="2">
+            <a:schemeClr val="accent1"/>
+          </a:lnRef>
+          <a:fillRef idx="0">
+            <a:schemeClr val="accent1"/>
+          </a:fillRef>
+          <a:effectRef idx="1">
+            <a:schemeClr val="accent1"/>
+          </a:effectRef>
+          <a:fontRef idx="minor">
+            <a:schemeClr val="tx1"/>
+          </a:fontRef>
+        </p:style>
+      </p:cxnSp>
+      <p:sp>
+        <p:nvSpPr>
+          <p:cNvPr id="19" name="Rounded Rectangle 18"/>
           <p:cNvSpPr/>
           <p:nvPr/>
         </p:nvSpPr>
@@ -8158,7 +8601,7 @@
       </p:sp>
       <p:sp>
         <p:nvSpPr>
-          <p:cNvPr id="17" name="Rectangle 16"/>
+          <p:cNvPr id="20" name="Rectangle 19"/>
           <p:cNvSpPr/>
           <p:nvPr/>
         </p:nvSpPr>
@@ -8204,7 +8647,7 @@
       </p:sp>
       <p:sp>
         <p:nvSpPr>
-          <p:cNvPr id="18" name="TextBox 17"/>
+          <p:cNvPr id="21" name="TextBox 20"/>
           <p:cNvSpPr txBox="1"/>
           <p:nvPr/>
         </p:nvSpPr>
@@ -8273,7 +8716,7 @@
       </p:sp>
       <p:sp>
         <p:nvSpPr>
-          <p:cNvPr id="19" name="Rectangle 18"/>
+          <p:cNvPr id="22" name="Rectangle 21"/>
           <p:cNvSpPr/>
           <p:nvPr/>
         </p:nvSpPr>
@@ -8319,7 +8762,7 @@
       </p:sp>
       <p:sp>
         <p:nvSpPr>
-          <p:cNvPr id="20" name="TextBox 19"/>
+          <p:cNvPr id="23" name="TextBox 22"/>
           <p:cNvSpPr txBox="1"/>
           <p:nvPr/>
         </p:nvSpPr>
@@ -8388,7 +8831,7 @@
       </p:sp>
       <p:sp>
         <p:nvSpPr>
-          <p:cNvPr id="21" name="Rectangle 20"/>
+          <p:cNvPr id="24" name="Rectangle 23"/>
           <p:cNvSpPr/>
           <p:nvPr/>
         </p:nvSpPr>
@@ -8434,7 +8877,7 @@
       </p:sp>
       <p:sp>
         <p:nvSpPr>
-          <p:cNvPr id="22" name="TextBox 21"/>
+          <p:cNvPr id="25" name="TextBox 24"/>
           <p:cNvSpPr txBox="1"/>
           <p:nvPr/>
         </p:nvSpPr>
@@ -8503,7 +8946,7 @@
       </p:sp>
       <p:sp>
         <p:nvSpPr>
-          <p:cNvPr id="23" name="Rectangle 22"/>
+          <p:cNvPr id="26" name="Rectangle 25"/>
           <p:cNvSpPr/>
           <p:nvPr/>
         </p:nvSpPr>
@@ -8549,7 +8992,7 @@
       </p:sp>
       <p:sp>
         <p:nvSpPr>
-          <p:cNvPr id="24" name="TextBox 23"/>
+          <p:cNvPr id="27" name="TextBox 26"/>
           <p:cNvSpPr txBox="1"/>
           <p:nvPr/>
         </p:nvSpPr>
@@ -8595,7 +9038,7 @@
       </p:sp>
       <p:sp>
         <p:nvSpPr>
-          <p:cNvPr id="25" name="TextBox 24"/>
+          <p:cNvPr id="28" name="TextBox 27"/>
           <p:cNvSpPr txBox="1"/>
           <p:nvPr/>
         </p:nvSpPr>
@@ -8709,80 +9152,30 @@
           </a:p>
         </p:txBody>
       </p:sp>
-      <p:sp>
-        <p:nvSpPr>
-          <p:cNvPr id="3" name="Freeform 2"/>
-          <p:cNvSpPr/>
-          <p:nvPr/>
-        </p:nvSpPr>
-        <p:spPr>
-          <a:xfrm>
-            <a:off x="9479608" y="4208000"/>
-            <a:ext cx="2924783" cy="2851453"/>
-          </a:xfrm>
-          <a:custGeom>
-            <a:avLst/>
-            <a:gdLst/>
-            <a:ahLst/>
-            <a:cxnLst/>
-            <a:rect l="l" t="t" r="r" b="b"/>
-            <a:pathLst>
-              <a:path w="2924783" h="2851453">
-                <a:moveTo>
-                  <a:pt x="1462392" y="0"/>
-                </a:moveTo>
-                <a:lnTo>
-                  <a:pt x="2635139" y="564765"/>
-                </a:lnTo>
-                <a:lnTo>
-                  <a:pt x="2924783" y="1833781"/>
-                </a:lnTo>
-                <a:lnTo>
-                  <a:pt x="2113217" y="2851453"/>
-                </a:lnTo>
-                <a:lnTo>
-                  <a:pt x="811566" y="2851453"/>
-                </a:lnTo>
-                <a:lnTo>
-                  <a:pt x="0" y="1833781"/>
-                </a:lnTo>
-                <a:lnTo>
-                  <a:pt x="289644" y="564765"/>
-                </a:lnTo>
-                <a:close/>
-              </a:path>
-            </a:pathLst>
-          </a:custGeom>
-          <a:noFill/>
-          <a:ln w="31750">
-            <a:solidFill>
-              <a:srgbClr val="26354E"/>
-            </a:solidFill>
-          </a:ln>
-          <a:effectLst/>
-        </p:spPr>
-        <p:style>
-          <a:lnRef idx="1">
-            <a:schemeClr val="accent1"/>
-          </a:lnRef>
-          <a:fillRef idx="3">
-            <a:schemeClr val="accent1"/>
-          </a:fillRef>
-          <a:effectRef idx="2">
-            <a:schemeClr val="accent1"/>
-          </a:effectRef>
-          <a:fontRef idx="minor">
-            <a:schemeClr val="lt1"/>
-          </a:fontRef>
-        </p:style>
-        <p:txBody>
-          <a:bodyPr rtlCol="0" anchor="ctr"/>
-          <a:lstStyle/>
-          <a:p>
-            <a:pPr algn="ctr"/>
-          </a:p>
-        </p:txBody>
-      </p:sp>
+      <p:pic>
+        <p:nvPicPr>
+          <p:cNvPr id="3" name="Picture 2" descr="etcd.png"/>
+          <p:cNvPicPr>
+            <a:picLocks noChangeAspect="1"/>
+          </p:cNvPicPr>
+          <p:nvPr/>
+        </p:nvPicPr>
+        <p:blipFill>
+          <a:blip r:embed="rId2"/>
+          <a:stretch>
+            <a:fillRect/>
+          </a:stretch>
+        </p:blipFill>
+        <p:spPr>
+          <a:xfrm>
+            <a:off x="8842000" y="2150000"/>
+            <a:ext cx="1800000" cy="1800000"/>
+          </a:xfrm>
+          <a:prstGeom prst="rect">
+            <a:avLst/>
+          </a:prstGeom>
+        </p:spPr>
+      </p:pic>
       <p:sp>
         <p:nvSpPr>
           <p:cNvPr id="4" name="TextBox 3"/>
@@ -9232,7 +9625,7 @@
         <p:spPr>
           <a:xfrm>
             <a:off x="620000" y="560000"/>
-            <a:ext cx="10952000" cy="620000"/>
+            <a:ext cx="10052000" cy="620000"/>
           </a:xfrm>
           <a:prstGeom prst="rect">
             <a:avLst/>
@@ -9453,9 +9846,33 @@
           </a:p>
         </p:txBody>
       </p:sp>
-      <p:sp>
-        <p:nvSpPr>
-          <p:cNvPr id="8" name="Oval 7"/>
+      <p:pic>
+        <p:nvPicPr>
+          <p:cNvPr id="8" name="Picture 7" descr="etcd.png"/>
+          <p:cNvPicPr>
+            <a:picLocks noChangeAspect="1"/>
+          </p:cNvPicPr>
+          <p:nvPr/>
+        </p:nvPicPr>
+        <p:blipFill>
+          <a:blip r:embed="rId2"/>
+          <a:stretch>
+            <a:fillRect/>
+          </a:stretch>
+        </p:blipFill>
+        <p:spPr>
+          <a:xfrm>
+            <a:off x="10932000" y="275000"/>
+            <a:ext cx="640000" cy="640000"/>
+          </a:xfrm>
+          <a:prstGeom prst="rect">
+            <a:avLst/>
+          </a:prstGeom>
+        </p:spPr>
+      </p:pic>
+      <p:sp>
+        <p:nvSpPr>
+          <p:cNvPr id="9" name="Oval 8"/>
           <p:cNvSpPr/>
           <p:nvPr/>
         </p:nvSpPr>
@@ -9499,7 +9916,7 @@
       </p:sp>
       <p:sp>
         <p:nvSpPr>
-          <p:cNvPr id="9" name="TextBox 8"/>
+          <p:cNvPr id="10" name="TextBox 9"/>
           <p:cNvSpPr txBox="1"/>
           <p:nvPr/>
         </p:nvSpPr>
@@ -9545,7 +9962,7 @@
       </p:sp>
       <p:sp>
         <p:nvSpPr>
-          <p:cNvPr id="10" name="Oval 9"/>
+          <p:cNvPr id="11" name="Oval 10"/>
           <p:cNvSpPr/>
           <p:nvPr/>
         </p:nvSpPr>
@@ -9589,7 +10006,7 @@
       </p:sp>
       <p:sp>
         <p:nvSpPr>
-          <p:cNvPr id="11" name="TextBox 10"/>
+          <p:cNvPr id="12" name="TextBox 11"/>
           <p:cNvSpPr txBox="1"/>
           <p:nvPr/>
         </p:nvSpPr>
@@ -9635,7 +10052,7 @@
       </p:sp>
       <p:sp>
         <p:nvSpPr>
-          <p:cNvPr id="12" name="Oval 11"/>
+          <p:cNvPr id="13" name="Oval 12"/>
           <p:cNvSpPr/>
           <p:nvPr/>
         </p:nvSpPr>
@@ -9679,7 +10096,7 @@
       </p:sp>
       <p:sp>
         <p:nvSpPr>
-          <p:cNvPr id="13" name="TextBox 12"/>
+          <p:cNvPr id="14" name="TextBox 13"/>
           <p:cNvSpPr txBox="1"/>
           <p:nvPr/>
         </p:nvSpPr>
@@ -9725,7 +10142,7 @@
       </p:sp>
       <p:sp>
         <p:nvSpPr>
-          <p:cNvPr id="14" name="Oval 13"/>
+          <p:cNvPr id="15" name="Oval 14"/>
           <p:cNvSpPr/>
           <p:nvPr/>
         </p:nvSpPr>
@@ -9769,7 +10186,7 @@
       </p:sp>
       <p:sp>
         <p:nvSpPr>
-          <p:cNvPr id="15" name="TextBox 14"/>
+          <p:cNvPr id="16" name="TextBox 15"/>
           <p:cNvSpPr txBox="1"/>
           <p:nvPr/>
         </p:nvSpPr>
@@ -9815,7 +10232,7 @@
       </p:sp>
       <p:sp>
         <p:nvSpPr>
-          <p:cNvPr id="16" name="Rounded Rectangle 15"/>
+          <p:cNvPr id="17" name="Rounded Rectangle 16"/>
           <p:cNvSpPr/>
           <p:nvPr/>
         </p:nvSpPr>
@@ -9865,7 +10282,7 @@
       </p:sp>
       <p:sp>
         <p:nvSpPr>
-          <p:cNvPr id="17" name="Rectangle 16"/>
+          <p:cNvPr id="18" name="Rectangle 17"/>
           <p:cNvSpPr/>
           <p:nvPr/>
         </p:nvSpPr>
@@ -9911,7 +10328,7 @@
       </p:sp>
       <p:sp>
         <p:nvSpPr>
-          <p:cNvPr id="18" name="TextBox 17"/>
+          <p:cNvPr id="19" name="TextBox 18"/>
           <p:cNvSpPr txBox="1"/>
           <p:nvPr/>
         </p:nvSpPr>
@@ -9957,7 +10374,7 @@
       </p:sp>
       <p:sp>
         <p:nvSpPr>
-          <p:cNvPr id="19" name="Rectangle 18"/>
+          <p:cNvPr id="20" name="Rectangle 19"/>
           <p:cNvSpPr/>
           <p:nvPr/>
         </p:nvSpPr>
@@ -10003,7 +10420,7 @@
       </p:sp>
       <p:sp>
         <p:nvSpPr>
-          <p:cNvPr id="20" name="TextBox 19"/>
+          <p:cNvPr id="21" name="TextBox 20"/>
           <p:cNvSpPr txBox="1"/>
           <p:nvPr/>
         </p:nvSpPr>
@@ -10265,7 +10682,7 @@
         <p:spPr>
           <a:xfrm>
             <a:off x="620000" y="560000"/>
-            <a:ext cx="10952000" cy="620000"/>
+            <a:ext cx="10052000" cy="620000"/>
           </a:xfrm>
           <a:prstGeom prst="rect">
             <a:avLst/>
@@ -10486,9 +10903,33 @@
           </a:p>
         </p:txBody>
       </p:sp>
-      <p:sp>
-        <p:nvSpPr>
-          <p:cNvPr id="8" name="Rounded Rectangle 7"/>
+      <p:pic>
+        <p:nvPicPr>
+          <p:cNvPr id="8" name="Picture 7" descr="etcd.png"/>
+          <p:cNvPicPr>
+            <a:picLocks noChangeAspect="1"/>
+          </p:cNvPicPr>
+          <p:nvPr/>
+        </p:nvPicPr>
+        <p:blipFill>
+          <a:blip r:embed="rId2"/>
+          <a:stretch>
+            <a:fillRect/>
+          </a:stretch>
+        </p:blipFill>
+        <p:spPr>
+          <a:xfrm>
+            <a:off x="10932000" y="275000"/>
+            <a:ext cx="640000" cy="640000"/>
+          </a:xfrm>
+          <a:prstGeom prst="rect">
+            <a:avLst/>
+          </a:prstGeom>
+        </p:spPr>
+      </p:pic>
+      <p:sp>
+        <p:nvSpPr>
+          <p:cNvPr id="9" name="Rounded Rectangle 8"/>
           <p:cNvSpPr/>
           <p:nvPr/>
         </p:nvSpPr>
@@ -10538,7 +10979,7 @@
       </p:sp>
       <p:sp>
         <p:nvSpPr>
-          <p:cNvPr id="9" name="Rectangle 8"/>
+          <p:cNvPr id="10" name="Rectangle 9"/>
           <p:cNvSpPr/>
           <p:nvPr/>
         </p:nvSpPr>
@@ -10584,7 +11025,7 @@
       </p:sp>
       <p:sp>
         <p:nvSpPr>
-          <p:cNvPr id="10" name="TextBox 9"/>
+          <p:cNvPr id="11" name="TextBox 10"/>
           <p:cNvSpPr txBox="1"/>
           <p:nvPr/>
         </p:nvSpPr>
@@ -10653,7 +11094,7 @@
       </p:sp>
       <p:sp>
         <p:nvSpPr>
-          <p:cNvPr id="11" name="TextBox 10"/>
+          <p:cNvPr id="12" name="TextBox 11"/>
           <p:cNvSpPr txBox="1"/>
           <p:nvPr/>
         </p:nvSpPr>
@@ -10773,7 +11214,7 @@
       </p:sp>
       <p:sp>
         <p:nvSpPr>
-          <p:cNvPr id="12" name="Rounded Rectangle 11"/>
+          <p:cNvPr id="13" name="Rounded Rectangle 12"/>
           <p:cNvSpPr/>
           <p:nvPr/>
         </p:nvSpPr>
@@ -10823,7 +11264,7 @@
       </p:sp>
       <p:sp>
         <p:nvSpPr>
-          <p:cNvPr id="13" name="Rectangle 12"/>
+          <p:cNvPr id="14" name="Rectangle 13"/>
           <p:cNvSpPr/>
           <p:nvPr/>
         </p:nvSpPr>
@@ -10869,7 +11310,7 @@
       </p:sp>
       <p:sp>
         <p:nvSpPr>
-          <p:cNvPr id="14" name="TextBox 13"/>
+          <p:cNvPr id="15" name="TextBox 14"/>
           <p:cNvSpPr txBox="1"/>
           <p:nvPr/>
         </p:nvSpPr>
@@ -10938,7 +11379,7 @@
       </p:sp>
       <p:sp>
         <p:nvSpPr>
-          <p:cNvPr id="15" name="TextBox 14"/>
+          <p:cNvPr id="16" name="TextBox 15"/>
           <p:cNvSpPr txBox="1"/>
           <p:nvPr/>
         </p:nvSpPr>
@@ -11058,7 +11499,7 @@
       </p:sp>
       <p:sp>
         <p:nvSpPr>
-          <p:cNvPr id="16" name="Rounded Rectangle 15"/>
+          <p:cNvPr id="17" name="Rounded Rectangle 16"/>
           <p:cNvSpPr/>
           <p:nvPr/>
         </p:nvSpPr>
@@ -11108,7 +11549,7 @@
       </p:sp>
       <p:sp>
         <p:nvSpPr>
-          <p:cNvPr id="17" name="Rectangle 16"/>
+          <p:cNvPr id="18" name="Rectangle 17"/>
           <p:cNvSpPr/>
           <p:nvPr/>
         </p:nvSpPr>
@@ -11154,7 +11595,7 @@
       </p:sp>
       <p:sp>
         <p:nvSpPr>
-          <p:cNvPr id="18" name="TextBox 17"/>
+          <p:cNvPr id="19" name="TextBox 18"/>
           <p:cNvSpPr txBox="1"/>
           <p:nvPr/>
         </p:nvSpPr>
@@ -11279,7 +11720,7 @@
         <p:spPr>
           <a:xfrm>
             <a:off x="620000" y="560000"/>
-            <a:ext cx="10952000" cy="620000"/>
+            <a:ext cx="10052000" cy="620000"/>
           </a:xfrm>
           <a:prstGeom prst="rect">
             <a:avLst/>
@@ -11500,9 +11941,33 @@
           </a:p>
         </p:txBody>
       </p:sp>
-      <p:sp>
-        <p:nvSpPr>
-          <p:cNvPr id="8" name="Rounded Rectangle 7"/>
+      <p:pic>
+        <p:nvPicPr>
+          <p:cNvPr id="8" name="Picture 7" descr="etcd.png"/>
+          <p:cNvPicPr>
+            <a:picLocks noChangeAspect="1"/>
+          </p:cNvPicPr>
+          <p:nvPr/>
+        </p:nvPicPr>
+        <p:blipFill>
+          <a:blip r:embed="rId2"/>
+          <a:stretch>
+            <a:fillRect/>
+          </a:stretch>
+        </p:blipFill>
+        <p:spPr>
+          <a:xfrm>
+            <a:off x="10932000" y="275000"/>
+            <a:ext cx="640000" cy="640000"/>
+          </a:xfrm>
+          <a:prstGeom prst="rect">
+            <a:avLst/>
+          </a:prstGeom>
+        </p:spPr>
+      </p:pic>
+      <p:sp>
+        <p:nvSpPr>
+          <p:cNvPr id="9" name="Rounded Rectangle 8"/>
           <p:cNvSpPr/>
           <p:nvPr/>
         </p:nvSpPr>
@@ -11552,7 +12017,7 @@
       </p:sp>
       <p:sp>
         <p:nvSpPr>
-          <p:cNvPr id="9" name="Rectangle 8"/>
+          <p:cNvPr id="10" name="Rectangle 9"/>
           <p:cNvSpPr/>
           <p:nvPr/>
         </p:nvSpPr>
@@ -11598,7 +12063,7 @@
       </p:sp>
       <p:sp>
         <p:nvSpPr>
-          <p:cNvPr id="10" name="TextBox 9"/>
+          <p:cNvPr id="11" name="TextBox 10"/>
           <p:cNvSpPr txBox="1"/>
           <p:nvPr/>
         </p:nvSpPr>
@@ -11644,7 +12109,7 @@
       </p:sp>
       <p:sp>
         <p:nvSpPr>
-          <p:cNvPr id="11" name="TextBox 10"/>
+          <p:cNvPr id="12" name="TextBox 11"/>
           <p:cNvSpPr txBox="1"/>
           <p:nvPr/>
         </p:nvSpPr>
@@ -11767,7 +12232,7 @@
       </p:sp>
       <p:sp>
         <p:nvSpPr>
-          <p:cNvPr id="12" name="Rounded Rectangle 11"/>
+          <p:cNvPr id="13" name="Rounded Rectangle 12"/>
           <p:cNvSpPr/>
           <p:nvPr/>
         </p:nvSpPr>
@@ -11817,7 +12282,7 @@
       </p:sp>
       <p:sp>
         <p:nvSpPr>
-          <p:cNvPr id="13" name="Rectangle 12"/>
+          <p:cNvPr id="14" name="Rectangle 13"/>
           <p:cNvSpPr/>
           <p:nvPr/>
         </p:nvSpPr>
@@ -11863,7 +12328,7 @@
       </p:sp>
       <p:sp>
         <p:nvSpPr>
-          <p:cNvPr id="14" name="TextBox 13"/>
+          <p:cNvPr id="15" name="TextBox 14"/>
           <p:cNvSpPr txBox="1"/>
           <p:nvPr/>
         </p:nvSpPr>
@@ -11909,7 +12374,7 @@
       </p:sp>
       <p:sp>
         <p:nvSpPr>
-          <p:cNvPr id="15" name="TextBox 14"/>
+          <p:cNvPr id="16" name="TextBox 15"/>
           <p:cNvSpPr txBox="1"/>
           <p:nvPr/>
         </p:nvSpPr>
@@ -11972,7 +12437,7 @@
       </p:sp>
       <p:sp>
         <p:nvSpPr>
-          <p:cNvPr id="16" name="Rounded Rectangle 15"/>
+          <p:cNvPr id="17" name="Rounded Rectangle 16"/>
           <p:cNvSpPr/>
           <p:nvPr/>
         </p:nvSpPr>
@@ -12022,7 +12487,7 @@
       </p:sp>
       <p:sp>
         <p:nvSpPr>
-          <p:cNvPr id="17" name="Rectangle 16"/>
+          <p:cNvPr id="18" name="Rectangle 17"/>
           <p:cNvSpPr/>
           <p:nvPr/>
         </p:nvSpPr>
@@ -12068,7 +12533,7 @@
       </p:sp>
       <p:sp>
         <p:nvSpPr>
-          <p:cNvPr id="18" name="TextBox 17"/>
+          <p:cNvPr id="19" name="TextBox 18"/>
           <p:cNvSpPr txBox="1"/>
           <p:nvPr/>
         </p:nvSpPr>
@@ -12904,7 +13369,149 @@
       </p:sp>
       <p:sp>
         <p:nvSpPr>
-          <p:cNvPr id="16" name="Rounded Rectangle 15"/>
+          <p:cNvPr id="16" name="Freeform 15"/>
+          <p:cNvSpPr/>
+          <p:nvPr/>
+        </p:nvSpPr>
+        <p:spPr>
+          <a:xfrm>
+            <a:off x="9590000" y="1418800"/>
+            <a:ext cx="784000" cy="842800"/>
+          </a:xfrm>
+          <a:custGeom>
+            <a:avLst/>
+            <a:gdLst/>
+            <a:ahLst/>
+            <a:cxnLst/>
+            <a:rect l="l" t="t" r="r" b="b"/>
+            <a:pathLst>
+              <a:path w="784000" h="842800">
+                <a:moveTo>
+                  <a:pt x="235200" y="0"/>
+                </a:moveTo>
+                <a:lnTo>
+                  <a:pt x="235200" y="333200"/>
+                </a:lnTo>
+                <a:lnTo>
+                  <a:pt x="0" y="842800"/>
+                </a:lnTo>
+                <a:lnTo>
+                  <a:pt x="784000" y="842800"/>
+                </a:lnTo>
+                <a:lnTo>
+                  <a:pt x="548800" y="333200"/>
+                </a:lnTo>
+                <a:lnTo>
+                  <a:pt x="548800" y="0"/>
+                </a:lnTo>
+              </a:path>
+            </a:pathLst>
+          </a:custGeom>
+          <a:noFill/>
+          <a:ln w="33020">
+            <a:solidFill>
+              <a:srgbClr val="74A6FF"/>
+            </a:solidFill>
+          </a:ln>
+          <a:effectLst/>
+        </p:spPr>
+        <p:style>
+          <a:lnRef idx="1">
+            <a:schemeClr val="accent1"/>
+          </a:lnRef>
+          <a:fillRef idx="3">
+            <a:schemeClr val="accent1"/>
+          </a:fillRef>
+          <a:effectRef idx="2">
+            <a:schemeClr val="accent1"/>
+          </a:effectRef>
+          <a:fontRef idx="minor">
+            <a:schemeClr val="lt1"/>
+          </a:fontRef>
+        </p:style>
+        <p:txBody>
+          <a:bodyPr rtlCol="0" anchor="ctr"/>
+          <a:lstStyle/>
+          <a:p>
+            <a:pPr algn="ctr"/>
+          </a:p>
+        </p:txBody>
+      </p:sp>
+      <p:cxnSp>
+        <p:nvCxnSpPr>
+          <p:cNvPr id="17" name="Connector 16"/>
+          <p:cNvCxnSpPr/>
+          <p:nvPr/>
+        </p:nvCxnSpPr>
+        <p:spPr>
+          <a:xfrm>
+            <a:off x="9766400" y="1418800"/>
+            <a:ext cx="431200" cy="0"/>
+          </a:xfrm>
+          <a:prstGeom prst="line">
+            <a:avLst/>
+          </a:prstGeom>
+          <a:ln w="33020">
+            <a:solidFill>
+              <a:srgbClr val="74A6FF"/>
+            </a:solidFill>
+          </a:ln>
+          <a:effectLst/>
+        </p:spPr>
+        <p:style>
+          <a:lnRef idx="2">
+            <a:schemeClr val="accent1"/>
+          </a:lnRef>
+          <a:fillRef idx="0">
+            <a:schemeClr val="accent1"/>
+          </a:fillRef>
+          <a:effectRef idx="1">
+            <a:schemeClr val="accent1"/>
+          </a:effectRef>
+          <a:fontRef idx="minor">
+            <a:schemeClr val="tx1"/>
+          </a:fontRef>
+        </p:style>
+      </p:cxnSp>
+      <p:cxnSp>
+        <p:nvCxnSpPr>
+          <p:cNvPr id="18" name="Connector 17"/>
+          <p:cNvCxnSpPr/>
+          <p:nvPr/>
+        </p:nvCxnSpPr>
+        <p:spPr>
+          <a:xfrm>
+            <a:off x="9727200" y="2006800"/>
+            <a:ext cx="509600" cy="0"/>
+          </a:xfrm>
+          <a:prstGeom prst="line">
+            <a:avLst/>
+          </a:prstGeom>
+          <a:ln w="33020">
+            <a:solidFill>
+              <a:srgbClr val="74A6FF"/>
+            </a:solidFill>
+          </a:ln>
+          <a:effectLst/>
+        </p:spPr>
+        <p:style>
+          <a:lnRef idx="2">
+            <a:schemeClr val="accent1"/>
+          </a:lnRef>
+          <a:fillRef idx="0">
+            <a:schemeClr val="accent1"/>
+          </a:fillRef>
+          <a:effectRef idx="1">
+            <a:schemeClr val="accent1"/>
+          </a:effectRef>
+          <a:fontRef idx="minor">
+            <a:schemeClr val="tx1"/>
+          </a:fontRef>
+        </p:style>
+      </p:cxnSp>
+      <p:sp>
+        <p:nvSpPr>
+          <p:cNvPr id="19" name="Rounded Rectangle 18"/>
           <p:cNvSpPr/>
           <p:nvPr/>
         </p:nvSpPr>
@@ -12954,7 +13561,7 @@
       </p:sp>
       <p:sp>
         <p:nvSpPr>
-          <p:cNvPr id="17" name="Rectangle 16"/>
+          <p:cNvPr id="20" name="Rectangle 19"/>
           <p:cNvSpPr/>
           <p:nvPr/>
         </p:nvSpPr>
@@ -13000,7 +13607,7 @@
       </p:sp>
       <p:sp>
         <p:nvSpPr>
-          <p:cNvPr id="18" name="TextBox 17"/>
+          <p:cNvPr id="21" name="TextBox 20"/>
           <p:cNvSpPr txBox="1"/>
           <p:nvPr/>
         </p:nvSpPr>
@@ -13069,7 +13676,7 @@
       </p:sp>
       <p:sp>
         <p:nvSpPr>
-          <p:cNvPr id="19" name="Rectangle 18"/>
+          <p:cNvPr id="22" name="Rectangle 21"/>
           <p:cNvSpPr/>
           <p:nvPr/>
         </p:nvSpPr>
@@ -13115,7 +13722,7 @@
       </p:sp>
       <p:sp>
         <p:nvSpPr>
-          <p:cNvPr id="20" name="TextBox 19"/>
+          <p:cNvPr id="23" name="TextBox 22"/>
           <p:cNvSpPr txBox="1"/>
           <p:nvPr/>
         </p:nvSpPr>
@@ -13184,7 +13791,7 @@
       </p:sp>
       <p:sp>
         <p:nvSpPr>
-          <p:cNvPr id="21" name="Rectangle 20"/>
+          <p:cNvPr id="24" name="Rectangle 23"/>
           <p:cNvSpPr/>
           <p:nvPr/>
         </p:nvSpPr>
@@ -13230,7 +13837,7 @@
       </p:sp>
       <p:sp>
         <p:nvSpPr>
-          <p:cNvPr id="22" name="TextBox 21"/>
+          <p:cNvPr id="25" name="TextBox 24"/>
           <p:cNvSpPr txBox="1"/>
           <p:nvPr/>
         </p:nvSpPr>
@@ -13299,7 +13906,7 @@
       </p:sp>
       <p:sp>
         <p:nvSpPr>
-          <p:cNvPr id="23" name="Rectangle 22"/>
+          <p:cNvPr id="26" name="Rectangle 25"/>
           <p:cNvSpPr/>
           <p:nvPr/>
         </p:nvSpPr>
@@ -13345,7 +13952,7 @@
       </p:sp>
       <p:sp>
         <p:nvSpPr>
-          <p:cNvPr id="24" name="TextBox 23"/>
+          <p:cNvPr id="27" name="TextBox 26"/>
           <p:cNvSpPr txBox="1"/>
           <p:nvPr/>
         </p:nvSpPr>
@@ -13391,7 +13998,7 @@
       </p:sp>
       <p:sp>
         <p:nvSpPr>
-          <p:cNvPr id="25" name="TextBox 24"/>
+          <p:cNvPr id="28" name="TextBox 27"/>
           <p:cNvSpPr txBox="1"/>
           <p:nvPr/>
         </p:nvSpPr>
@@ -13505,80 +14112,30 @@
           </a:p>
         </p:txBody>
       </p:sp>
-      <p:sp>
-        <p:nvSpPr>
-          <p:cNvPr id="3" name="Freeform 2"/>
-          <p:cNvSpPr/>
-          <p:nvPr/>
-        </p:nvSpPr>
-        <p:spPr>
-          <a:xfrm>
-            <a:off x="9479608" y="4208000"/>
-            <a:ext cx="2924783" cy="2851453"/>
-          </a:xfrm>
-          <a:custGeom>
-            <a:avLst/>
-            <a:gdLst/>
-            <a:ahLst/>
-            <a:cxnLst/>
-            <a:rect l="l" t="t" r="r" b="b"/>
-            <a:pathLst>
-              <a:path w="2924783" h="2851453">
-                <a:moveTo>
-                  <a:pt x="1462392" y="0"/>
-                </a:moveTo>
-                <a:lnTo>
-                  <a:pt x="2635139" y="564765"/>
-                </a:lnTo>
-                <a:lnTo>
-                  <a:pt x="2924783" y="1833781"/>
-                </a:lnTo>
-                <a:lnTo>
-                  <a:pt x="2113217" y="2851453"/>
-                </a:lnTo>
-                <a:lnTo>
-                  <a:pt x="811566" y="2851453"/>
-                </a:lnTo>
-                <a:lnTo>
-                  <a:pt x="0" y="1833781"/>
-                </a:lnTo>
-                <a:lnTo>
-                  <a:pt x="289644" y="564765"/>
-                </a:lnTo>
-                <a:close/>
-              </a:path>
-            </a:pathLst>
-          </a:custGeom>
-          <a:noFill/>
-          <a:ln w="31750">
-            <a:solidFill>
-              <a:srgbClr val="26354E"/>
-            </a:solidFill>
-          </a:ln>
-          <a:effectLst/>
-        </p:spPr>
-        <p:style>
-          <a:lnRef idx="1">
-            <a:schemeClr val="accent1"/>
-          </a:lnRef>
-          <a:fillRef idx="3">
-            <a:schemeClr val="accent1"/>
-          </a:fillRef>
-          <a:effectRef idx="2">
-            <a:schemeClr val="accent1"/>
-          </a:effectRef>
-          <a:fontRef idx="minor">
-            <a:schemeClr val="lt1"/>
-          </a:fontRef>
-        </p:style>
-        <p:txBody>
-          <a:bodyPr rtlCol="0" anchor="ctr"/>
-          <a:lstStyle/>
-          <a:p>
-            <a:pPr algn="ctr"/>
-          </a:p>
-        </p:txBody>
-      </p:sp>
+      <p:pic>
+        <p:nvPicPr>
+          <p:cNvPr id="3" name="Picture 2" descr="role.png"/>
+          <p:cNvPicPr>
+            <a:picLocks noChangeAspect="1"/>
+          </p:cNvPicPr>
+          <p:nvPr/>
+        </p:nvPicPr>
+        <p:blipFill>
+          <a:blip r:embed="rId2"/>
+          <a:stretch>
+            <a:fillRect/>
+          </a:stretch>
+        </p:blipFill>
+        <p:spPr>
+          <a:xfrm>
+            <a:off x="8842000" y="2150000"/>
+            <a:ext cx="1800000" cy="1800000"/>
+          </a:xfrm>
+          <a:prstGeom prst="rect">
+            <a:avLst/>
+          </a:prstGeom>
+        </p:spPr>
+      </p:pic>
       <p:sp>
         <p:nvSpPr>
           <p:cNvPr id="4" name="TextBox 3"/>
@@ -14028,7 +14585,7 @@
         <p:spPr>
           <a:xfrm>
             <a:off x="620000" y="560000"/>
-            <a:ext cx="10952000" cy="620000"/>
+            <a:ext cx="10052000" cy="620000"/>
           </a:xfrm>
           <a:prstGeom prst="rect">
             <a:avLst/>
@@ -14257,6 +14814,140 @@
         </p:nvSpPr>
         <p:spPr>
           <a:xfrm>
+            <a:off x="10983200" y="326200"/>
+            <a:ext cx="537600" cy="537600"/>
+          </a:xfrm>
+          <a:prstGeom prst="ellipse">
+            <a:avLst/>
+          </a:prstGeom>
+          <a:noFill/>
+          <a:ln w="38100">
+            <a:solidFill>
+              <a:srgbClr val="74A6FF"/>
+            </a:solidFill>
+          </a:ln>
+          <a:effectLst/>
+        </p:spPr>
+        <p:style>
+          <a:lnRef idx="1">
+            <a:schemeClr val="accent1"/>
+          </a:lnRef>
+          <a:fillRef idx="3">
+            <a:schemeClr val="accent1"/>
+          </a:fillRef>
+          <a:effectRef idx="2">
+            <a:schemeClr val="accent1"/>
+          </a:effectRef>
+          <a:fontRef idx="minor">
+            <a:schemeClr val="lt1"/>
+          </a:fontRef>
+        </p:style>
+        <p:txBody>
+          <a:bodyPr rtlCol="0" anchor="ctr"/>
+          <a:lstStyle/>
+          <a:p>
+            <a:pPr algn="ctr"/>
+          </a:p>
+        </p:txBody>
+      </p:sp>
+      <p:sp>
+        <p:nvSpPr>
+          <p:cNvPr id="9" name="Oval 8"/>
+          <p:cNvSpPr/>
+          <p:nvPr/>
+        </p:nvSpPr>
+        <p:spPr>
+          <a:xfrm>
+            <a:off x="11098400" y="441400"/>
+            <a:ext cx="307200" cy="307200"/>
+          </a:xfrm>
+          <a:prstGeom prst="ellipse">
+            <a:avLst/>
+          </a:prstGeom>
+          <a:noFill/>
+          <a:ln w="38100">
+            <a:solidFill>
+              <a:srgbClr val="74A6FF"/>
+            </a:solidFill>
+          </a:ln>
+          <a:effectLst/>
+        </p:spPr>
+        <p:style>
+          <a:lnRef idx="1">
+            <a:schemeClr val="accent1"/>
+          </a:lnRef>
+          <a:fillRef idx="3">
+            <a:schemeClr val="accent1"/>
+          </a:fillRef>
+          <a:effectRef idx="2">
+            <a:schemeClr val="accent1"/>
+          </a:effectRef>
+          <a:fontRef idx="minor">
+            <a:schemeClr val="lt1"/>
+          </a:fontRef>
+        </p:style>
+        <p:txBody>
+          <a:bodyPr rtlCol="0" anchor="ctr"/>
+          <a:lstStyle/>
+          <a:p>
+            <a:pPr algn="ctr"/>
+          </a:p>
+        </p:txBody>
+      </p:sp>
+      <p:sp>
+        <p:nvSpPr>
+          <p:cNvPr id="10" name="Oval 9"/>
+          <p:cNvSpPr/>
+          <p:nvPr/>
+        </p:nvSpPr>
+        <p:spPr>
+          <a:xfrm>
+            <a:off x="11200800" y="543800"/>
+            <a:ext cx="102400" cy="102400"/>
+          </a:xfrm>
+          <a:prstGeom prst="ellipse">
+            <a:avLst/>
+          </a:prstGeom>
+          <a:solidFill>
+            <a:srgbClr val="74A6FF"/>
+          </a:solidFill>
+          <a:ln w="6350">
+            <a:solidFill>
+              <a:srgbClr val="74A6FF"/>
+            </a:solidFill>
+          </a:ln>
+          <a:effectLst/>
+        </p:spPr>
+        <p:style>
+          <a:lnRef idx="1">
+            <a:schemeClr val="accent1"/>
+          </a:lnRef>
+          <a:fillRef idx="3">
+            <a:schemeClr val="accent1"/>
+          </a:fillRef>
+          <a:effectRef idx="2">
+            <a:schemeClr val="accent1"/>
+          </a:effectRef>
+          <a:fontRef idx="minor">
+            <a:schemeClr val="lt1"/>
+          </a:fontRef>
+        </p:style>
+        <p:txBody>
+          <a:bodyPr rtlCol="0" anchor="ctr"/>
+          <a:lstStyle/>
+          <a:p>
+            <a:pPr algn="ctr"/>
+          </a:p>
+        </p:txBody>
+      </p:sp>
+      <p:sp>
+        <p:nvSpPr>
+          <p:cNvPr id="11" name="Oval 10"/>
+          <p:cNvSpPr/>
+          <p:nvPr/>
+        </p:nvSpPr>
+        <p:spPr>
+          <a:xfrm>
             <a:off x="620000" y="2060000"/>
             <a:ext cx="300000" cy="300000"/>
           </a:xfrm>
@@ -14317,7 +15008,7 @@
       </p:sp>
       <p:sp>
         <p:nvSpPr>
-          <p:cNvPr id="9" name="TextBox 8"/>
+          <p:cNvPr id="12" name="TextBox 11"/>
           <p:cNvSpPr txBox="1"/>
           <p:nvPr/>
         </p:nvSpPr>
@@ -14363,7 +15054,7 @@
       </p:sp>
       <p:sp>
         <p:nvSpPr>
-          <p:cNvPr id="10" name="Oval 9"/>
+          <p:cNvPr id="13" name="Oval 12"/>
           <p:cNvSpPr/>
           <p:nvPr/>
         </p:nvSpPr>
@@ -14429,7 +15120,7 @@
       </p:sp>
       <p:sp>
         <p:nvSpPr>
-          <p:cNvPr id="11" name="TextBox 10"/>
+          <p:cNvPr id="14" name="TextBox 13"/>
           <p:cNvSpPr txBox="1"/>
           <p:nvPr/>
         </p:nvSpPr>
@@ -14475,7 +15166,7 @@
       </p:sp>
       <p:sp>
         <p:nvSpPr>
-          <p:cNvPr id="12" name="Oval 11"/>
+          <p:cNvPr id="15" name="Oval 14"/>
           <p:cNvSpPr/>
           <p:nvPr/>
         </p:nvSpPr>
@@ -14541,7 +15232,7 @@
       </p:sp>
       <p:sp>
         <p:nvSpPr>
-          <p:cNvPr id="13" name="TextBox 12"/>
+          <p:cNvPr id="16" name="TextBox 15"/>
           <p:cNvSpPr txBox="1"/>
           <p:nvPr/>
         </p:nvSpPr>
@@ -14587,7 +15278,7 @@
       </p:sp>
       <p:sp>
         <p:nvSpPr>
-          <p:cNvPr id="14" name="Oval 13"/>
+          <p:cNvPr id="17" name="Oval 16"/>
           <p:cNvSpPr/>
           <p:nvPr/>
         </p:nvSpPr>
@@ -14653,7 +15344,7 @@
       </p:sp>
       <p:sp>
         <p:nvSpPr>
-          <p:cNvPr id="15" name="TextBox 14"/>
+          <p:cNvPr id="18" name="TextBox 17"/>
           <p:cNvSpPr txBox="1"/>
           <p:nvPr/>
         </p:nvSpPr>
@@ -14699,7 +15390,7 @@
       </p:sp>
       <p:sp>
         <p:nvSpPr>
-          <p:cNvPr id="16" name="Oval 15"/>
+          <p:cNvPr id="19" name="Oval 18"/>
           <p:cNvSpPr/>
           <p:nvPr/>
         </p:nvSpPr>
@@ -14765,7 +15456,7 @@
       </p:sp>
       <p:sp>
         <p:nvSpPr>
-          <p:cNvPr id="17" name="TextBox 16"/>
+          <p:cNvPr id="20" name="TextBox 19"/>
           <p:cNvSpPr txBox="1"/>
           <p:nvPr/>
         </p:nvSpPr>
@@ -14811,7 +15502,7 @@
       </p:sp>
       <p:sp>
         <p:nvSpPr>
-          <p:cNvPr id="18" name="Oval 17"/>
+          <p:cNvPr id="21" name="Oval 20"/>
           <p:cNvSpPr/>
           <p:nvPr/>
         </p:nvSpPr>
@@ -14877,7 +15568,7 @@
       </p:sp>
       <p:sp>
         <p:nvSpPr>
-          <p:cNvPr id="19" name="TextBox 18"/>
+          <p:cNvPr id="22" name="TextBox 21"/>
           <p:cNvSpPr txBox="1"/>
           <p:nvPr/>
         </p:nvSpPr>
@@ -14923,7 +15614,7 @@
       </p:sp>
       <p:sp>
         <p:nvSpPr>
-          <p:cNvPr id="20" name="Oval 19"/>
+          <p:cNvPr id="23" name="Oval 22"/>
           <p:cNvSpPr/>
           <p:nvPr/>
         </p:nvSpPr>
@@ -14989,7 +15680,7 @@
       </p:sp>
       <p:sp>
         <p:nvSpPr>
-          <p:cNvPr id="21" name="TextBox 20"/>
+          <p:cNvPr id="24" name="TextBox 23"/>
           <p:cNvSpPr txBox="1"/>
           <p:nvPr/>
         </p:nvSpPr>
@@ -15114,7 +15805,7 @@
         <p:spPr>
           <a:xfrm>
             <a:off x="620000" y="560000"/>
-            <a:ext cx="10952000" cy="620000"/>
+            <a:ext cx="10052000" cy="620000"/>
           </a:xfrm>
           <a:prstGeom prst="rect">
             <a:avLst/>
@@ -15335,9 +16026,33 @@
           </a:p>
         </p:txBody>
       </p:sp>
-      <p:sp>
-        <p:nvSpPr>
-          <p:cNvPr id="8" name="Oval 7"/>
+      <p:pic>
+        <p:nvPicPr>
+          <p:cNvPr id="8" name="Picture 7" descr="role.png"/>
+          <p:cNvPicPr>
+            <a:picLocks noChangeAspect="1"/>
+          </p:cNvPicPr>
+          <p:nvPr/>
+        </p:nvPicPr>
+        <p:blipFill>
+          <a:blip r:embed="rId2"/>
+          <a:stretch>
+            <a:fillRect/>
+          </a:stretch>
+        </p:blipFill>
+        <p:spPr>
+          <a:xfrm>
+            <a:off x="10932000" y="275000"/>
+            <a:ext cx="640000" cy="640000"/>
+          </a:xfrm>
+          <a:prstGeom prst="rect">
+            <a:avLst/>
+          </a:prstGeom>
+        </p:spPr>
+      </p:pic>
+      <p:sp>
+        <p:nvSpPr>
+          <p:cNvPr id="9" name="Oval 8"/>
           <p:cNvSpPr/>
           <p:nvPr/>
         </p:nvSpPr>
@@ -15381,7 +16096,7 @@
       </p:sp>
       <p:sp>
         <p:nvSpPr>
-          <p:cNvPr id="9" name="TextBox 8"/>
+          <p:cNvPr id="10" name="TextBox 9"/>
           <p:cNvSpPr txBox="1"/>
           <p:nvPr/>
         </p:nvSpPr>
@@ -15427,7 +16142,7 @@
       </p:sp>
       <p:sp>
         <p:nvSpPr>
-          <p:cNvPr id="10" name="Oval 9"/>
+          <p:cNvPr id="11" name="Oval 10"/>
           <p:cNvSpPr/>
           <p:nvPr/>
         </p:nvSpPr>
@@ -15471,7 +16186,7 @@
       </p:sp>
       <p:sp>
         <p:nvSpPr>
-          <p:cNvPr id="11" name="TextBox 10"/>
+          <p:cNvPr id="12" name="TextBox 11"/>
           <p:cNvSpPr txBox="1"/>
           <p:nvPr/>
         </p:nvSpPr>
@@ -15517,7 +16232,7 @@
       </p:sp>
       <p:sp>
         <p:nvSpPr>
-          <p:cNvPr id="12" name="Oval 11"/>
+          <p:cNvPr id="13" name="Oval 12"/>
           <p:cNvSpPr/>
           <p:nvPr/>
         </p:nvSpPr>
@@ -15561,7 +16276,7 @@
       </p:sp>
       <p:sp>
         <p:nvSpPr>
-          <p:cNvPr id="13" name="TextBox 12"/>
+          <p:cNvPr id="14" name="TextBox 13"/>
           <p:cNvSpPr txBox="1"/>
           <p:nvPr/>
         </p:nvSpPr>
@@ -15607,7 +16322,7 @@
       </p:sp>
       <p:sp>
         <p:nvSpPr>
-          <p:cNvPr id="14" name="Oval 13"/>
+          <p:cNvPr id="15" name="Oval 14"/>
           <p:cNvSpPr/>
           <p:nvPr/>
         </p:nvSpPr>
@@ -15651,7 +16366,7 @@
       </p:sp>
       <p:sp>
         <p:nvSpPr>
-          <p:cNvPr id="15" name="TextBox 14"/>
+          <p:cNvPr id="16" name="TextBox 15"/>
           <p:cNvSpPr txBox="1"/>
           <p:nvPr/>
         </p:nvSpPr>
@@ -15697,7 +16412,7 @@
       </p:sp>
       <p:sp>
         <p:nvSpPr>
-          <p:cNvPr id="16" name="Rounded Rectangle 15"/>
+          <p:cNvPr id="17" name="Rounded Rectangle 16"/>
           <p:cNvSpPr/>
           <p:nvPr/>
         </p:nvSpPr>
@@ -15747,7 +16462,7 @@
       </p:sp>
       <p:sp>
         <p:nvSpPr>
-          <p:cNvPr id="17" name="Rectangle 16"/>
+          <p:cNvPr id="18" name="Rectangle 17"/>
           <p:cNvSpPr/>
           <p:nvPr/>
         </p:nvSpPr>
@@ -15793,7 +16508,7 @@
       </p:sp>
       <p:sp>
         <p:nvSpPr>
-          <p:cNvPr id="18" name="TextBox 17"/>
+          <p:cNvPr id="19" name="TextBox 18"/>
           <p:cNvSpPr txBox="1"/>
           <p:nvPr/>
         </p:nvSpPr>
@@ -16014,7 +16729,7 @@
         <p:spPr>
           <a:xfrm>
             <a:off x="620000" y="560000"/>
-            <a:ext cx="10952000" cy="620000"/>
+            <a:ext cx="10052000" cy="620000"/>
           </a:xfrm>
           <a:prstGeom prst="rect">
             <a:avLst/>
@@ -16235,9 +16950,33 @@
           </a:p>
         </p:txBody>
       </p:sp>
-      <p:sp>
-        <p:nvSpPr>
-          <p:cNvPr id="8" name="Rectangle 7"/>
+      <p:pic>
+        <p:nvPicPr>
+          <p:cNvPr id="8" name="Picture 7" descr="role.png"/>
+          <p:cNvPicPr>
+            <a:picLocks noChangeAspect="1"/>
+          </p:cNvPicPr>
+          <p:nvPr/>
+        </p:nvPicPr>
+        <p:blipFill>
+          <a:blip r:embed="rId2"/>
+          <a:stretch>
+            <a:fillRect/>
+          </a:stretch>
+        </p:blipFill>
+        <p:spPr>
+          <a:xfrm>
+            <a:off x="10932000" y="275000"/>
+            <a:ext cx="640000" cy="640000"/>
+          </a:xfrm>
+          <a:prstGeom prst="rect">
+            <a:avLst/>
+          </a:prstGeom>
+        </p:spPr>
+      </p:pic>
+      <p:sp>
+        <p:nvSpPr>
+          <p:cNvPr id="9" name="Rectangle 8"/>
           <p:cNvSpPr/>
           <p:nvPr/>
         </p:nvSpPr>
@@ -16283,7 +17022,7 @@
       </p:sp>
       <p:sp>
         <p:nvSpPr>
-          <p:cNvPr id="9" name="Rectangle 8"/>
+          <p:cNvPr id="10" name="Rectangle 9"/>
           <p:cNvSpPr/>
           <p:nvPr/>
         </p:nvSpPr>
@@ -16329,7 +17068,7 @@
       </p:sp>
       <p:sp>
         <p:nvSpPr>
-          <p:cNvPr id="10" name="TextBox 9"/>
+          <p:cNvPr id="11" name="TextBox 10"/>
           <p:cNvSpPr txBox="1"/>
           <p:nvPr/>
         </p:nvSpPr>
@@ -16375,7 +17114,7 @@
       </p:sp>
       <p:sp>
         <p:nvSpPr>
-          <p:cNvPr id="11" name="TextBox 10"/>
+          <p:cNvPr id="12" name="TextBox 11"/>
           <p:cNvSpPr txBox="1"/>
           <p:nvPr/>
         </p:nvSpPr>
@@ -16421,7 +17160,7 @@
       </p:sp>
       <p:sp>
         <p:nvSpPr>
-          <p:cNvPr id="12" name="TextBox 11"/>
+          <p:cNvPr id="13" name="TextBox 12"/>
           <p:cNvSpPr txBox="1"/>
           <p:nvPr/>
         </p:nvSpPr>
@@ -16467,7 +17206,7 @@
       </p:sp>
       <p:sp>
         <p:nvSpPr>
-          <p:cNvPr id="13" name="Rectangle 12"/>
+          <p:cNvPr id="14" name="Rectangle 13"/>
           <p:cNvSpPr/>
           <p:nvPr/>
         </p:nvSpPr>
@@ -16513,7 +17252,7 @@
       </p:sp>
       <p:sp>
         <p:nvSpPr>
-          <p:cNvPr id="14" name="TextBox 13"/>
+          <p:cNvPr id="15" name="TextBox 14"/>
           <p:cNvSpPr txBox="1"/>
           <p:nvPr/>
         </p:nvSpPr>
@@ -16559,7 +17298,7 @@
       </p:sp>
       <p:sp>
         <p:nvSpPr>
-          <p:cNvPr id="15" name="TextBox 14"/>
+          <p:cNvPr id="16" name="TextBox 15"/>
           <p:cNvSpPr txBox="1"/>
           <p:nvPr/>
         </p:nvSpPr>
@@ -16605,7 +17344,7 @@
       </p:sp>
       <p:sp>
         <p:nvSpPr>
-          <p:cNvPr id="16" name="TextBox 15"/>
+          <p:cNvPr id="17" name="TextBox 16"/>
           <p:cNvSpPr txBox="1"/>
           <p:nvPr/>
         </p:nvSpPr>
@@ -16651,7 +17390,7 @@
       </p:sp>
       <p:sp>
         <p:nvSpPr>
-          <p:cNvPr id="17" name="Rectangle 16"/>
+          <p:cNvPr id="18" name="Rectangle 17"/>
           <p:cNvSpPr/>
           <p:nvPr/>
         </p:nvSpPr>
@@ -16697,7 +17436,7 @@
       </p:sp>
       <p:sp>
         <p:nvSpPr>
-          <p:cNvPr id="18" name="Rectangle 17"/>
+          <p:cNvPr id="19" name="Rectangle 18"/>
           <p:cNvSpPr/>
           <p:nvPr/>
         </p:nvSpPr>
@@ -16743,7 +17482,7 @@
       </p:sp>
       <p:sp>
         <p:nvSpPr>
-          <p:cNvPr id="19" name="TextBox 18"/>
+          <p:cNvPr id="20" name="TextBox 19"/>
           <p:cNvSpPr txBox="1"/>
           <p:nvPr/>
         </p:nvSpPr>
@@ -16789,7 +17528,7 @@
       </p:sp>
       <p:sp>
         <p:nvSpPr>
-          <p:cNvPr id="20" name="TextBox 19"/>
+          <p:cNvPr id="21" name="TextBox 20"/>
           <p:cNvSpPr txBox="1"/>
           <p:nvPr/>
         </p:nvSpPr>
@@ -16835,7 +17574,7 @@
       </p:sp>
       <p:sp>
         <p:nvSpPr>
-          <p:cNvPr id="21" name="TextBox 20"/>
+          <p:cNvPr id="22" name="TextBox 21"/>
           <p:cNvSpPr txBox="1"/>
           <p:nvPr/>
         </p:nvSpPr>
@@ -16881,7 +17620,7 @@
       </p:sp>
       <p:sp>
         <p:nvSpPr>
-          <p:cNvPr id="22" name="Rectangle 21"/>
+          <p:cNvPr id="23" name="Rectangle 22"/>
           <p:cNvSpPr/>
           <p:nvPr/>
         </p:nvSpPr>
@@ -16927,7 +17666,7 @@
       </p:sp>
       <p:sp>
         <p:nvSpPr>
-          <p:cNvPr id="23" name="TextBox 22"/>
+          <p:cNvPr id="24" name="TextBox 23"/>
           <p:cNvSpPr txBox="1"/>
           <p:nvPr/>
         </p:nvSpPr>
@@ -16973,7 +17712,7 @@
       </p:sp>
       <p:sp>
         <p:nvSpPr>
-          <p:cNvPr id="24" name="TextBox 23"/>
+          <p:cNvPr id="25" name="TextBox 24"/>
           <p:cNvSpPr txBox="1"/>
           <p:nvPr/>
         </p:nvSpPr>
@@ -17019,7 +17758,7 @@
       </p:sp>
       <p:sp>
         <p:nvSpPr>
-          <p:cNvPr id="25" name="TextBox 24"/>
+          <p:cNvPr id="26" name="TextBox 25"/>
           <p:cNvSpPr txBox="1"/>
           <p:nvPr/>
         </p:nvSpPr>
@@ -17065,7 +17804,7 @@
       </p:sp>
       <p:sp>
         <p:nvSpPr>
-          <p:cNvPr id="26" name="Rectangle 25"/>
+          <p:cNvPr id="27" name="Rectangle 26"/>
           <p:cNvSpPr/>
           <p:nvPr/>
         </p:nvSpPr>
@@ -17111,7 +17850,7 @@
       </p:sp>
       <p:sp>
         <p:nvSpPr>
-          <p:cNvPr id="27" name="Rectangle 26"/>
+          <p:cNvPr id="28" name="Rectangle 27"/>
           <p:cNvSpPr/>
           <p:nvPr/>
         </p:nvSpPr>
@@ -17157,7 +17896,7 @@
       </p:sp>
       <p:sp>
         <p:nvSpPr>
-          <p:cNvPr id="28" name="TextBox 27"/>
+          <p:cNvPr id="29" name="TextBox 28"/>
           <p:cNvSpPr txBox="1"/>
           <p:nvPr/>
         </p:nvSpPr>
@@ -17203,7 +17942,7 @@
       </p:sp>
       <p:sp>
         <p:nvSpPr>
-          <p:cNvPr id="29" name="TextBox 28"/>
+          <p:cNvPr id="30" name="TextBox 29"/>
           <p:cNvSpPr txBox="1"/>
           <p:nvPr/>
         </p:nvSpPr>
@@ -17249,7 +17988,7 @@
       </p:sp>
       <p:sp>
         <p:nvSpPr>
-          <p:cNvPr id="30" name="TextBox 29"/>
+          <p:cNvPr id="31" name="TextBox 30"/>
           <p:cNvSpPr txBox="1"/>
           <p:nvPr/>
         </p:nvSpPr>
@@ -17295,7 +18034,7 @@
       </p:sp>
       <p:sp>
         <p:nvSpPr>
-          <p:cNvPr id="31" name="Rounded Rectangle 30"/>
+          <p:cNvPr id="32" name="Rounded Rectangle 31"/>
           <p:cNvSpPr/>
           <p:nvPr/>
         </p:nvSpPr>
@@ -17345,7 +18084,7 @@
       </p:sp>
       <p:sp>
         <p:nvSpPr>
-          <p:cNvPr id="32" name="Rectangle 31"/>
+          <p:cNvPr id="33" name="Rectangle 32"/>
           <p:cNvSpPr/>
           <p:nvPr/>
         </p:nvSpPr>
@@ -17391,7 +18130,7 @@
       </p:sp>
       <p:sp>
         <p:nvSpPr>
-          <p:cNvPr id="33" name="TextBox 32"/>
+          <p:cNvPr id="34" name="TextBox 33"/>
           <p:cNvSpPr txBox="1"/>
           <p:nvPr/>
         </p:nvSpPr>
@@ -17516,7 +18255,7 @@
         <p:spPr>
           <a:xfrm>
             <a:off x="620000" y="560000"/>
-            <a:ext cx="10952000" cy="620000"/>
+            <a:ext cx="10052000" cy="620000"/>
           </a:xfrm>
           <a:prstGeom prst="rect">
             <a:avLst/>
@@ -17737,9 +18476,33 @@
           </a:p>
         </p:txBody>
       </p:sp>
-      <p:sp>
-        <p:nvSpPr>
-          <p:cNvPr id="8" name="Rounded Rectangle 7"/>
+      <p:pic>
+        <p:nvPicPr>
+          <p:cNvPr id="8" name="Picture 7" descr="role.png"/>
+          <p:cNvPicPr>
+            <a:picLocks noChangeAspect="1"/>
+          </p:cNvPicPr>
+          <p:nvPr/>
+        </p:nvPicPr>
+        <p:blipFill>
+          <a:blip r:embed="rId2"/>
+          <a:stretch>
+            <a:fillRect/>
+          </a:stretch>
+        </p:blipFill>
+        <p:spPr>
+          <a:xfrm>
+            <a:off x="10932000" y="275000"/>
+            <a:ext cx="640000" cy="640000"/>
+          </a:xfrm>
+          <a:prstGeom prst="rect">
+            <a:avLst/>
+          </a:prstGeom>
+        </p:spPr>
+      </p:pic>
+      <p:sp>
+        <p:nvSpPr>
+          <p:cNvPr id="9" name="Rounded Rectangle 8"/>
           <p:cNvSpPr/>
           <p:nvPr/>
         </p:nvSpPr>
@@ -17789,7 +18552,7 @@
       </p:sp>
       <p:sp>
         <p:nvSpPr>
-          <p:cNvPr id="9" name="Rectangle 8"/>
+          <p:cNvPr id="10" name="Rectangle 9"/>
           <p:cNvSpPr/>
           <p:nvPr/>
         </p:nvSpPr>
@@ -17835,7 +18598,7 @@
       </p:sp>
       <p:sp>
         <p:nvSpPr>
-          <p:cNvPr id="10" name="TextBox 9"/>
+          <p:cNvPr id="11" name="TextBox 10"/>
           <p:cNvSpPr txBox="1"/>
           <p:nvPr/>
         </p:nvSpPr>
@@ -17881,7 +18644,7 @@
       </p:sp>
       <p:sp>
         <p:nvSpPr>
-          <p:cNvPr id="11" name="TextBox 10"/>
+          <p:cNvPr id="12" name="TextBox 11"/>
           <p:cNvSpPr txBox="1"/>
           <p:nvPr/>
         </p:nvSpPr>
@@ -18033,7 +18796,7 @@
       </p:sp>
       <p:sp>
         <p:nvSpPr>
-          <p:cNvPr id="12" name="Rounded Rectangle 11"/>
+          <p:cNvPr id="13" name="Rounded Rectangle 12"/>
           <p:cNvSpPr/>
           <p:nvPr/>
         </p:nvSpPr>
@@ -18083,7 +18846,7 @@
       </p:sp>
       <p:sp>
         <p:nvSpPr>
-          <p:cNvPr id="13" name="Rectangle 12"/>
+          <p:cNvPr id="14" name="Rectangle 13"/>
           <p:cNvSpPr/>
           <p:nvPr/>
         </p:nvSpPr>
@@ -18129,7 +18892,7 @@
       </p:sp>
       <p:sp>
         <p:nvSpPr>
-          <p:cNvPr id="14" name="TextBox 13"/>
+          <p:cNvPr id="15" name="TextBox 14"/>
           <p:cNvSpPr txBox="1"/>
           <p:nvPr/>
         </p:nvSpPr>
@@ -18175,7 +18938,7 @@
       </p:sp>
       <p:sp>
         <p:nvSpPr>
-          <p:cNvPr id="15" name="TextBox 14"/>
+          <p:cNvPr id="16" name="TextBox 15"/>
           <p:cNvSpPr txBox="1"/>
           <p:nvPr/>
         </p:nvSpPr>
@@ -18258,7 +19021,7 @@
       </p:sp>
       <p:sp>
         <p:nvSpPr>
-          <p:cNvPr id="16" name="Rounded Rectangle 15"/>
+          <p:cNvPr id="17" name="Rounded Rectangle 16"/>
           <p:cNvSpPr/>
           <p:nvPr/>
         </p:nvSpPr>
@@ -18308,7 +19071,7 @@
       </p:sp>
       <p:sp>
         <p:nvSpPr>
-          <p:cNvPr id="17" name="Rectangle 16"/>
+          <p:cNvPr id="18" name="Rectangle 17"/>
           <p:cNvSpPr/>
           <p:nvPr/>
         </p:nvSpPr>
@@ -18354,7 +19117,7 @@
       </p:sp>
       <p:sp>
         <p:nvSpPr>
-          <p:cNvPr id="18" name="TextBox 17"/>
+          <p:cNvPr id="19" name="TextBox 18"/>
           <p:cNvSpPr txBox="1"/>
           <p:nvPr/>
         </p:nvSpPr>
@@ -19078,7 +19841,311 @@
       </p:sp>
       <p:sp>
         <p:nvSpPr>
-          <p:cNvPr id="14" name="Rounded Rectangle 13"/>
+          <p:cNvPr id="14" name="Oval 13"/>
+          <p:cNvSpPr/>
+          <p:nvPr/>
+        </p:nvSpPr>
+        <p:spPr>
+          <a:xfrm>
+            <a:off x="9825200" y="1497200"/>
+            <a:ext cx="313600" cy="313600"/>
+          </a:xfrm>
+          <a:prstGeom prst="ellipse">
+            <a:avLst/>
+          </a:prstGeom>
+          <a:noFill/>
+          <a:ln w="33020">
+            <a:solidFill>
+              <a:srgbClr val="FF7B72"/>
+            </a:solidFill>
+          </a:ln>
+          <a:effectLst/>
+        </p:spPr>
+        <p:style>
+          <a:lnRef idx="1">
+            <a:schemeClr val="accent1"/>
+          </a:lnRef>
+          <a:fillRef idx="3">
+            <a:schemeClr val="accent1"/>
+          </a:fillRef>
+          <a:effectRef idx="2">
+            <a:schemeClr val="accent1"/>
+          </a:effectRef>
+          <a:fontRef idx="minor">
+            <a:schemeClr val="lt1"/>
+          </a:fontRef>
+        </p:style>
+        <p:txBody>
+          <a:bodyPr rtlCol="0" anchor="ctr"/>
+          <a:lstStyle/>
+          <a:p>
+            <a:pPr algn="ctr"/>
+          </a:p>
+        </p:txBody>
+      </p:sp>
+      <p:sp>
+        <p:nvSpPr>
+          <p:cNvPr id="15" name="Oval 14"/>
+          <p:cNvSpPr/>
+          <p:nvPr/>
+        </p:nvSpPr>
+        <p:spPr>
+          <a:xfrm>
+            <a:off x="9766400" y="1752000"/>
+            <a:ext cx="431200" cy="490000"/>
+          </a:xfrm>
+          <a:prstGeom prst="ellipse">
+            <a:avLst/>
+          </a:prstGeom>
+          <a:noFill/>
+          <a:ln w="33020">
+            <a:solidFill>
+              <a:srgbClr val="FF7B72"/>
+            </a:solidFill>
+          </a:ln>
+          <a:effectLst/>
+        </p:spPr>
+        <p:style>
+          <a:lnRef idx="1">
+            <a:schemeClr val="accent1"/>
+          </a:lnRef>
+          <a:fillRef idx="3">
+            <a:schemeClr val="accent1"/>
+          </a:fillRef>
+          <a:effectRef idx="2">
+            <a:schemeClr val="accent1"/>
+          </a:effectRef>
+          <a:fontRef idx="minor">
+            <a:schemeClr val="lt1"/>
+          </a:fontRef>
+        </p:style>
+        <p:txBody>
+          <a:bodyPr rtlCol="0" anchor="ctr"/>
+          <a:lstStyle/>
+          <a:p>
+            <a:pPr algn="ctr"/>
+          </a:p>
+        </p:txBody>
+      </p:sp>
+      <p:cxnSp>
+        <p:nvCxnSpPr>
+          <p:cNvPr id="16" name="Connector 15"/>
+          <p:cNvCxnSpPr/>
+          <p:nvPr/>
+        </p:nvCxnSpPr>
+        <p:spPr>
+          <a:xfrm flipH="1" flipV="1">
+            <a:off x="9550800" y="1791200"/>
+            <a:ext cx="235200" cy="58800"/>
+          </a:xfrm>
+          <a:prstGeom prst="line">
+            <a:avLst/>
+          </a:prstGeom>
+          <a:ln w="33020">
+            <a:solidFill>
+              <a:srgbClr val="FF7B72"/>
+            </a:solidFill>
+          </a:ln>
+          <a:effectLst/>
+        </p:spPr>
+        <p:style>
+          <a:lnRef idx="2">
+            <a:schemeClr val="accent1"/>
+          </a:lnRef>
+          <a:fillRef idx="0">
+            <a:schemeClr val="accent1"/>
+          </a:fillRef>
+          <a:effectRef idx="1">
+            <a:schemeClr val="accent1"/>
+          </a:effectRef>
+          <a:fontRef idx="minor">
+            <a:schemeClr val="tx1"/>
+          </a:fontRef>
+        </p:style>
+      </p:cxnSp>
+      <p:cxnSp>
+        <p:nvCxnSpPr>
+          <p:cNvPr id="17" name="Connector 16"/>
+          <p:cNvCxnSpPr/>
+          <p:nvPr/>
+        </p:nvCxnSpPr>
+        <p:spPr>
+          <a:xfrm flipV="1">
+            <a:off x="10178000" y="1791200"/>
+            <a:ext cx="235200" cy="58800"/>
+          </a:xfrm>
+          <a:prstGeom prst="line">
+            <a:avLst/>
+          </a:prstGeom>
+          <a:ln w="33020">
+            <a:solidFill>
+              <a:srgbClr val="FF7B72"/>
+            </a:solidFill>
+          </a:ln>
+          <a:effectLst/>
+        </p:spPr>
+        <p:style>
+          <a:lnRef idx="2">
+            <a:schemeClr val="accent1"/>
+          </a:lnRef>
+          <a:fillRef idx="0">
+            <a:schemeClr val="accent1"/>
+          </a:fillRef>
+          <a:effectRef idx="1">
+            <a:schemeClr val="accent1"/>
+          </a:effectRef>
+          <a:fontRef idx="minor">
+            <a:schemeClr val="tx1"/>
+          </a:fontRef>
+        </p:style>
+      </p:cxnSp>
+      <p:cxnSp>
+        <p:nvCxnSpPr>
+          <p:cNvPr id="18" name="Connector 17"/>
+          <p:cNvCxnSpPr/>
+          <p:nvPr/>
+        </p:nvCxnSpPr>
+        <p:spPr>
+          <a:xfrm flipH="1" flipV="1">
+            <a:off x="9550800" y="1948000"/>
+            <a:ext cx="235200" cy="58800"/>
+          </a:xfrm>
+          <a:prstGeom prst="line">
+            <a:avLst/>
+          </a:prstGeom>
+          <a:ln w="33020">
+            <a:solidFill>
+              <a:srgbClr val="FF7B72"/>
+            </a:solidFill>
+          </a:ln>
+          <a:effectLst/>
+        </p:spPr>
+        <p:style>
+          <a:lnRef idx="2">
+            <a:schemeClr val="accent1"/>
+          </a:lnRef>
+          <a:fillRef idx="0">
+            <a:schemeClr val="accent1"/>
+          </a:fillRef>
+          <a:effectRef idx="1">
+            <a:schemeClr val="accent1"/>
+          </a:effectRef>
+          <a:fontRef idx="minor">
+            <a:schemeClr val="tx1"/>
+          </a:fontRef>
+        </p:style>
+      </p:cxnSp>
+      <p:cxnSp>
+        <p:nvCxnSpPr>
+          <p:cNvPr id="19" name="Connector 18"/>
+          <p:cNvCxnSpPr/>
+          <p:nvPr/>
+        </p:nvCxnSpPr>
+        <p:spPr>
+          <a:xfrm flipV="1">
+            <a:off x="10178000" y="1948000"/>
+            <a:ext cx="235200" cy="58800"/>
+          </a:xfrm>
+          <a:prstGeom prst="line">
+            <a:avLst/>
+          </a:prstGeom>
+          <a:ln w="33020">
+            <a:solidFill>
+              <a:srgbClr val="FF7B72"/>
+            </a:solidFill>
+          </a:ln>
+          <a:effectLst/>
+        </p:spPr>
+        <p:style>
+          <a:lnRef idx="2">
+            <a:schemeClr val="accent1"/>
+          </a:lnRef>
+          <a:fillRef idx="0">
+            <a:schemeClr val="accent1"/>
+          </a:fillRef>
+          <a:effectRef idx="1">
+            <a:schemeClr val="accent1"/>
+          </a:effectRef>
+          <a:fontRef idx="minor">
+            <a:schemeClr val="tx1"/>
+          </a:fontRef>
+        </p:style>
+      </p:cxnSp>
+      <p:cxnSp>
+        <p:nvCxnSpPr>
+          <p:cNvPr id="20" name="Connector 19"/>
+          <p:cNvCxnSpPr/>
+          <p:nvPr/>
+        </p:nvCxnSpPr>
+        <p:spPr>
+          <a:xfrm flipH="1" flipV="1">
+            <a:off x="9550800" y="2104800"/>
+            <a:ext cx="235200" cy="58800"/>
+          </a:xfrm>
+          <a:prstGeom prst="line">
+            <a:avLst/>
+          </a:prstGeom>
+          <a:ln w="33020">
+            <a:solidFill>
+              <a:srgbClr val="FF7B72"/>
+            </a:solidFill>
+          </a:ln>
+          <a:effectLst/>
+        </p:spPr>
+        <p:style>
+          <a:lnRef idx="2">
+            <a:schemeClr val="accent1"/>
+          </a:lnRef>
+          <a:fillRef idx="0">
+            <a:schemeClr val="accent1"/>
+          </a:fillRef>
+          <a:effectRef idx="1">
+            <a:schemeClr val="accent1"/>
+          </a:effectRef>
+          <a:fontRef idx="minor">
+            <a:schemeClr val="tx1"/>
+          </a:fontRef>
+        </p:style>
+      </p:cxnSp>
+      <p:cxnSp>
+        <p:nvCxnSpPr>
+          <p:cNvPr id="21" name="Connector 20"/>
+          <p:cNvCxnSpPr/>
+          <p:nvPr/>
+        </p:nvCxnSpPr>
+        <p:spPr>
+          <a:xfrm flipV="1">
+            <a:off x="10178000" y="2104800"/>
+            <a:ext cx="235200" cy="58800"/>
+          </a:xfrm>
+          <a:prstGeom prst="line">
+            <a:avLst/>
+          </a:prstGeom>
+          <a:ln w="33020">
+            <a:solidFill>
+              <a:srgbClr val="FF7B72"/>
+            </a:solidFill>
+          </a:ln>
+          <a:effectLst/>
+        </p:spPr>
+        <p:style>
+          <a:lnRef idx="2">
+            <a:schemeClr val="accent1"/>
+          </a:lnRef>
+          <a:fillRef idx="0">
+            <a:schemeClr val="accent1"/>
+          </a:fillRef>
+          <a:effectRef idx="1">
+            <a:schemeClr val="accent1"/>
+          </a:effectRef>
+          <a:fontRef idx="minor">
+            <a:schemeClr val="tx1"/>
+          </a:fontRef>
+        </p:style>
+      </p:cxnSp>
+      <p:sp>
+        <p:nvSpPr>
+          <p:cNvPr id="22" name="Rounded Rectangle 21"/>
           <p:cNvSpPr/>
           <p:nvPr/>
         </p:nvSpPr>
@@ -19128,7 +20195,7 @@
       </p:sp>
       <p:sp>
         <p:nvSpPr>
-          <p:cNvPr id="15" name="Rectangle 14"/>
+          <p:cNvPr id="23" name="Rectangle 22"/>
           <p:cNvSpPr/>
           <p:nvPr/>
         </p:nvSpPr>
@@ -19174,7 +20241,7 @@
       </p:sp>
       <p:sp>
         <p:nvSpPr>
-          <p:cNvPr id="16" name="TextBox 15"/>
+          <p:cNvPr id="24" name="TextBox 23"/>
           <p:cNvSpPr txBox="1"/>
           <p:nvPr/>
         </p:nvSpPr>
@@ -19243,7 +20310,7 @@
       </p:sp>
       <p:sp>
         <p:nvSpPr>
-          <p:cNvPr id="17" name="Rectangle 16"/>
+          <p:cNvPr id="25" name="Rectangle 24"/>
           <p:cNvSpPr/>
           <p:nvPr/>
         </p:nvSpPr>
@@ -19289,7 +20356,7 @@
       </p:sp>
       <p:sp>
         <p:nvSpPr>
-          <p:cNvPr id="18" name="TextBox 17"/>
+          <p:cNvPr id="26" name="TextBox 25"/>
           <p:cNvSpPr txBox="1"/>
           <p:nvPr/>
         </p:nvSpPr>
@@ -19358,7 +20425,7 @@
       </p:sp>
       <p:sp>
         <p:nvSpPr>
-          <p:cNvPr id="19" name="Rectangle 18"/>
+          <p:cNvPr id="27" name="Rectangle 26"/>
           <p:cNvSpPr/>
           <p:nvPr/>
         </p:nvSpPr>
@@ -19404,7 +20471,7 @@
       </p:sp>
       <p:sp>
         <p:nvSpPr>
-          <p:cNvPr id="20" name="TextBox 19"/>
+          <p:cNvPr id="28" name="TextBox 27"/>
           <p:cNvSpPr txBox="1"/>
           <p:nvPr/>
         </p:nvSpPr>
@@ -19473,7 +20540,7 @@
       </p:sp>
       <p:sp>
         <p:nvSpPr>
-          <p:cNvPr id="21" name="Rectangle 20"/>
+          <p:cNvPr id="29" name="Rectangle 28"/>
           <p:cNvSpPr/>
           <p:nvPr/>
         </p:nvSpPr>
@@ -19519,7 +20586,7 @@
       </p:sp>
       <p:sp>
         <p:nvSpPr>
-          <p:cNvPr id="22" name="TextBox 21"/>
+          <p:cNvPr id="30" name="TextBox 29"/>
           <p:cNvSpPr txBox="1"/>
           <p:nvPr/>
         </p:nvSpPr>
@@ -19565,7 +20632,7 @@
       </p:sp>
       <p:sp>
         <p:nvSpPr>
-          <p:cNvPr id="23" name="TextBox 22"/>
+          <p:cNvPr id="31" name="TextBox 30"/>
           <p:cNvSpPr txBox="1"/>
           <p:nvPr/>
         </p:nvSpPr>
@@ -19690,7 +20757,7 @@
         <p:spPr>
           <a:xfrm>
             <a:off x="620000" y="560000"/>
-            <a:ext cx="10952000" cy="620000"/>
+            <a:ext cx="10052000" cy="620000"/>
           </a:xfrm>
           <a:prstGeom prst="rect">
             <a:avLst/>
@@ -19919,6 +20986,124 @@
         </p:nvSpPr>
         <p:spPr>
           <a:xfrm>
+            <a:off x="10996000" y="339000"/>
+            <a:ext cx="512000" cy="512000"/>
+          </a:xfrm>
+          <a:prstGeom prst="roundRect">
+            <a:avLst>
+              <a:gd name="adj" fmla="val 20000"/>
+            </a:avLst>
+          </a:prstGeom>
+          <a:noFill/>
+          <a:ln w="38100">
+            <a:solidFill>
+              <a:srgbClr val="74A6FF"/>
+            </a:solidFill>
+          </a:ln>
+          <a:effectLst/>
+        </p:spPr>
+        <p:style>
+          <a:lnRef idx="1">
+            <a:schemeClr val="accent1"/>
+          </a:lnRef>
+          <a:fillRef idx="3">
+            <a:schemeClr val="accent1"/>
+          </a:fillRef>
+          <a:effectRef idx="2">
+            <a:schemeClr val="accent1"/>
+          </a:effectRef>
+          <a:fontRef idx="minor">
+            <a:schemeClr val="lt1"/>
+          </a:fontRef>
+        </p:style>
+        <p:txBody>
+          <a:bodyPr rtlCol="0" anchor="ctr"/>
+          <a:lstStyle/>
+          <a:p>
+            <a:pPr algn="ctr"/>
+          </a:p>
+        </p:txBody>
+      </p:sp>
+      <p:cxnSp>
+        <p:nvCxnSpPr>
+          <p:cNvPr id="9" name="Connector 8"/>
+          <p:cNvCxnSpPr/>
+          <p:nvPr/>
+        </p:nvCxnSpPr>
+        <p:spPr>
+          <a:xfrm>
+            <a:off x="11124000" y="607800"/>
+            <a:ext cx="89600" cy="102400"/>
+          </a:xfrm>
+          <a:prstGeom prst="line">
+            <a:avLst/>
+          </a:prstGeom>
+          <a:ln w="49530">
+            <a:solidFill>
+              <a:srgbClr val="74A6FF"/>
+            </a:solidFill>
+          </a:ln>
+          <a:effectLst/>
+        </p:spPr>
+        <p:style>
+          <a:lnRef idx="2">
+            <a:schemeClr val="accent1"/>
+          </a:lnRef>
+          <a:fillRef idx="0">
+            <a:schemeClr val="accent1"/>
+          </a:fillRef>
+          <a:effectRef idx="1">
+            <a:schemeClr val="accent1"/>
+          </a:effectRef>
+          <a:fontRef idx="minor">
+            <a:schemeClr val="tx1"/>
+          </a:fontRef>
+        </p:style>
+      </p:cxnSp>
+      <p:cxnSp>
+        <p:nvCxnSpPr>
+          <p:cNvPr id="10" name="Connector 9"/>
+          <p:cNvCxnSpPr/>
+          <p:nvPr/>
+        </p:nvCxnSpPr>
+        <p:spPr>
+          <a:xfrm flipV="1">
+            <a:off x="11213600" y="479800"/>
+            <a:ext cx="179200" cy="230400"/>
+          </a:xfrm>
+          <a:prstGeom prst="line">
+            <a:avLst/>
+          </a:prstGeom>
+          <a:ln w="49530">
+            <a:solidFill>
+              <a:srgbClr val="74A6FF"/>
+            </a:solidFill>
+          </a:ln>
+          <a:effectLst/>
+        </p:spPr>
+        <p:style>
+          <a:lnRef idx="2">
+            <a:schemeClr val="accent1"/>
+          </a:lnRef>
+          <a:fillRef idx="0">
+            <a:schemeClr val="accent1"/>
+          </a:fillRef>
+          <a:effectRef idx="1">
+            <a:schemeClr val="accent1"/>
+          </a:effectRef>
+          <a:fontRef idx="minor">
+            <a:schemeClr val="tx1"/>
+          </a:fontRef>
+        </p:style>
+      </p:cxnSp>
+      <p:sp>
+        <p:nvSpPr>
+          <p:cNvPr id="11" name="Rounded Rectangle 10"/>
+          <p:cNvSpPr/>
+          <p:nvPr/>
+        </p:nvSpPr>
+        <p:spPr>
+          <a:xfrm>
             <a:off x="620000" y="2620000"/>
             <a:ext cx="300000" cy="300000"/>
           </a:xfrm>
@@ -19981,7 +21166,7 @@
       </p:sp>
       <p:sp>
         <p:nvSpPr>
-          <p:cNvPr id="9" name="TextBox 8"/>
+          <p:cNvPr id="12" name="TextBox 11"/>
           <p:cNvSpPr txBox="1"/>
           <p:nvPr/>
         </p:nvSpPr>
@@ -20027,7 +21212,7 @@
       </p:sp>
       <p:sp>
         <p:nvSpPr>
-          <p:cNvPr id="10" name="Rounded Rectangle 9"/>
+          <p:cNvPr id="13" name="Rounded Rectangle 12"/>
           <p:cNvSpPr/>
           <p:nvPr/>
         </p:nvSpPr>
@@ -20095,7 +21280,7 @@
       </p:sp>
       <p:sp>
         <p:nvSpPr>
-          <p:cNvPr id="11" name="TextBox 10"/>
+          <p:cNvPr id="14" name="TextBox 13"/>
           <p:cNvSpPr txBox="1"/>
           <p:nvPr/>
         </p:nvSpPr>
@@ -20141,7 +21326,7 @@
       </p:sp>
       <p:sp>
         <p:nvSpPr>
-          <p:cNvPr id="12" name="Rounded Rectangle 11"/>
+          <p:cNvPr id="15" name="Rounded Rectangle 14"/>
           <p:cNvSpPr/>
           <p:nvPr/>
         </p:nvSpPr>
@@ -20209,7 +21394,7 @@
       </p:sp>
       <p:sp>
         <p:nvSpPr>
-          <p:cNvPr id="13" name="TextBox 12"/>
+          <p:cNvPr id="16" name="TextBox 15"/>
           <p:cNvSpPr txBox="1"/>
           <p:nvPr/>
         </p:nvSpPr>
@@ -20255,7 +21440,7 @@
       </p:sp>
       <p:sp>
         <p:nvSpPr>
-          <p:cNvPr id="14" name="Rounded Rectangle 13"/>
+          <p:cNvPr id="17" name="Rounded Rectangle 16"/>
           <p:cNvSpPr/>
           <p:nvPr/>
         </p:nvSpPr>
@@ -20323,7 +21508,7 @@
       </p:sp>
       <p:sp>
         <p:nvSpPr>
-          <p:cNvPr id="15" name="TextBox 14"/>
+          <p:cNvPr id="18" name="TextBox 17"/>
           <p:cNvSpPr txBox="1"/>
           <p:nvPr/>
         </p:nvSpPr>
@@ -20369,7 +21554,7 @@
       </p:sp>
       <p:sp>
         <p:nvSpPr>
-          <p:cNvPr id="16" name="Rounded Rectangle 15"/>
+          <p:cNvPr id="19" name="Rounded Rectangle 18"/>
           <p:cNvSpPr/>
           <p:nvPr/>
         </p:nvSpPr>
@@ -20437,7 +21622,7 @@
       </p:sp>
       <p:sp>
         <p:nvSpPr>
-          <p:cNvPr id="17" name="TextBox 16"/>
+          <p:cNvPr id="20" name="TextBox 19"/>
           <p:cNvSpPr txBox="1"/>
           <p:nvPr/>
         </p:nvSpPr>
@@ -20483,7 +21668,7 @@
       </p:sp>
       <p:sp>
         <p:nvSpPr>
-          <p:cNvPr id="18" name="Rounded Rectangle 17"/>
+          <p:cNvPr id="21" name="Rounded Rectangle 20"/>
           <p:cNvSpPr/>
           <p:nvPr/>
         </p:nvSpPr>
@@ -20551,7 +21736,7 @@
       </p:sp>
       <p:sp>
         <p:nvSpPr>
-          <p:cNvPr id="19" name="TextBox 18"/>
+          <p:cNvPr id="22" name="TextBox 21"/>
           <p:cNvSpPr txBox="1"/>
           <p:nvPr/>
         </p:nvSpPr>
@@ -20597,7 +21782,7 @@
       </p:sp>
       <p:sp>
         <p:nvSpPr>
-          <p:cNvPr id="20" name="Rounded Rectangle 19"/>
+          <p:cNvPr id="23" name="Rounded Rectangle 22"/>
           <p:cNvSpPr/>
           <p:nvPr/>
         </p:nvSpPr>
@@ -20665,7 +21850,7 @@
       </p:sp>
       <p:sp>
         <p:nvSpPr>
-          <p:cNvPr id="21" name="TextBox 20"/>
+          <p:cNvPr id="24" name="TextBox 23"/>
           <p:cNvSpPr txBox="1"/>
           <p:nvPr/>
         </p:nvSpPr>
@@ -20711,7 +21896,7 @@
       </p:sp>
       <p:sp>
         <p:nvSpPr>
-          <p:cNvPr id="22" name="Rounded Rectangle 21"/>
+          <p:cNvPr id="25" name="Rounded Rectangle 24"/>
           <p:cNvSpPr/>
           <p:nvPr/>
         </p:nvSpPr>
@@ -20779,7 +21964,7 @@
       </p:sp>
       <p:sp>
         <p:nvSpPr>
-          <p:cNvPr id="23" name="TextBox 22"/>
+          <p:cNvPr id="26" name="TextBox 25"/>
           <p:cNvSpPr txBox="1"/>
           <p:nvPr/>
         </p:nvSpPr>
@@ -20825,7 +22010,7 @@
       </p:sp>
       <p:sp>
         <p:nvSpPr>
-          <p:cNvPr id="24" name="Rounded Rectangle 23"/>
+          <p:cNvPr id="27" name="Rounded Rectangle 26"/>
           <p:cNvSpPr/>
           <p:nvPr/>
         </p:nvSpPr>
@@ -20893,7 +22078,7 @@
       </p:sp>
       <p:sp>
         <p:nvSpPr>
-          <p:cNvPr id="25" name="TextBox 24"/>
+          <p:cNvPr id="28" name="TextBox 27"/>
           <p:cNvSpPr txBox="1"/>
           <p:nvPr/>
         </p:nvSpPr>
@@ -20939,7 +22124,7 @@
       </p:sp>
       <p:sp>
         <p:nvSpPr>
-          <p:cNvPr id="26" name="Rounded Rectangle 25"/>
+          <p:cNvPr id="29" name="Rounded Rectangle 28"/>
           <p:cNvSpPr/>
           <p:nvPr/>
         </p:nvSpPr>
@@ -21007,7 +22192,7 @@
       </p:sp>
       <p:sp>
         <p:nvSpPr>
-          <p:cNvPr id="27" name="TextBox 26"/>
+          <p:cNvPr id="30" name="TextBox 29"/>
           <p:cNvSpPr txBox="1"/>
           <p:nvPr/>
         </p:nvSpPr>
@@ -21123,53 +22308,23 @@
       </p:sp>
       <p:sp>
         <p:nvSpPr>
-          <p:cNvPr id="3" name="Freeform 2"/>
+          <p:cNvPr id="3" name="Oval 2"/>
           <p:cNvSpPr/>
           <p:nvPr/>
         </p:nvSpPr>
         <p:spPr>
           <a:xfrm>
-            <a:off x="-163645" y="4308000"/>
-            <a:ext cx="2827290" cy="2756404"/>
-          </a:xfrm>
-          <a:custGeom>
-            <a:avLst/>
-            <a:gdLst/>
-            <a:ahLst/>
-            <a:cxnLst/>
-            <a:rect l="l" t="t" r="r" b="b"/>
-            <a:pathLst>
-              <a:path w="2827290" h="2756404">
-                <a:moveTo>
-                  <a:pt x="1413645" y="0"/>
-                </a:moveTo>
-                <a:lnTo>
-                  <a:pt x="2547300" y="545939"/>
-                </a:lnTo>
-                <a:lnTo>
-                  <a:pt x="2827290" y="1772655"/>
-                </a:lnTo>
-                <a:lnTo>
-                  <a:pt x="2042776" y="2756404"/>
-                </a:lnTo>
-                <a:lnTo>
-                  <a:pt x="784513" y="2756404"/>
-                </a:lnTo>
-                <a:lnTo>
-                  <a:pt x="0" y="1772655"/>
-                </a:lnTo>
-                <a:lnTo>
-                  <a:pt x="279989" y="545939"/>
-                </a:lnTo>
-                <a:close/>
-              </a:path>
-            </a:pathLst>
-          </a:custGeom>
-          <a:noFill/>
-          <a:ln w="31750">
-            <a:solidFill>
-              <a:srgbClr val="26354E"/>
-            </a:solidFill>
+            <a:off x="-1400000" y="4358000"/>
+            <a:ext cx="3800000" cy="3800000"/>
+          </a:xfrm>
+          <a:prstGeom prst="ellipse">
+            <a:avLst/>
+          </a:prstGeom>
+          <a:solidFill>
+            <a:srgbClr val="0B1220"/>
+          </a:solidFill>
+          <a:ln>
+            <a:noFill/>
           </a:ln>
           <a:effectLst/>
         </p:spPr>
@@ -21195,9 +22350,33 @@
           </a:p>
         </p:txBody>
       </p:sp>
-      <p:sp>
-        <p:nvSpPr>
-          <p:cNvPr id="4" name="TextBox 3"/>
+      <p:pic>
+        <p:nvPicPr>
+          <p:cNvPr id="4" name="Picture 3" descr="kubernetes.png"/>
+          <p:cNvPicPr>
+            <a:picLocks noChangeAspect="1"/>
+          </p:cNvPicPr>
+          <p:nvPr/>
+        </p:nvPicPr>
+        <p:blipFill>
+          <a:blip r:embed="rId2"/>
+          <a:stretch>
+            <a:fillRect/>
+          </a:stretch>
+        </p:blipFill>
+        <p:spPr>
+          <a:xfrm>
+            <a:off x="9542000" y="900000"/>
+            <a:ext cx="1650000" cy="1650000"/>
+          </a:xfrm>
+          <a:prstGeom prst="rect">
+            <a:avLst/>
+          </a:prstGeom>
+        </p:spPr>
+      </p:pic>
+      <p:sp>
+        <p:nvSpPr>
+          <p:cNvPr id="5" name="TextBox 4"/>
           <p:cNvSpPr txBox="1"/>
           <p:nvPr/>
         </p:nvSpPr>
@@ -21243,14 +22422,14 @@
       </p:sp>
       <p:sp>
         <p:nvSpPr>
-          <p:cNvPr id="5" name="TextBox 4"/>
+          <p:cNvPr id="6" name="TextBox 5"/>
           <p:cNvSpPr txBox="1"/>
           <p:nvPr/>
         </p:nvSpPr>
         <p:spPr>
           <a:xfrm>
-            <a:off x="640000" y="1500000"/>
-            <a:ext cx="10000000" cy="900000"/>
+            <a:off x="640000" y="1560000"/>
+            <a:ext cx="9200000" cy="900000"/>
           </a:xfrm>
           <a:prstGeom prst="rect">
             <a:avLst/>
@@ -21276,7 +22455,7 @@
               <a:buNone/>
             </a:pPr>
             <a:r>
-              <a:rPr sz="4600" b="0" i="0">
+              <a:rPr sz="4400" b="0" i="0">
                 <a:solidFill>
                   <a:srgbClr val="F3F6FC"/>
                 </a:solidFill>
@@ -21289,7 +22468,7 @@
       </p:sp>
       <p:sp>
         <p:nvSpPr>
-          <p:cNvPr id="6" name="Rectangle 5"/>
+          <p:cNvPr id="7" name="Rectangle 6"/>
           <p:cNvSpPr/>
           <p:nvPr/>
         </p:nvSpPr>
@@ -21335,7 +22514,7 @@
       </p:sp>
       <p:sp>
         <p:nvSpPr>
-          <p:cNvPr id="7" name="TextBox 6"/>
+          <p:cNvPr id="8" name="TextBox 7"/>
           <p:cNvSpPr txBox="1"/>
           <p:nvPr/>
         </p:nvSpPr>
@@ -21427,7 +22606,7 @@
       </p:sp>
       <p:sp>
         <p:nvSpPr>
-          <p:cNvPr id="8" name="Rectangle 7"/>
+          <p:cNvPr id="9" name="Rectangle 8"/>
           <p:cNvSpPr/>
           <p:nvPr/>
         </p:nvSpPr>
@@ -21473,7 +22652,7 @@
       </p:sp>
       <p:sp>
         <p:nvSpPr>
-          <p:cNvPr id="9" name="TextBox 8"/>
+          <p:cNvPr id="10" name="TextBox 9"/>
           <p:cNvSpPr txBox="1"/>
           <p:nvPr/>
         </p:nvSpPr>
@@ -21519,7 +22698,7 @@
       </p:sp>
       <p:sp>
         <p:nvSpPr>
-          <p:cNvPr id="10" name="TextBox 9"/>
+          <p:cNvPr id="11" name="TextBox 10"/>
           <p:cNvSpPr txBox="1"/>
           <p:nvPr/>
         </p:nvSpPr>
@@ -21644,7 +22823,7 @@
         <p:spPr>
           <a:xfrm>
             <a:off x="620000" y="560000"/>
-            <a:ext cx="10952000" cy="620000"/>
+            <a:ext cx="10052000" cy="620000"/>
           </a:xfrm>
           <a:prstGeom prst="rect">
             <a:avLst/>
@@ -21867,7 +23046,123 @@
       </p:sp>
       <p:sp>
         <p:nvSpPr>
-          <p:cNvPr id="8" name="TextBox 7"/>
+          <p:cNvPr id="8" name="Oval 7"/>
+          <p:cNvSpPr/>
+          <p:nvPr/>
+        </p:nvSpPr>
+        <p:spPr>
+          <a:xfrm>
+            <a:off x="10983200" y="326200"/>
+            <a:ext cx="537600" cy="537600"/>
+          </a:xfrm>
+          <a:prstGeom prst="ellipse">
+            <a:avLst/>
+          </a:prstGeom>
+          <a:noFill/>
+          <a:ln w="38100">
+            <a:solidFill>
+              <a:srgbClr val="74A6FF"/>
+            </a:solidFill>
+          </a:ln>
+          <a:effectLst/>
+        </p:spPr>
+        <p:style>
+          <a:lnRef idx="1">
+            <a:schemeClr val="accent1"/>
+          </a:lnRef>
+          <a:fillRef idx="3">
+            <a:schemeClr val="accent1"/>
+          </a:fillRef>
+          <a:effectRef idx="2">
+            <a:schemeClr val="accent1"/>
+          </a:effectRef>
+          <a:fontRef idx="minor">
+            <a:schemeClr val="lt1"/>
+          </a:fontRef>
+        </p:style>
+        <p:txBody>
+          <a:bodyPr rtlCol="0" anchor="ctr"/>
+          <a:lstStyle/>
+          <a:p>
+            <a:pPr algn="ctr"/>
+          </a:p>
+        </p:txBody>
+      </p:sp>
+      <p:cxnSp>
+        <p:nvCxnSpPr>
+          <p:cNvPr id="9" name="Connector 8"/>
+          <p:cNvCxnSpPr/>
+          <p:nvPr/>
+        </p:nvCxnSpPr>
+        <p:spPr>
+          <a:xfrm flipV="1">
+            <a:off x="11252000" y="415800"/>
+            <a:ext cx="0" cy="179200"/>
+          </a:xfrm>
+          <a:prstGeom prst="line">
+            <a:avLst/>
+          </a:prstGeom>
+          <a:ln w="38100">
+            <a:solidFill>
+              <a:srgbClr val="74A6FF"/>
+            </a:solidFill>
+          </a:ln>
+          <a:effectLst/>
+        </p:spPr>
+        <p:style>
+          <a:lnRef idx="2">
+            <a:schemeClr val="accent1"/>
+          </a:lnRef>
+          <a:fillRef idx="0">
+            <a:schemeClr val="accent1"/>
+          </a:fillRef>
+          <a:effectRef idx="1">
+            <a:schemeClr val="accent1"/>
+          </a:effectRef>
+          <a:fontRef idx="minor">
+            <a:schemeClr val="tx1"/>
+          </a:fontRef>
+        </p:style>
+      </p:cxnSp>
+      <p:cxnSp>
+        <p:nvCxnSpPr>
+          <p:cNvPr id="10" name="Connector 9"/>
+          <p:cNvCxnSpPr/>
+          <p:nvPr/>
+        </p:nvCxnSpPr>
+        <p:spPr>
+          <a:xfrm>
+            <a:off x="11252000" y="595000"/>
+            <a:ext cx="128000" cy="51200"/>
+          </a:xfrm>
+          <a:prstGeom prst="line">
+            <a:avLst/>
+          </a:prstGeom>
+          <a:ln w="38100">
+            <a:solidFill>
+              <a:srgbClr val="74A6FF"/>
+            </a:solidFill>
+          </a:ln>
+          <a:effectLst/>
+        </p:spPr>
+        <p:style>
+          <a:lnRef idx="2">
+            <a:schemeClr val="accent1"/>
+          </a:lnRef>
+          <a:fillRef idx="0">
+            <a:schemeClr val="accent1"/>
+          </a:fillRef>
+          <a:effectRef idx="1">
+            <a:schemeClr val="accent1"/>
+          </a:effectRef>
+          <a:fontRef idx="minor">
+            <a:schemeClr val="tx1"/>
+          </a:fontRef>
+        </p:style>
+      </p:cxnSp>
+      <p:sp>
+        <p:nvSpPr>
+          <p:cNvPr id="11" name="TextBox 10"/>
           <p:cNvSpPr txBox="1"/>
           <p:nvPr/>
         </p:nvSpPr>
@@ -21913,7 +23208,7 @@
       </p:sp>
       <p:sp>
         <p:nvSpPr>
-          <p:cNvPr id="9" name="Rectangle 8"/>
+          <p:cNvPr id="12" name="Rectangle 11"/>
           <p:cNvSpPr/>
           <p:nvPr/>
         </p:nvSpPr>
@@ -21959,7 +23254,7 @@
       </p:sp>
       <p:sp>
         <p:nvSpPr>
-          <p:cNvPr id="10" name="TextBox 9"/>
+          <p:cNvPr id="13" name="TextBox 12"/>
           <p:cNvSpPr txBox="1"/>
           <p:nvPr/>
         </p:nvSpPr>
@@ -22005,7 +23300,7 @@
       </p:sp>
       <p:sp>
         <p:nvSpPr>
-          <p:cNvPr id="11" name="TextBox 10"/>
+          <p:cNvPr id="14" name="TextBox 13"/>
           <p:cNvSpPr txBox="1"/>
           <p:nvPr/>
         </p:nvSpPr>
@@ -22051,7 +23346,7 @@
       </p:sp>
       <p:sp>
         <p:nvSpPr>
-          <p:cNvPr id="12" name="Rectangle 11"/>
+          <p:cNvPr id="15" name="Rectangle 14"/>
           <p:cNvSpPr/>
           <p:nvPr/>
         </p:nvSpPr>
@@ -22097,7 +23392,7 @@
       </p:sp>
       <p:sp>
         <p:nvSpPr>
-          <p:cNvPr id="13" name="TextBox 12"/>
+          <p:cNvPr id="16" name="TextBox 15"/>
           <p:cNvSpPr txBox="1"/>
           <p:nvPr/>
         </p:nvSpPr>
@@ -22143,7 +23438,7 @@
       </p:sp>
       <p:sp>
         <p:nvSpPr>
-          <p:cNvPr id="14" name="TextBox 13"/>
+          <p:cNvPr id="17" name="TextBox 16"/>
           <p:cNvSpPr txBox="1"/>
           <p:nvPr/>
         </p:nvSpPr>
@@ -22189,7 +23484,7 @@
       </p:sp>
       <p:sp>
         <p:nvSpPr>
-          <p:cNvPr id="15" name="Rectangle 14"/>
+          <p:cNvPr id="18" name="Rectangle 17"/>
           <p:cNvSpPr/>
           <p:nvPr/>
         </p:nvSpPr>
@@ -22235,7 +23530,7 @@
       </p:sp>
       <p:sp>
         <p:nvSpPr>
-          <p:cNvPr id="16" name="TextBox 15"/>
+          <p:cNvPr id="19" name="TextBox 18"/>
           <p:cNvSpPr txBox="1"/>
           <p:nvPr/>
         </p:nvSpPr>
@@ -22281,7 +23576,7 @@
       </p:sp>
       <p:sp>
         <p:nvSpPr>
-          <p:cNvPr id="17" name="Rounded Rectangle 16"/>
+          <p:cNvPr id="20" name="Rounded Rectangle 19"/>
           <p:cNvSpPr/>
           <p:nvPr/>
         </p:nvSpPr>
@@ -22329,7 +23624,7 @@
       </p:sp>
       <p:sp>
         <p:nvSpPr>
-          <p:cNvPr id="18" name="TextBox 17"/>
+          <p:cNvPr id="21" name="TextBox 20"/>
           <p:cNvSpPr txBox="1"/>
           <p:nvPr/>
         </p:nvSpPr>
@@ -22375,7 +23670,7 @@
       </p:sp>
       <p:sp>
         <p:nvSpPr>
-          <p:cNvPr id="19" name="Rectangle 18"/>
+          <p:cNvPr id="22" name="Rectangle 21"/>
           <p:cNvSpPr/>
           <p:nvPr/>
         </p:nvSpPr>
@@ -22421,7 +23716,7 @@
       </p:sp>
       <p:sp>
         <p:nvSpPr>
-          <p:cNvPr id="20" name="TextBox 19"/>
+          <p:cNvPr id="23" name="TextBox 22"/>
           <p:cNvSpPr txBox="1"/>
           <p:nvPr/>
         </p:nvSpPr>
@@ -22467,7 +23762,7 @@
       </p:sp>
       <p:sp>
         <p:nvSpPr>
-          <p:cNvPr id="21" name="Rounded Rectangle 20"/>
+          <p:cNvPr id="24" name="Rounded Rectangle 23"/>
           <p:cNvSpPr/>
           <p:nvPr/>
         </p:nvSpPr>
@@ -22515,7 +23810,7 @@
       </p:sp>
       <p:sp>
         <p:nvSpPr>
-          <p:cNvPr id="22" name="TextBox 21"/>
+          <p:cNvPr id="25" name="TextBox 24"/>
           <p:cNvSpPr txBox="1"/>
           <p:nvPr/>
         </p:nvSpPr>
@@ -22561,7 +23856,7 @@
       </p:sp>
       <p:sp>
         <p:nvSpPr>
-          <p:cNvPr id="23" name="Rectangle 22"/>
+          <p:cNvPr id="26" name="Rectangle 25"/>
           <p:cNvSpPr/>
           <p:nvPr/>
         </p:nvSpPr>
@@ -22607,7 +23902,7 @@
       </p:sp>
       <p:sp>
         <p:nvSpPr>
-          <p:cNvPr id="24" name="TextBox 23"/>
+          <p:cNvPr id="27" name="TextBox 26"/>
           <p:cNvSpPr txBox="1"/>
           <p:nvPr/>
         </p:nvSpPr>
@@ -22653,7 +23948,7 @@
       </p:sp>
       <p:sp>
         <p:nvSpPr>
-          <p:cNvPr id="25" name="TextBox 24"/>
+          <p:cNvPr id="28" name="TextBox 27"/>
           <p:cNvSpPr txBox="1"/>
           <p:nvPr/>
         </p:nvSpPr>
@@ -22699,7 +23994,7 @@
       </p:sp>
       <p:sp>
         <p:nvSpPr>
-          <p:cNvPr id="26" name="Rectangle 25"/>
+          <p:cNvPr id="29" name="Rectangle 28"/>
           <p:cNvSpPr/>
           <p:nvPr/>
         </p:nvSpPr>
@@ -22745,7 +24040,7 @@
       </p:sp>
       <p:sp>
         <p:nvSpPr>
-          <p:cNvPr id="27" name="TextBox 26"/>
+          <p:cNvPr id="30" name="TextBox 29"/>
           <p:cNvSpPr txBox="1"/>
           <p:nvPr/>
         </p:nvSpPr>
@@ -22791,7 +24086,7 @@
       </p:sp>
       <p:sp>
         <p:nvSpPr>
-          <p:cNvPr id="28" name="Rounded Rectangle 27"/>
+          <p:cNvPr id="31" name="Rounded Rectangle 30"/>
           <p:cNvSpPr/>
           <p:nvPr/>
         </p:nvSpPr>
@@ -22839,7 +24134,7 @@
       </p:sp>
       <p:sp>
         <p:nvSpPr>
-          <p:cNvPr id="29" name="TextBox 28"/>
+          <p:cNvPr id="32" name="TextBox 31"/>
           <p:cNvSpPr txBox="1"/>
           <p:nvPr/>
         </p:nvSpPr>
@@ -22885,7 +24180,7 @@
       </p:sp>
       <p:sp>
         <p:nvSpPr>
-          <p:cNvPr id="30" name="Rectangle 29"/>
+          <p:cNvPr id="33" name="Rectangle 32"/>
           <p:cNvSpPr/>
           <p:nvPr/>
         </p:nvSpPr>
@@ -22931,7 +24226,7 @@
       </p:sp>
       <p:sp>
         <p:nvSpPr>
-          <p:cNvPr id="31" name="TextBox 30"/>
+          <p:cNvPr id="34" name="TextBox 33"/>
           <p:cNvSpPr txBox="1"/>
           <p:nvPr/>
         </p:nvSpPr>
@@ -22977,7 +24272,7 @@
       </p:sp>
       <p:sp>
         <p:nvSpPr>
-          <p:cNvPr id="32" name="TextBox 31"/>
+          <p:cNvPr id="35" name="TextBox 34"/>
           <p:cNvSpPr txBox="1"/>
           <p:nvPr/>
         </p:nvSpPr>
@@ -23023,7 +24318,7 @@
       </p:sp>
       <p:sp>
         <p:nvSpPr>
-          <p:cNvPr id="33" name="Rectangle 32"/>
+          <p:cNvPr id="36" name="Rectangle 35"/>
           <p:cNvSpPr/>
           <p:nvPr/>
         </p:nvSpPr>
@@ -23069,7 +24364,7 @@
       </p:sp>
       <p:sp>
         <p:nvSpPr>
-          <p:cNvPr id="34" name="TextBox 33"/>
+          <p:cNvPr id="37" name="TextBox 36"/>
           <p:cNvSpPr txBox="1"/>
           <p:nvPr/>
         </p:nvSpPr>
@@ -23115,7 +24410,7 @@
       </p:sp>
       <p:sp>
         <p:nvSpPr>
-          <p:cNvPr id="35" name="Rounded Rectangle 34"/>
+          <p:cNvPr id="38" name="Rounded Rectangle 37"/>
           <p:cNvSpPr/>
           <p:nvPr/>
         </p:nvSpPr>
@@ -23163,7 +24458,7 @@
       </p:sp>
       <p:sp>
         <p:nvSpPr>
-          <p:cNvPr id="36" name="TextBox 35"/>
+          <p:cNvPr id="39" name="TextBox 38"/>
           <p:cNvSpPr txBox="1"/>
           <p:nvPr/>
         </p:nvSpPr>
@@ -23209,7 +24504,7 @@
       </p:sp>
       <p:sp>
         <p:nvSpPr>
-          <p:cNvPr id="37" name="Rectangle 36"/>
+          <p:cNvPr id="40" name="Rectangle 39"/>
           <p:cNvSpPr/>
           <p:nvPr/>
         </p:nvSpPr>
@@ -23255,7 +24550,7 @@
       </p:sp>
       <p:sp>
         <p:nvSpPr>
-          <p:cNvPr id="38" name="TextBox 37"/>
+          <p:cNvPr id="41" name="TextBox 40"/>
           <p:cNvSpPr txBox="1"/>
           <p:nvPr/>
         </p:nvSpPr>
@@ -23301,7 +24596,7 @@
       </p:sp>
       <p:sp>
         <p:nvSpPr>
-          <p:cNvPr id="39" name="TextBox 38"/>
+          <p:cNvPr id="42" name="TextBox 41"/>
           <p:cNvSpPr txBox="1"/>
           <p:nvPr/>
         </p:nvSpPr>
@@ -23347,7 +24642,7 @@
       </p:sp>
       <p:sp>
         <p:nvSpPr>
-          <p:cNvPr id="40" name="Rectangle 39"/>
+          <p:cNvPr id="43" name="Rectangle 42"/>
           <p:cNvSpPr/>
           <p:nvPr/>
         </p:nvSpPr>
@@ -23393,7 +24688,7 @@
       </p:sp>
       <p:sp>
         <p:nvSpPr>
-          <p:cNvPr id="41" name="TextBox 40"/>
+          <p:cNvPr id="44" name="TextBox 43"/>
           <p:cNvSpPr txBox="1"/>
           <p:nvPr/>
         </p:nvSpPr>
@@ -23507,80 +24802,30 @@
           </a:p>
         </p:txBody>
       </p:sp>
-      <p:sp>
-        <p:nvSpPr>
-          <p:cNvPr id="3" name="Freeform 2"/>
-          <p:cNvSpPr/>
-          <p:nvPr/>
-        </p:nvSpPr>
-        <p:spPr>
-          <a:xfrm>
-            <a:off x="9479608" y="4208000"/>
-            <a:ext cx="2924783" cy="2851453"/>
-          </a:xfrm>
-          <a:custGeom>
-            <a:avLst/>
-            <a:gdLst/>
-            <a:ahLst/>
-            <a:cxnLst/>
-            <a:rect l="l" t="t" r="r" b="b"/>
-            <a:pathLst>
-              <a:path w="2924783" h="2851453">
-                <a:moveTo>
-                  <a:pt x="1462392" y="0"/>
-                </a:moveTo>
-                <a:lnTo>
-                  <a:pt x="2635139" y="564765"/>
-                </a:lnTo>
-                <a:lnTo>
-                  <a:pt x="2924783" y="1833781"/>
-                </a:lnTo>
-                <a:lnTo>
-                  <a:pt x="2113217" y="2851453"/>
-                </a:lnTo>
-                <a:lnTo>
-                  <a:pt x="811566" y="2851453"/>
-                </a:lnTo>
-                <a:lnTo>
-                  <a:pt x="0" y="1833781"/>
-                </a:lnTo>
-                <a:lnTo>
-                  <a:pt x="289644" y="564765"/>
-                </a:lnTo>
-                <a:close/>
-              </a:path>
-            </a:pathLst>
-          </a:custGeom>
-          <a:noFill/>
-          <a:ln w="31750">
-            <a:solidFill>
-              <a:srgbClr val="26354E"/>
-            </a:solidFill>
-          </a:ln>
-          <a:effectLst/>
-        </p:spPr>
-        <p:style>
-          <a:lnRef idx="1">
-            <a:schemeClr val="accent1"/>
-          </a:lnRef>
-          <a:fillRef idx="3">
-            <a:schemeClr val="accent1"/>
-          </a:fillRef>
-          <a:effectRef idx="2">
-            <a:schemeClr val="accent1"/>
-          </a:effectRef>
-          <a:fontRef idx="minor">
-            <a:schemeClr val="lt1"/>
-          </a:fontRef>
-        </p:style>
-        <p:txBody>
-          <a:bodyPr rtlCol="0" anchor="ctr"/>
-          <a:lstStyle/>
-          <a:p>
-            <a:pPr algn="ctr"/>
-          </a:p>
-        </p:txBody>
-      </p:sp>
+      <p:pic>
+        <p:nvPicPr>
+          <p:cNvPr id="3" name="Picture 2" descr="control-plane.png"/>
+          <p:cNvPicPr>
+            <a:picLocks noChangeAspect="1"/>
+          </p:cNvPicPr>
+          <p:nvPr/>
+        </p:nvPicPr>
+        <p:blipFill>
+          <a:blip r:embed="rId2"/>
+          <a:stretch>
+            <a:fillRect/>
+          </a:stretch>
+        </p:blipFill>
+        <p:spPr>
+          <a:xfrm>
+            <a:off x="8842000" y="2150000"/>
+            <a:ext cx="1800000" cy="1800000"/>
+          </a:xfrm>
+          <a:prstGeom prst="rect">
+            <a:avLst/>
+          </a:prstGeom>
+        </p:spPr>
+      </p:pic>
       <p:sp>
         <p:nvSpPr>
           <p:cNvPr id="4" name="TextBox 3"/>
@@ -24030,7 +25275,7 @@
         <p:spPr>
           <a:xfrm>
             <a:off x="620000" y="560000"/>
-            <a:ext cx="10952000" cy="620000"/>
+            <a:ext cx="10052000" cy="620000"/>
           </a:xfrm>
           <a:prstGeom prst="rect">
             <a:avLst/>
@@ -24251,9 +25496,33 @@
           </a:p>
         </p:txBody>
       </p:sp>
-      <p:sp>
-        <p:nvSpPr>
-          <p:cNvPr id="8" name="Oval 7"/>
+      <p:pic>
+        <p:nvPicPr>
+          <p:cNvPr id="8" name="Picture 7" descr="deploy.png"/>
+          <p:cNvPicPr>
+            <a:picLocks noChangeAspect="1"/>
+          </p:cNvPicPr>
+          <p:nvPr/>
+        </p:nvPicPr>
+        <p:blipFill>
+          <a:blip r:embed="rId2"/>
+          <a:stretch>
+            <a:fillRect/>
+          </a:stretch>
+        </p:blipFill>
+        <p:spPr>
+          <a:xfrm>
+            <a:off x="10932000" y="275000"/>
+            <a:ext cx="640000" cy="640000"/>
+          </a:xfrm>
+          <a:prstGeom prst="rect">
+            <a:avLst/>
+          </a:prstGeom>
+        </p:spPr>
+      </p:pic>
+      <p:sp>
+        <p:nvSpPr>
+          <p:cNvPr id="9" name="Oval 8"/>
           <p:cNvSpPr/>
           <p:nvPr/>
         </p:nvSpPr>
@@ -24297,7 +25566,7 @@
       </p:sp>
       <p:sp>
         <p:nvSpPr>
-          <p:cNvPr id="9" name="TextBox 8"/>
+          <p:cNvPr id="10" name="TextBox 9"/>
           <p:cNvSpPr txBox="1"/>
           <p:nvPr/>
         </p:nvSpPr>
@@ -24343,7 +25612,7 @@
       </p:sp>
       <p:sp>
         <p:nvSpPr>
-          <p:cNvPr id="10" name="Oval 9"/>
+          <p:cNvPr id="11" name="Oval 10"/>
           <p:cNvSpPr/>
           <p:nvPr/>
         </p:nvSpPr>
@@ -24387,7 +25656,7 @@
       </p:sp>
       <p:sp>
         <p:nvSpPr>
-          <p:cNvPr id="11" name="TextBox 10"/>
+          <p:cNvPr id="12" name="TextBox 11"/>
           <p:cNvSpPr txBox="1"/>
           <p:nvPr/>
         </p:nvSpPr>
@@ -24433,7 +25702,7 @@
       </p:sp>
       <p:sp>
         <p:nvSpPr>
-          <p:cNvPr id="12" name="Oval 11"/>
+          <p:cNvPr id="13" name="Oval 12"/>
           <p:cNvSpPr/>
           <p:nvPr/>
         </p:nvSpPr>
@@ -24477,7 +25746,7 @@
       </p:sp>
       <p:sp>
         <p:nvSpPr>
-          <p:cNvPr id="13" name="TextBox 12"/>
+          <p:cNvPr id="14" name="TextBox 13"/>
           <p:cNvSpPr txBox="1"/>
           <p:nvPr/>
         </p:nvSpPr>
@@ -24523,7 +25792,7 @@
       </p:sp>
       <p:sp>
         <p:nvSpPr>
-          <p:cNvPr id="14" name="Oval 13"/>
+          <p:cNvPr id="15" name="Oval 14"/>
           <p:cNvSpPr/>
           <p:nvPr/>
         </p:nvSpPr>
@@ -24567,7 +25836,7 @@
       </p:sp>
       <p:sp>
         <p:nvSpPr>
-          <p:cNvPr id="15" name="TextBox 14"/>
+          <p:cNvPr id="16" name="TextBox 15"/>
           <p:cNvSpPr txBox="1"/>
           <p:nvPr/>
         </p:nvSpPr>
@@ -24613,7 +25882,7 @@
       </p:sp>
       <p:sp>
         <p:nvSpPr>
-          <p:cNvPr id="16" name="Rounded Rectangle 15"/>
+          <p:cNvPr id="17" name="Rounded Rectangle 16"/>
           <p:cNvSpPr/>
           <p:nvPr/>
         </p:nvSpPr>
@@ -24663,7 +25932,7 @@
       </p:sp>
       <p:sp>
         <p:nvSpPr>
-          <p:cNvPr id="17" name="Rectangle 16"/>
+          <p:cNvPr id="18" name="Rectangle 17"/>
           <p:cNvSpPr/>
           <p:nvPr/>
         </p:nvSpPr>
@@ -24709,7 +25978,7 @@
       </p:sp>
       <p:sp>
         <p:nvSpPr>
-          <p:cNvPr id="18" name="TextBox 17"/>
+          <p:cNvPr id="19" name="TextBox 18"/>
           <p:cNvSpPr txBox="1"/>
           <p:nvPr/>
         </p:nvSpPr>
@@ -24755,7 +26024,7 @@
       </p:sp>
       <p:sp>
         <p:nvSpPr>
-          <p:cNvPr id="19" name="Rectangle 18"/>
+          <p:cNvPr id="20" name="Rectangle 19"/>
           <p:cNvSpPr/>
           <p:nvPr/>
         </p:nvSpPr>
@@ -24801,7 +26070,7 @@
       </p:sp>
       <p:sp>
         <p:nvSpPr>
-          <p:cNvPr id="20" name="TextBox 19"/>
+          <p:cNvPr id="21" name="TextBox 20"/>
           <p:cNvSpPr txBox="1"/>
           <p:nvPr/>
         </p:nvSpPr>
@@ -24984,7 +26253,7 @@
       </p:sp>
       <p:sp>
         <p:nvSpPr>
-          <p:cNvPr id="21" name="Rounded Rectangle 20"/>
+          <p:cNvPr id="22" name="Rounded Rectangle 21"/>
           <p:cNvSpPr/>
           <p:nvPr/>
         </p:nvSpPr>
@@ -25034,7 +26303,7 @@
       </p:sp>
       <p:sp>
         <p:nvSpPr>
-          <p:cNvPr id="22" name="Rectangle 21"/>
+          <p:cNvPr id="23" name="Rectangle 22"/>
           <p:cNvSpPr/>
           <p:nvPr/>
         </p:nvSpPr>
@@ -25080,7 +26349,7 @@
       </p:sp>
       <p:sp>
         <p:nvSpPr>
-          <p:cNvPr id="23" name="TextBox 22"/>
+          <p:cNvPr id="24" name="TextBox 23"/>
           <p:cNvSpPr txBox="1"/>
           <p:nvPr/>
         </p:nvSpPr>
@@ -25205,7 +26474,7 @@
         <p:spPr>
           <a:xfrm>
             <a:off x="620000" y="560000"/>
-            <a:ext cx="10952000" cy="620000"/>
+            <a:ext cx="10052000" cy="620000"/>
           </a:xfrm>
           <a:prstGeom prst="rect">
             <a:avLst/>
@@ -25426,9 +26695,33 @@
           </a:p>
         </p:txBody>
       </p:sp>
-      <p:sp>
-        <p:nvSpPr>
-          <p:cNvPr id="8" name="Rounded Rectangle 7"/>
+      <p:pic>
+        <p:nvPicPr>
+          <p:cNvPr id="8" name="Picture 7" descr="kubernetes.png"/>
+          <p:cNvPicPr>
+            <a:picLocks noChangeAspect="1"/>
+          </p:cNvPicPr>
+          <p:nvPr/>
+        </p:nvPicPr>
+        <p:blipFill>
+          <a:blip r:embed="rId2"/>
+          <a:stretch>
+            <a:fillRect/>
+          </a:stretch>
+        </p:blipFill>
+        <p:spPr>
+          <a:xfrm>
+            <a:off x="10932000" y="275000"/>
+            <a:ext cx="640000" cy="640000"/>
+          </a:xfrm>
+          <a:prstGeom prst="rect">
+            <a:avLst/>
+          </a:prstGeom>
+        </p:spPr>
+      </p:pic>
+      <p:sp>
+        <p:nvSpPr>
+          <p:cNvPr id="9" name="Rounded Rectangle 8"/>
           <p:cNvSpPr/>
           <p:nvPr/>
         </p:nvSpPr>
@@ -25478,7 +26771,7 @@
       </p:sp>
       <p:sp>
         <p:nvSpPr>
-          <p:cNvPr id="9" name="Oval 8"/>
+          <p:cNvPr id="10" name="Oval 9"/>
           <p:cNvSpPr/>
           <p:nvPr/>
         </p:nvSpPr>
@@ -25544,7 +26837,7 @@
       </p:sp>
       <p:sp>
         <p:nvSpPr>
-          <p:cNvPr id="10" name="TextBox 9"/>
+          <p:cNvPr id="11" name="TextBox 10"/>
           <p:cNvSpPr txBox="1"/>
           <p:nvPr/>
         </p:nvSpPr>
@@ -25590,7 +26883,7 @@
       </p:sp>
       <p:sp>
         <p:nvSpPr>
-          <p:cNvPr id="11" name="Rectangle 10"/>
+          <p:cNvPr id="12" name="Rectangle 11"/>
           <p:cNvSpPr/>
           <p:nvPr/>
         </p:nvSpPr>
@@ -25636,7 +26929,7 @@
       </p:sp>
       <p:sp>
         <p:nvSpPr>
-          <p:cNvPr id="12" name="TextBox 11"/>
+          <p:cNvPr id="13" name="TextBox 12"/>
           <p:cNvSpPr txBox="1"/>
           <p:nvPr/>
         </p:nvSpPr>
@@ -25682,7 +26975,7 @@
       </p:sp>
       <p:sp>
         <p:nvSpPr>
-          <p:cNvPr id="13" name="TextBox 12"/>
+          <p:cNvPr id="14" name="TextBox 13"/>
           <p:cNvSpPr txBox="1"/>
           <p:nvPr/>
         </p:nvSpPr>
@@ -25728,7 +27021,7 @@
       </p:sp>
       <p:sp>
         <p:nvSpPr>
-          <p:cNvPr id="14" name="Rounded Rectangle 13"/>
+          <p:cNvPr id="15" name="Rounded Rectangle 14"/>
           <p:cNvSpPr/>
           <p:nvPr/>
         </p:nvSpPr>
@@ -25778,7 +27071,7 @@
       </p:sp>
       <p:sp>
         <p:nvSpPr>
-          <p:cNvPr id="15" name="Oval 14"/>
+          <p:cNvPr id="16" name="Oval 15"/>
           <p:cNvSpPr/>
           <p:nvPr/>
         </p:nvSpPr>
@@ -25844,7 +27137,7 @@
       </p:sp>
       <p:sp>
         <p:nvSpPr>
-          <p:cNvPr id="16" name="TextBox 15"/>
+          <p:cNvPr id="17" name="TextBox 16"/>
           <p:cNvSpPr txBox="1"/>
           <p:nvPr/>
         </p:nvSpPr>
@@ -25890,7 +27183,7 @@
       </p:sp>
       <p:sp>
         <p:nvSpPr>
-          <p:cNvPr id="17" name="Rectangle 16"/>
+          <p:cNvPr id="18" name="Rectangle 17"/>
           <p:cNvSpPr/>
           <p:nvPr/>
         </p:nvSpPr>
@@ -25936,7 +27229,7 @@
       </p:sp>
       <p:sp>
         <p:nvSpPr>
-          <p:cNvPr id="18" name="TextBox 17"/>
+          <p:cNvPr id="19" name="TextBox 18"/>
           <p:cNvSpPr txBox="1"/>
           <p:nvPr/>
         </p:nvSpPr>
@@ -25982,7 +27275,7 @@
       </p:sp>
       <p:sp>
         <p:nvSpPr>
-          <p:cNvPr id="19" name="TextBox 18"/>
+          <p:cNvPr id="20" name="TextBox 19"/>
           <p:cNvSpPr txBox="1"/>
           <p:nvPr/>
         </p:nvSpPr>
@@ -26028,7 +27321,7 @@
       </p:sp>
       <p:sp>
         <p:nvSpPr>
-          <p:cNvPr id="20" name="Rounded Rectangle 19"/>
+          <p:cNvPr id="21" name="Rounded Rectangle 20"/>
           <p:cNvSpPr/>
           <p:nvPr/>
         </p:nvSpPr>
@@ -26078,7 +27371,7 @@
       </p:sp>
       <p:sp>
         <p:nvSpPr>
-          <p:cNvPr id="21" name="Oval 20"/>
+          <p:cNvPr id="22" name="Oval 21"/>
           <p:cNvSpPr/>
           <p:nvPr/>
         </p:nvSpPr>
@@ -26144,7 +27437,7 @@
       </p:sp>
       <p:sp>
         <p:nvSpPr>
-          <p:cNvPr id="22" name="TextBox 21"/>
+          <p:cNvPr id="23" name="TextBox 22"/>
           <p:cNvSpPr txBox="1"/>
           <p:nvPr/>
         </p:nvSpPr>
@@ -26190,7 +27483,7 @@
       </p:sp>
       <p:sp>
         <p:nvSpPr>
-          <p:cNvPr id="23" name="Rectangle 22"/>
+          <p:cNvPr id="24" name="Rectangle 23"/>
           <p:cNvSpPr/>
           <p:nvPr/>
         </p:nvSpPr>
@@ -26236,7 +27529,7 @@
       </p:sp>
       <p:sp>
         <p:nvSpPr>
-          <p:cNvPr id="24" name="TextBox 23"/>
+          <p:cNvPr id="25" name="TextBox 24"/>
           <p:cNvSpPr txBox="1"/>
           <p:nvPr/>
         </p:nvSpPr>
@@ -26282,7 +27575,7 @@
       </p:sp>
       <p:sp>
         <p:nvSpPr>
-          <p:cNvPr id="25" name="TextBox 24"/>
+          <p:cNvPr id="26" name="TextBox 25"/>
           <p:cNvSpPr txBox="1"/>
           <p:nvPr/>
         </p:nvSpPr>
@@ -26328,7 +27621,7 @@
       </p:sp>
       <p:sp>
         <p:nvSpPr>
-          <p:cNvPr id="26" name="Rounded Rectangle 25"/>
+          <p:cNvPr id="27" name="Rounded Rectangle 26"/>
           <p:cNvSpPr/>
           <p:nvPr/>
         </p:nvSpPr>
@@ -26378,7 +27671,7 @@
       </p:sp>
       <p:sp>
         <p:nvSpPr>
-          <p:cNvPr id="27" name="Oval 26"/>
+          <p:cNvPr id="28" name="Oval 27"/>
           <p:cNvSpPr/>
           <p:nvPr/>
         </p:nvSpPr>
@@ -26444,7 +27737,7 @@
       </p:sp>
       <p:sp>
         <p:nvSpPr>
-          <p:cNvPr id="28" name="TextBox 27"/>
+          <p:cNvPr id="29" name="TextBox 28"/>
           <p:cNvSpPr txBox="1"/>
           <p:nvPr/>
         </p:nvSpPr>
@@ -26490,7 +27783,7 @@
       </p:sp>
       <p:sp>
         <p:nvSpPr>
-          <p:cNvPr id="29" name="Rectangle 28"/>
+          <p:cNvPr id="30" name="Rectangle 29"/>
           <p:cNvSpPr/>
           <p:nvPr/>
         </p:nvSpPr>
@@ -26536,7 +27829,7 @@
       </p:sp>
       <p:sp>
         <p:nvSpPr>
-          <p:cNvPr id="30" name="TextBox 29"/>
+          <p:cNvPr id="31" name="TextBox 30"/>
           <p:cNvSpPr txBox="1"/>
           <p:nvPr/>
         </p:nvSpPr>
@@ -26582,7 +27875,7 @@
       </p:sp>
       <p:sp>
         <p:nvSpPr>
-          <p:cNvPr id="31" name="Rounded Rectangle 30"/>
+          <p:cNvPr id="32" name="Rounded Rectangle 31"/>
           <p:cNvSpPr/>
           <p:nvPr/>
         </p:nvSpPr>
@@ -26632,7 +27925,7 @@
       </p:sp>
       <p:sp>
         <p:nvSpPr>
-          <p:cNvPr id="32" name="Rectangle 31"/>
+          <p:cNvPr id="33" name="Rectangle 32"/>
           <p:cNvSpPr/>
           <p:nvPr/>
         </p:nvSpPr>
@@ -26678,7 +27971,7 @@
       </p:sp>
       <p:sp>
         <p:nvSpPr>
-          <p:cNvPr id="33" name="TextBox 32"/>
+          <p:cNvPr id="34" name="TextBox 33"/>
           <p:cNvSpPr txBox="1"/>
           <p:nvPr/>
         </p:nvSpPr>
@@ -26803,7 +28096,7 @@
         <p:spPr>
           <a:xfrm>
             <a:off x="620000" y="560000"/>
-            <a:ext cx="10952000" cy="620000"/>
+            <a:ext cx="10052000" cy="620000"/>
           </a:xfrm>
           <a:prstGeom prst="rect">
             <a:avLst/>
@@ -27024,9 +28317,33 @@
           </a:p>
         </p:txBody>
       </p:sp>
-      <p:sp>
-        <p:nvSpPr>
-          <p:cNvPr id="8" name="TextBox 7"/>
+      <p:pic>
+        <p:nvPicPr>
+          <p:cNvPr id="8" name="Picture 7" descr="kubernetes.png"/>
+          <p:cNvPicPr>
+            <a:picLocks noChangeAspect="1"/>
+          </p:cNvPicPr>
+          <p:nvPr/>
+        </p:nvPicPr>
+        <p:blipFill>
+          <a:blip r:embed="rId2"/>
+          <a:stretch>
+            <a:fillRect/>
+          </a:stretch>
+        </p:blipFill>
+        <p:spPr>
+          <a:xfrm>
+            <a:off x="10932000" y="275000"/>
+            <a:ext cx="640000" cy="640000"/>
+          </a:xfrm>
+          <a:prstGeom prst="rect">
+            <a:avLst/>
+          </a:prstGeom>
+        </p:spPr>
+      </p:pic>
+      <p:sp>
+        <p:nvSpPr>
+          <p:cNvPr id="9" name="TextBox 8"/>
           <p:cNvSpPr txBox="1"/>
           <p:nvPr/>
         </p:nvSpPr>
@@ -27072,7 +28389,7 @@
       </p:sp>
       <p:sp>
         <p:nvSpPr>
-          <p:cNvPr id="9" name="Rounded Rectangle 8"/>
+          <p:cNvPr id="10" name="Rounded Rectangle 9"/>
           <p:cNvSpPr/>
           <p:nvPr/>
         </p:nvSpPr>
@@ -27122,7 +28439,7 @@
       </p:sp>
       <p:sp>
         <p:nvSpPr>
-          <p:cNvPr id="10" name="Rectangle 9"/>
+          <p:cNvPr id="11" name="Rectangle 10"/>
           <p:cNvSpPr/>
           <p:nvPr/>
         </p:nvSpPr>
@@ -27168,7 +28485,7 @@
       </p:sp>
       <p:sp>
         <p:nvSpPr>
-          <p:cNvPr id="11" name="TextBox 10"/>
+          <p:cNvPr id="12" name="TextBox 11"/>
           <p:cNvSpPr txBox="1"/>
           <p:nvPr/>
         </p:nvSpPr>
@@ -27938,7 +29255,149 @@
       </p:sp>
       <p:sp>
         <p:nvSpPr>
-          <p:cNvPr id="14" name="Rounded Rectangle 13"/>
+          <p:cNvPr id="14" name="Freeform 13"/>
+          <p:cNvSpPr/>
+          <p:nvPr/>
+        </p:nvSpPr>
+        <p:spPr>
+          <a:xfrm>
+            <a:off x="9590000" y="1418800"/>
+            <a:ext cx="784000" cy="842800"/>
+          </a:xfrm>
+          <a:custGeom>
+            <a:avLst/>
+            <a:gdLst/>
+            <a:ahLst/>
+            <a:cxnLst/>
+            <a:rect l="l" t="t" r="r" b="b"/>
+            <a:pathLst>
+              <a:path w="784000" h="842800">
+                <a:moveTo>
+                  <a:pt x="235200" y="0"/>
+                </a:moveTo>
+                <a:lnTo>
+                  <a:pt x="235200" y="333200"/>
+                </a:lnTo>
+                <a:lnTo>
+                  <a:pt x="0" y="842800"/>
+                </a:lnTo>
+                <a:lnTo>
+                  <a:pt x="784000" y="842800"/>
+                </a:lnTo>
+                <a:lnTo>
+                  <a:pt x="548800" y="333200"/>
+                </a:lnTo>
+                <a:lnTo>
+                  <a:pt x="548800" y="0"/>
+                </a:lnTo>
+              </a:path>
+            </a:pathLst>
+          </a:custGeom>
+          <a:noFill/>
+          <a:ln w="33020">
+            <a:solidFill>
+              <a:srgbClr val="74A6FF"/>
+            </a:solidFill>
+          </a:ln>
+          <a:effectLst/>
+        </p:spPr>
+        <p:style>
+          <a:lnRef idx="1">
+            <a:schemeClr val="accent1"/>
+          </a:lnRef>
+          <a:fillRef idx="3">
+            <a:schemeClr val="accent1"/>
+          </a:fillRef>
+          <a:effectRef idx="2">
+            <a:schemeClr val="accent1"/>
+          </a:effectRef>
+          <a:fontRef idx="minor">
+            <a:schemeClr val="lt1"/>
+          </a:fontRef>
+        </p:style>
+        <p:txBody>
+          <a:bodyPr rtlCol="0" anchor="ctr"/>
+          <a:lstStyle/>
+          <a:p>
+            <a:pPr algn="ctr"/>
+          </a:p>
+        </p:txBody>
+      </p:sp>
+      <p:cxnSp>
+        <p:nvCxnSpPr>
+          <p:cNvPr id="15" name="Connector 14"/>
+          <p:cNvCxnSpPr/>
+          <p:nvPr/>
+        </p:nvCxnSpPr>
+        <p:spPr>
+          <a:xfrm>
+            <a:off x="9766400" y="1418800"/>
+            <a:ext cx="431200" cy="0"/>
+          </a:xfrm>
+          <a:prstGeom prst="line">
+            <a:avLst/>
+          </a:prstGeom>
+          <a:ln w="33020">
+            <a:solidFill>
+              <a:srgbClr val="74A6FF"/>
+            </a:solidFill>
+          </a:ln>
+          <a:effectLst/>
+        </p:spPr>
+        <p:style>
+          <a:lnRef idx="2">
+            <a:schemeClr val="accent1"/>
+          </a:lnRef>
+          <a:fillRef idx="0">
+            <a:schemeClr val="accent1"/>
+          </a:fillRef>
+          <a:effectRef idx="1">
+            <a:schemeClr val="accent1"/>
+          </a:effectRef>
+          <a:fontRef idx="minor">
+            <a:schemeClr val="tx1"/>
+          </a:fontRef>
+        </p:style>
+      </p:cxnSp>
+      <p:cxnSp>
+        <p:nvCxnSpPr>
+          <p:cNvPr id="16" name="Connector 15"/>
+          <p:cNvCxnSpPr/>
+          <p:nvPr/>
+        </p:nvCxnSpPr>
+        <p:spPr>
+          <a:xfrm>
+            <a:off x="9727200" y="2006800"/>
+            <a:ext cx="509600" cy="0"/>
+          </a:xfrm>
+          <a:prstGeom prst="line">
+            <a:avLst/>
+          </a:prstGeom>
+          <a:ln w="33020">
+            <a:solidFill>
+              <a:srgbClr val="74A6FF"/>
+            </a:solidFill>
+          </a:ln>
+          <a:effectLst/>
+        </p:spPr>
+        <p:style>
+          <a:lnRef idx="2">
+            <a:schemeClr val="accent1"/>
+          </a:lnRef>
+          <a:fillRef idx="0">
+            <a:schemeClr val="accent1"/>
+          </a:fillRef>
+          <a:effectRef idx="1">
+            <a:schemeClr val="accent1"/>
+          </a:effectRef>
+          <a:fontRef idx="minor">
+            <a:schemeClr val="tx1"/>
+          </a:fontRef>
+        </p:style>
+      </p:cxnSp>
+      <p:sp>
+        <p:nvSpPr>
+          <p:cNvPr id="17" name="Rounded Rectangle 16"/>
           <p:cNvSpPr/>
           <p:nvPr/>
         </p:nvSpPr>
@@ -27988,7 +29447,7 @@
       </p:sp>
       <p:sp>
         <p:nvSpPr>
-          <p:cNvPr id="15" name="Rectangle 14"/>
+          <p:cNvPr id="18" name="Rectangle 17"/>
           <p:cNvSpPr/>
           <p:nvPr/>
         </p:nvSpPr>
@@ -28034,7 +29493,7 @@
       </p:sp>
       <p:sp>
         <p:nvSpPr>
-          <p:cNvPr id="16" name="TextBox 15"/>
+          <p:cNvPr id="19" name="TextBox 18"/>
           <p:cNvSpPr txBox="1"/>
           <p:nvPr/>
         </p:nvSpPr>
@@ -28103,7 +29562,7 @@
       </p:sp>
       <p:sp>
         <p:nvSpPr>
-          <p:cNvPr id="17" name="Rectangle 16"/>
+          <p:cNvPr id="20" name="Rectangle 19"/>
           <p:cNvSpPr/>
           <p:nvPr/>
         </p:nvSpPr>
@@ -28149,7 +29608,7 @@
       </p:sp>
       <p:sp>
         <p:nvSpPr>
-          <p:cNvPr id="18" name="TextBox 17"/>
+          <p:cNvPr id="21" name="TextBox 20"/>
           <p:cNvSpPr txBox="1"/>
           <p:nvPr/>
         </p:nvSpPr>
@@ -28218,7 +29677,7 @@
       </p:sp>
       <p:sp>
         <p:nvSpPr>
-          <p:cNvPr id="19" name="Rectangle 18"/>
+          <p:cNvPr id="22" name="Rectangle 21"/>
           <p:cNvSpPr/>
           <p:nvPr/>
         </p:nvSpPr>
@@ -28264,7 +29723,7 @@
       </p:sp>
       <p:sp>
         <p:nvSpPr>
-          <p:cNvPr id="20" name="TextBox 19"/>
+          <p:cNvPr id="23" name="TextBox 22"/>
           <p:cNvSpPr txBox="1"/>
           <p:nvPr/>
         </p:nvSpPr>
@@ -28333,7 +29792,7 @@
       </p:sp>
       <p:sp>
         <p:nvSpPr>
-          <p:cNvPr id="21" name="Rectangle 20"/>
+          <p:cNvPr id="24" name="Rectangle 23"/>
           <p:cNvSpPr/>
           <p:nvPr/>
         </p:nvSpPr>
@@ -28379,7 +29838,7 @@
       </p:sp>
       <p:sp>
         <p:nvSpPr>
-          <p:cNvPr id="22" name="TextBox 21"/>
+          <p:cNvPr id="25" name="TextBox 24"/>
           <p:cNvSpPr txBox="1"/>
           <p:nvPr/>
         </p:nvSpPr>
@@ -28425,7 +29884,7 @@
       </p:sp>
       <p:sp>
         <p:nvSpPr>
-          <p:cNvPr id="23" name="TextBox 22"/>
+          <p:cNvPr id="26" name="TextBox 25"/>
           <p:cNvSpPr txBox="1"/>
           <p:nvPr/>
         </p:nvSpPr>
@@ -28539,80 +29998,30 @@
           </a:p>
         </p:txBody>
       </p:sp>
-      <p:sp>
-        <p:nvSpPr>
-          <p:cNvPr id="3" name="Freeform 2"/>
-          <p:cNvSpPr/>
-          <p:nvPr/>
-        </p:nvSpPr>
-        <p:spPr>
-          <a:xfrm>
-            <a:off x="9479608" y="4208000"/>
-            <a:ext cx="2924783" cy="2851453"/>
-          </a:xfrm>
-          <a:custGeom>
-            <a:avLst/>
-            <a:gdLst/>
-            <a:ahLst/>
-            <a:cxnLst/>
-            <a:rect l="l" t="t" r="r" b="b"/>
-            <a:pathLst>
-              <a:path w="2924783" h="2851453">
-                <a:moveTo>
-                  <a:pt x="1462392" y="0"/>
-                </a:moveTo>
-                <a:lnTo>
-                  <a:pt x="2635139" y="564765"/>
-                </a:lnTo>
-                <a:lnTo>
-                  <a:pt x="2924783" y="1833781"/>
-                </a:lnTo>
-                <a:lnTo>
-                  <a:pt x="2113217" y="2851453"/>
-                </a:lnTo>
-                <a:lnTo>
-                  <a:pt x="811566" y="2851453"/>
-                </a:lnTo>
-                <a:lnTo>
-                  <a:pt x="0" y="1833781"/>
-                </a:lnTo>
-                <a:lnTo>
-                  <a:pt x="289644" y="564765"/>
-                </a:lnTo>
-                <a:close/>
-              </a:path>
-            </a:pathLst>
-          </a:custGeom>
-          <a:noFill/>
-          <a:ln w="31750">
-            <a:solidFill>
-              <a:srgbClr val="26354E"/>
-            </a:solidFill>
-          </a:ln>
-          <a:effectLst/>
-        </p:spPr>
-        <p:style>
-          <a:lnRef idx="1">
-            <a:schemeClr val="accent1"/>
-          </a:lnRef>
-          <a:fillRef idx="3">
-            <a:schemeClr val="accent1"/>
-          </a:fillRef>
-          <a:effectRef idx="2">
-            <a:schemeClr val="accent1"/>
-          </a:effectRef>
-          <a:fontRef idx="minor">
-            <a:schemeClr val="lt1"/>
-          </a:fontRef>
-        </p:style>
-        <p:txBody>
-          <a:bodyPr rtlCol="0" anchor="ctr"/>
-          <a:lstStyle/>
-          <a:p>
-            <a:pPr algn="ctr"/>
-          </a:p>
-        </p:txBody>
-      </p:sp>
+      <p:pic>
+        <p:nvPicPr>
+          <p:cNvPr id="3" name="Picture 2" descr="control-plane.png"/>
+          <p:cNvPicPr>
+            <a:picLocks noChangeAspect="1"/>
+          </p:cNvPicPr>
+          <p:nvPr/>
+        </p:nvPicPr>
+        <p:blipFill>
+          <a:blip r:embed="rId2"/>
+          <a:stretch>
+            <a:fillRect/>
+          </a:stretch>
+        </p:blipFill>
+        <p:spPr>
+          <a:xfrm>
+            <a:off x="8842000" y="2150000"/>
+            <a:ext cx="1800000" cy="1800000"/>
+          </a:xfrm>
+          <a:prstGeom prst="rect">
+            <a:avLst/>
+          </a:prstGeom>
+        </p:spPr>
+      </p:pic>
       <p:sp>
         <p:nvSpPr>
           <p:cNvPr id="4" name="TextBox 3"/>

--- a/CLASE-02/01-CLASE-02-CKA.pptx
+++ b/CLASE-02/01-CLASE-02-CKA.pptx
@@ -4678,8 +4678,8 @@
         </p:nvSpPr>
         <p:spPr>
           <a:xfrm>
-            <a:off x="620000" y="1710000"/>
-            <a:ext cx="2580500" cy="680000"/>
+            <a:off x="620000" y="1670000"/>
+            <a:ext cx="2580500" cy="660000"/>
           </a:xfrm>
           <a:prstGeom prst="roundRect">
             <a:avLst>
@@ -4728,8 +4728,8 @@
         </p:nvSpPr>
         <p:spPr>
           <a:xfrm>
-            <a:off x="690000" y="1710000"/>
-            <a:ext cx="2440500" cy="680000"/>
+            <a:off x="690000" y="1670000"/>
+            <a:ext cx="2440500" cy="660000"/>
           </a:xfrm>
           <a:prstGeom prst="rect">
             <a:avLst/>
@@ -4774,7 +4774,7 @@
         </p:nvCxnSpPr>
         <p:spPr>
           <a:xfrm>
-            <a:off x="3224500" y="2050000"/>
+            <a:off x="3224500" y="2000000"/>
             <a:ext cx="162000" cy="0"/>
           </a:xfrm>
           <a:prstGeom prst="line">
@@ -4811,8 +4811,8 @@
         </p:nvSpPr>
         <p:spPr>
           <a:xfrm>
-            <a:off x="3410500" y="1710000"/>
-            <a:ext cx="2580500" cy="680000"/>
+            <a:off x="3410500" y="1670000"/>
+            <a:ext cx="2580500" cy="660000"/>
           </a:xfrm>
           <a:prstGeom prst="roundRect">
             <a:avLst>
@@ -4861,8 +4861,8 @@
         </p:nvSpPr>
         <p:spPr>
           <a:xfrm>
-            <a:off x="3480500" y="1710000"/>
-            <a:ext cx="2440500" cy="680000"/>
+            <a:off x="3480500" y="1670000"/>
+            <a:ext cx="2440500" cy="660000"/>
           </a:xfrm>
           <a:prstGeom prst="rect">
             <a:avLst/>
@@ -4907,7 +4907,7 @@
         </p:nvCxnSpPr>
         <p:spPr>
           <a:xfrm>
-            <a:off x="6015000" y="2050000"/>
+            <a:off x="6015000" y="2000000"/>
             <a:ext cx="162000" cy="0"/>
           </a:xfrm>
           <a:prstGeom prst="line">
@@ -4944,8 +4944,8 @@
         </p:nvSpPr>
         <p:spPr>
           <a:xfrm>
-            <a:off x="6201000" y="1710000"/>
-            <a:ext cx="2580500" cy="680000"/>
+            <a:off x="6201000" y="1670000"/>
+            <a:ext cx="2580500" cy="660000"/>
           </a:xfrm>
           <a:prstGeom prst="roundRect">
             <a:avLst>
@@ -4994,8 +4994,8 @@
         </p:nvSpPr>
         <p:spPr>
           <a:xfrm>
-            <a:off x="6271000" y="1710000"/>
-            <a:ext cx="2440500" cy="680000"/>
+            <a:off x="6271000" y="1670000"/>
+            <a:ext cx="2440500" cy="660000"/>
           </a:xfrm>
           <a:prstGeom prst="rect">
             <a:avLst/>
@@ -5040,7 +5040,7 @@
         </p:nvCxnSpPr>
         <p:spPr>
           <a:xfrm>
-            <a:off x="8805500" y="2050000"/>
+            <a:off x="8805500" y="2000000"/>
             <a:ext cx="162000" cy="0"/>
           </a:xfrm>
           <a:prstGeom prst="line">
@@ -5077,8 +5077,8 @@
         </p:nvSpPr>
         <p:spPr>
           <a:xfrm>
-            <a:off x="8991500" y="1710000"/>
-            <a:ext cx="2580500" cy="680000"/>
+            <a:off x="8991500" y="1670000"/>
+            <a:ext cx="2580500" cy="660000"/>
           </a:xfrm>
           <a:prstGeom prst="roundRect">
             <a:avLst>
@@ -5127,8 +5127,8 @@
         </p:nvSpPr>
         <p:spPr>
           <a:xfrm>
-            <a:off x="9061500" y="1710000"/>
-            <a:ext cx="2440500" cy="680000"/>
+            <a:off x="9061500" y="1670000"/>
+            <a:ext cx="2440500" cy="660000"/>
           </a:xfrm>
           <a:prstGeom prst="rect">
             <a:avLst/>
@@ -5173,8 +5173,8 @@
         </p:nvCxnSpPr>
         <p:spPr>
           <a:xfrm>
-            <a:off x="10281750" y="2416000"/>
-            <a:ext cx="0" cy="208000"/>
+            <a:off x="10281750" y="2356000"/>
+            <a:ext cx="0" cy="168000"/>
           </a:xfrm>
           <a:prstGeom prst="line">
             <a:avLst/>
@@ -5210,8 +5210,8 @@
         </p:nvSpPr>
         <p:spPr>
           <a:xfrm>
-            <a:off x="620000" y="2650000"/>
-            <a:ext cx="2580500" cy="680000"/>
+            <a:off x="620000" y="2550000"/>
+            <a:ext cx="2580500" cy="660000"/>
           </a:xfrm>
           <a:prstGeom prst="roundRect">
             <a:avLst>
@@ -5260,8 +5260,8 @@
         </p:nvSpPr>
         <p:spPr>
           <a:xfrm>
-            <a:off x="690000" y="2650000"/>
-            <a:ext cx="2440500" cy="680000"/>
+            <a:off x="690000" y="2550000"/>
+            <a:ext cx="2440500" cy="660000"/>
           </a:xfrm>
           <a:prstGeom prst="rect">
             <a:avLst/>
@@ -5306,7 +5306,7 @@
         </p:nvCxnSpPr>
         <p:spPr>
           <a:xfrm>
-            <a:off x="3224500" y="2990000"/>
+            <a:off x="3224500" y="2880000"/>
             <a:ext cx="162000" cy="0"/>
           </a:xfrm>
           <a:prstGeom prst="line">
@@ -5343,8 +5343,8 @@
         </p:nvSpPr>
         <p:spPr>
           <a:xfrm>
-            <a:off x="3410500" y="2650000"/>
-            <a:ext cx="2580500" cy="680000"/>
+            <a:off x="3410500" y="2550000"/>
+            <a:ext cx="2580500" cy="660000"/>
           </a:xfrm>
           <a:prstGeom prst="roundRect">
             <a:avLst>
@@ -5393,8 +5393,8 @@
         </p:nvSpPr>
         <p:spPr>
           <a:xfrm>
-            <a:off x="3480500" y="2650000"/>
-            <a:ext cx="2440500" cy="680000"/>
+            <a:off x="3480500" y="2550000"/>
+            <a:ext cx="2440500" cy="660000"/>
           </a:xfrm>
           <a:prstGeom prst="rect">
             <a:avLst/>
@@ -5439,7 +5439,7 @@
         </p:nvCxnSpPr>
         <p:spPr>
           <a:xfrm>
-            <a:off x="6015000" y="2990000"/>
+            <a:off x="6015000" y="2880000"/>
             <a:ext cx="162000" cy="0"/>
           </a:xfrm>
           <a:prstGeom prst="line">
@@ -5476,8 +5476,8 @@
         </p:nvSpPr>
         <p:spPr>
           <a:xfrm>
-            <a:off x="6201000" y="2650000"/>
-            <a:ext cx="2580500" cy="680000"/>
+            <a:off x="6201000" y="2550000"/>
+            <a:ext cx="2580500" cy="660000"/>
           </a:xfrm>
           <a:prstGeom prst="roundRect">
             <a:avLst>
@@ -5526,8 +5526,8 @@
         </p:nvSpPr>
         <p:spPr>
           <a:xfrm>
-            <a:off x="6271000" y="2650000"/>
-            <a:ext cx="2440500" cy="680000"/>
+            <a:off x="6271000" y="2550000"/>
+            <a:ext cx="2440500" cy="660000"/>
           </a:xfrm>
           <a:prstGeom prst="rect">
             <a:avLst/>
@@ -5572,7 +5572,7 @@
         </p:nvCxnSpPr>
         <p:spPr>
           <a:xfrm>
-            <a:off x="8805500" y="2990000"/>
+            <a:off x="8805500" y="2880000"/>
             <a:ext cx="162000" cy="0"/>
           </a:xfrm>
           <a:prstGeom prst="line">
@@ -5609,8 +5609,8 @@
         </p:nvSpPr>
         <p:spPr>
           <a:xfrm>
-            <a:off x="8991500" y="2650000"/>
-            <a:ext cx="2580500" cy="680000"/>
+            <a:off x="8991500" y="2550000"/>
+            <a:ext cx="2580500" cy="660000"/>
           </a:xfrm>
           <a:prstGeom prst="roundRect">
             <a:avLst>
@@ -5659,8 +5659,8 @@
         </p:nvSpPr>
         <p:spPr>
           <a:xfrm>
-            <a:off x="9061500" y="2650000"/>
-            <a:ext cx="2440500" cy="680000"/>
+            <a:off x="9061500" y="2550000"/>
+            <a:ext cx="2440500" cy="660000"/>
           </a:xfrm>
           <a:prstGeom prst="rect">
             <a:avLst/>
@@ -5705,12 +5705,12 @@
         </p:nvSpPr>
         <p:spPr>
           <a:xfrm>
-            <a:off x="620000" y="3690000"/>
-            <a:ext cx="10952000" cy="2070000"/>
+            <a:off x="620000" y="3510000"/>
+            <a:ext cx="10952000" cy="2770000"/>
           </a:xfrm>
           <a:prstGeom prst="roundRect">
             <a:avLst>
-              <a:gd name="adj" fmla="val 6000"/>
+              <a:gd name="adj" fmla="val 4500"/>
             </a:avLst>
           </a:prstGeom>
           <a:solidFill>
@@ -5755,8 +5755,8 @@
         </p:nvSpPr>
         <p:spPr>
           <a:xfrm>
-            <a:off x="650000" y="3714000"/>
-            <a:ext cx="40000" cy="2022000"/>
+            <a:off x="646000" y="3532000"/>
+            <a:ext cx="40000" cy="2726000"/>
           </a:xfrm>
           <a:prstGeom prst="rect">
             <a:avLst/>
@@ -5801,8 +5801,8 @@
         </p:nvSpPr>
         <p:spPr>
           <a:xfrm>
-            <a:off x="880000" y="3930000"/>
-            <a:ext cx="10432000" cy="1670000"/>
+            <a:off x="860000" y="3640000"/>
+            <a:ext cx="10522000" cy="2510000"/>
           </a:xfrm>
           <a:prstGeom prst="rect">
             <a:avLst/>
@@ -5823,14 +5823,14 @@
                 <a:spcPts val="0"/>
               </a:spcBef>
               <a:spcAft>
-                <a:spcPts val="1200"/>
-              </a:spcAft>
-              <a:buNone/>
-            </a:pPr>
-            <a:r>
-              <a:rPr sz="1000" b="1" i="0" spc="180">
-                <a:solidFill>
-                  <a:srgbClr val="74A6FF"/>
+                <a:spcPts val="600"/>
+              </a:spcAft>
+              <a:buNone/>
+            </a:pPr>
+            <a:r>
+              <a:rPr sz="900" b="1" i="0" spc="200">
+                <a:solidFill>
+                  <a:srgbClr val="326CE5"/>
                 </a:solidFill>
                 <a:latin typeface="Segoe UI Semibold"/>
               </a:rPr>
@@ -5838,18 +5838,17 @@
             </a:r>
           </a:p>
           <a:p>
-            <a:pPr algn="l" marL="182880" indent="-182880">
-              <a:lnSpc>
-                <a:spcPct val="120000"/>
-              </a:lnSpc>
-              <a:spcBef>
-                <a:spcPts val="0"/>
-              </a:spcBef>
-              <a:spcAft>
-                <a:spcPts val="700"/>
-              </a:spcAft>
-              <a:buFont typeface="Arial"/>
-              <a:buChar char="•"/>
+            <a:pPr algn="l" marL="0" indent="0">
+              <a:lnSpc>
+                <a:spcPct val="128000"/>
+              </a:lnSpc>
+              <a:spcBef>
+                <a:spcPts val="0"/>
+              </a:spcBef>
+              <a:spcAft>
+                <a:spcPts val="400"/>
+              </a:spcAft>
+              <a:buNone/>
             </a:pPr>
             <a:r>
               <a:rPr sz="1100" b="0" i="0">
@@ -5858,22 +5857,21 @@
                 </a:solidFill>
                 <a:latin typeface="Segoe UI"/>
               </a:rPr>
-              <a:t>kubeadm escribe los manifiestos nuevos de los static Pods: tiene que ir primero.</a:t>
-            </a:r>
-          </a:p>
-          <a:p>
-            <a:pPr algn="l" marL="182880" indent="-182880">
-              <a:lnSpc>
-                <a:spcPct val="120000"/>
-              </a:lnSpc>
-              <a:spcBef>
-                <a:spcPts val="0"/>
-              </a:spcBef>
-              <a:spcAft>
-                <a:spcPts val="700"/>
-              </a:spcAft>
-              <a:buFont typeface="Arial"/>
-              <a:buChar char="•"/>
+              <a:t>El upgrade de un cluster kubeadm sigue un orden fijo que no es arbitrario. Primero el control plane, después los workers, y siempre una minor cada vez (1.33 → 1.34 → 1.35, nunca saltos). El motivo es la regla de version skew: el kubelet puede estar en la misma versión que el API server o hasta tres minors por debajo, pero nunca por encima. Si actualizaras el kubelet primero, el cluster quedaría en un estado no soportado.</a:t>
+            </a:r>
+          </a:p>
+          <a:p>
+            <a:pPr algn="l" marL="0" indent="0">
+              <a:lnSpc>
+                <a:spcPct val="128000"/>
+              </a:lnSpc>
+              <a:spcBef>
+                <a:spcPts val="0"/>
+              </a:spcBef>
+              <a:spcAft>
+                <a:spcPts val="400"/>
+              </a:spcAft>
+              <a:buNone/>
             </a:pPr>
             <a:r>
               <a:rPr sz="1100" b="0" i="0">
@@ -5882,22 +5880,21 @@
                 </a:solidFill>
                 <a:latin typeface="Segoe UI"/>
               </a:rPr>
-              <a:t>kubelet solo puede estar igual o por debajo del API server, nunca por encima. Por eso va después.</a:t>
-            </a:r>
-          </a:p>
-          <a:p>
-            <a:pPr algn="l" marL="182880" indent="-182880">
-              <a:lnSpc>
-                <a:spcPct val="120000"/>
-              </a:lnSpc>
-              <a:spcBef>
-                <a:spcPts val="0"/>
-              </a:spcBef>
-              <a:spcAft>
-                <a:spcPts val="700"/>
-              </a:spcAft>
-              <a:buFont typeface="Arial"/>
-              <a:buChar char="•"/>
+              <a:t>Dentro de cada nodo, kubeadm va primero porque es quien reescribe los manifiestos de los static Pods con las imágenes nuevas: kubeadm upgrade apply &lt;versión&gt; en el primer control plane, kubeadm upgrade node en el resto de nodos (no aplican una versión de cluster, solo se ponen al día). Solo después se actualizan los paquetes kubelet y kubectl, se hace systemctl daemon-reload y se reinicia el kubelet.</a:t>
+            </a:r>
+          </a:p>
+          <a:p>
+            <a:pPr algn="l" marL="0" indent="0">
+              <a:lnSpc>
+                <a:spcPct val="128000"/>
+              </a:lnSpc>
+              <a:spcBef>
+                <a:spcPts val="0"/>
+              </a:spcBef>
+              <a:spcAft>
+                <a:spcPts val="400"/>
+              </a:spcAft>
+              <a:buNone/>
             </a:pPr>
             <a:r>
               <a:rPr sz="1100" b="0" i="0">
@@ -5906,55 +5903,7 @@
                 </a:solidFill>
                 <a:latin typeface="Segoe UI"/>
               </a:rPr>
-              <a:t>En los workers se usa kubeadm upgrade node, no apply: no aplican una versión de cluster.</a:t>
-            </a:r>
-          </a:p>
-          <a:p>
-            <a:pPr algn="l" marL="182880" indent="-182880">
-              <a:lnSpc>
-                <a:spcPct val="120000"/>
-              </a:lnSpc>
-              <a:spcBef>
-                <a:spcPts val="0"/>
-              </a:spcBef>
-              <a:spcAft>
-                <a:spcPts val="700"/>
-              </a:spcAft>
-              <a:buFont typeface="Arial"/>
-              <a:buChar char="•"/>
-            </a:pPr>
-            <a:r>
-              <a:rPr sz="1100" b="0" i="0">
-                <a:solidFill>
-                  <a:srgbClr val="BDC9DB"/>
-                </a:solidFill>
-                <a:latin typeface="Segoe UI"/>
-              </a:rPr>
-              <a:t>Nunca se saltan minors: 1.34 → 1.35 → 1.36.</a:t>
-            </a:r>
-          </a:p>
-          <a:p>
-            <a:pPr algn="l" marL="182880" indent="-182880">
-              <a:lnSpc>
-                <a:spcPct val="120000"/>
-              </a:lnSpc>
-              <a:spcBef>
-                <a:spcPts val="0"/>
-              </a:spcBef>
-              <a:spcAft>
-                <a:spcPts val="700"/>
-              </a:spcAft>
-              <a:buFont typeface="Arial"/>
-              <a:buChar char="•"/>
-            </a:pPr>
-            <a:r>
-              <a:rPr sz="1100" b="0" i="0">
-                <a:solidFill>
-                  <a:srgbClr val="BDC9DB"/>
-                </a:solidFill>
-                <a:latin typeface="Segoe UI"/>
-              </a:rPr>
-              <a:t>Y siempre: systemctl daemon-reload antes de restart.</a:t>
+              <a:t>El snapshot de etcd va antes de empezar, sin excepción: es la única red de seguridad si el upgrade deja el cluster inconsistente. Y en cada nodo hay que acordonar y drenar antes de reiniciar el kubelet, y hacer uncordon al terminar.</a:t>
             </a:r>
           </a:p>
         </p:txBody>
@@ -9878,7 +9827,7 @@
         </p:nvSpPr>
         <p:spPr>
           <a:xfrm>
-            <a:off x="636000" y="2428000"/>
+            <a:off x="636000" y="1751750"/>
             <a:ext cx="104000" cy="104000"/>
           </a:xfrm>
           <a:prstGeom prst="ellipse">
@@ -9922,8 +9871,8 @@
         </p:nvSpPr>
         <p:spPr>
           <a:xfrm>
-            <a:off x="880000" y="2010000"/>
-            <a:ext cx="5435040" cy="940000"/>
+            <a:off x="880000" y="1470000"/>
+            <a:ext cx="5435040" cy="667500"/>
           </a:xfrm>
           <a:prstGeom prst="rect">
             <a:avLst/>
@@ -9968,7 +9917,7 @@
         </p:nvSpPr>
         <p:spPr>
           <a:xfrm>
-            <a:off x="636000" y="3368000"/>
+            <a:off x="636000" y="2419250"/>
             <a:ext cx="104000" cy="104000"/>
           </a:xfrm>
           <a:prstGeom prst="ellipse">
@@ -10012,8 +9961,8 @@
         </p:nvSpPr>
         <p:spPr>
           <a:xfrm>
-            <a:off x="880000" y="2950000"/>
-            <a:ext cx="5435040" cy="940000"/>
+            <a:off x="880000" y="2137500"/>
+            <a:ext cx="5435040" cy="667500"/>
           </a:xfrm>
           <a:prstGeom prst="rect">
             <a:avLst/>
@@ -10058,7 +10007,7 @@
         </p:nvSpPr>
         <p:spPr>
           <a:xfrm>
-            <a:off x="636000" y="4308000"/>
+            <a:off x="636000" y="3086750"/>
             <a:ext cx="104000" cy="104000"/>
           </a:xfrm>
           <a:prstGeom prst="ellipse">
@@ -10102,8 +10051,8 @@
         </p:nvSpPr>
         <p:spPr>
           <a:xfrm>
-            <a:off x="880000" y="3890000"/>
-            <a:ext cx="5435040" cy="940000"/>
+            <a:off x="880000" y="2805000"/>
+            <a:ext cx="5435040" cy="667500"/>
           </a:xfrm>
           <a:prstGeom prst="rect">
             <a:avLst/>
@@ -10148,7 +10097,7 @@
         </p:nvSpPr>
         <p:spPr>
           <a:xfrm>
-            <a:off x="636000" y="5248000"/>
+            <a:off x="636000" y="3754250"/>
             <a:ext cx="104000" cy="104000"/>
           </a:xfrm>
           <a:prstGeom prst="ellipse">
@@ -10192,8 +10141,8 @@
         </p:nvSpPr>
         <p:spPr>
           <a:xfrm>
-            <a:off x="880000" y="4830000"/>
-            <a:ext cx="5435040" cy="940000"/>
+            <a:off x="880000" y="3472500"/>
+            <a:ext cx="5435040" cy="667500"/>
           </a:xfrm>
           <a:prstGeom prst="rect">
             <a:avLst/>
@@ -10238,8 +10187,8 @@
         </p:nvSpPr>
         <p:spPr>
           <a:xfrm>
-            <a:off x="6635040" y="2010000"/>
-            <a:ext cx="4936960" cy="3760000"/>
+            <a:off x="6635040" y="1470000"/>
+            <a:ext cx="4936960" cy="2670000"/>
           </a:xfrm>
           <a:prstGeom prst="roundRect">
             <a:avLst>
@@ -10288,8 +10237,8 @@
         </p:nvSpPr>
         <p:spPr>
           <a:xfrm>
-            <a:off x="6635040" y="2310000"/>
-            <a:ext cx="46000" cy="3460000"/>
+            <a:off x="6635040" y="1770000"/>
+            <a:ext cx="46000" cy="2370000"/>
           </a:xfrm>
           <a:prstGeom prst="rect">
             <a:avLst/>
@@ -10334,7 +10283,7 @@
         </p:nvSpPr>
         <p:spPr>
           <a:xfrm>
-            <a:off x="6825040" y="2070000"/>
+            <a:off x="6825040" y="1530000"/>
             <a:ext cx="4556960" cy="260000"/>
           </a:xfrm>
           <a:prstGeom prst="rect">
@@ -10380,7 +10329,7 @@
         </p:nvSpPr>
         <p:spPr>
           <a:xfrm>
-            <a:off x="6825040" y="2304000"/>
+            <a:off x="6825040" y="1764000"/>
             <a:ext cx="4556960" cy="10000"/>
           </a:xfrm>
           <a:prstGeom prst="rect">
@@ -10426,7 +10375,7 @@
         </p:nvSpPr>
         <p:spPr>
           <a:xfrm>
-            <a:off x="6865040" y="2500000"/>
+            <a:off x="6865040" y="1960000"/>
             <a:ext cx="4516960" cy="1586992"/>
           </a:xfrm>
           <a:prstGeom prst="rect">
@@ -10597,6 +10546,217 @@
                 <a:latin typeface="Consolas"/>
               </a:rPr>
               <a:t>--etcd-servers=https://127.0.0.1:2379</a:t>
+            </a:r>
+          </a:p>
+        </p:txBody>
+      </p:sp>
+      <p:sp>
+        <p:nvSpPr>
+          <p:cNvPr id="22" name="Rounded Rectangle 21"/>
+          <p:cNvSpPr/>
+          <p:nvPr/>
+        </p:nvSpPr>
+        <p:spPr>
+          <a:xfrm>
+            <a:off x="620000" y="4310000"/>
+            <a:ext cx="10952000" cy="2000000"/>
+          </a:xfrm>
+          <a:prstGeom prst="roundRect">
+            <a:avLst>
+              <a:gd name="adj" fmla="val 4500"/>
+            </a:avLst>
+          </a:prstGeom>
+          <a:solidFill>
+            <a:srgbClr val="111A2C"/>
+          </a:solidFill>
+          <a:ln w="12700">
+            <a:solidFill>
+              <a:srgbClr val="26354E"/>
+            </a:solidFill>
+          </a:ln>
+          <a:effectLst/>
+        </p:spPr>
+        <p:style>
+          <a:lnRef idx="1">
+            <a:schemeClr val="accent1"/>
+          </a:lnRef>
+          <a:fillRef idx="3">
+            <a:schemeClr val="accent1"/>
+          </a:fillRef>
+          <a:effectRef idx="2">
+            <a:schemeClr val="accent1"/>
+          </a:effectRef>
+          <a:fontRef idx="minor">
+            <a:schemeClr val="lt1"/>
+          </a:fontRef>
+        </p:style>
+        <p:txBody>
+          <a:bodyPr rtlCol="0" anchor="ctr" lIns="0" rIns="0" tIns="0" bIns="0">
+            <a:noAutofit/>
+          </a:bodyPr>
+          <a:lstStyle/>
+          <a:p>
+            <a:pPr algn="ctr"/>
+          </a:p>
+        </p:txBody>
+      </p:sp>
+      <p:sp>
+        <p:nvSpPr>
+          <p:cNvPr id="23" name="Rectangle 22"/>
+          <p:cNvSpPr/>
+          <p:nvPr/>
+        </p:nvSpPr>
+        <p:spPr>
+          <a:xfrm>
+            <a:off x="646000" y="4332000"/>
+            <a:ext cx="40000" cy="1956000"/>
+          </a:xfrm>
+          <a:prstGeom prst="rect">
+            <a:avLst/>
+          </a:prstGeom>
+          <a:solidFill>
+            <a:srgbClr val="326CE5"/>
+          </a:solidFill>
+          <a:ln>
+            <a:noFill/>
+          </a:ln>
+          <a:effectLst/>
+        </p:spPr>
+        <p:style>
+          <a:lnRef idx="1">
+            <a:schemeClr val="accent1"/>
+          </a:lnRef>
+          <a:fillRef idx="3">
+            <a:schemeClr val="accent1"/>
+          </a:fillRef>
+          <a:effectRef idx="2">
+            <a:schemeClr val="accent1"/>
+          </a:effectRef>
+          <a:fontRef idx="minor">
+            <a:schemeClr val="lt1"/>
+          </a:fontRef>
+        </p:style>
+        <p:txBody>
+          <a:bodyPr rtlCol="0" anchor="ctr" lIns="0" rIns="0" tIns="0" bIns="0">
+            <a:noAutofit/>
+          </a:bodyPr>
+          <a:lstStyle/>
+          <a:p>
+            <a:pPr algn="ctr"/>
+          </a:p>
+        </p:txBody>
+      </p:sp>
+      <p:sp>
+        <p:nvSpPr>
+          <p:cNvPr id="24" name="TextBox 23"/>
+          <p:cNvSpPr txBox="1"/>
+          <p:nvPr/>
+        </p:nvSpPr>
+        <p:spPr>
+          <a:xfrm>
+            <a:off x="860000" y="4440000"/>
+            <a:ext cx="10522000" cy="1740000"/>
+          </a:xfrm>
+          <a:prstGeom prst="rect">
+            <a:avLst/>
+          </a:prstGeom>
+          <a:noFill/>
+        </p:spPr>
+        <p:txBody>
+          <a:bodyPr wrap="square" anchor="t" lIns="0" rIns="0" tIns="0" bIns="0">
+            <a:noAutofit/>
+          </a:bodyPr>
+          <a:lstStyle/>
+          <a:p>
+            <a:pPr algn="l" marL="0" indent="0">
+              <a:lnSpc>
+                <a:spcPct val="100000"/>
+              </a:lnSpc>
+              <a:spcBef>
+                <a:spcPts val="0"/>
+              </a:spcBef>
+              <a:spcAft>
+                <a:spcPts val="600"/>
+              </a:spcAft>
+              <a:buNone/>
+            </a:pPr>
+            <a:r>
+              <a:rPr sz="900" b="1" i="0" spc="200">
+                <a:solidFill>
+                  <a:srgbClr val="326CE5"/>
+                </a:solidFill>
+                <a:latin typeface="Segoe UI Semibold"/>
+              </a:rPr>
+              <a:t>TEORÍA</a:t>
+            </a:r>
+          </a:p>
+          <a:p>
+            <a:pPr algn="l" marL="0" indent="0">
+              <a:lnSpc>
+                <a:spcPct val="128000"/>
+              </a:lnSpc>
+              <a:spcBef>
+                <a:spcPts val="0"/>
+              </a:spcBef>
+              <a:spcAft>
+                <a:spcPts val="400"/>
+              </a:spcAft>
+              <a:buNone/>
+            </a:pPr>
+            <a:r>
+              <a:rPr sz="950" b="0" i="0">
+                <a:solidFill>
+                  <a:srgbClr val="BDC9DB"/>
+                </a:solidFill>
+                <a:latin typeface="Segoe UI"/>
+              </a:rPr>
+              <a:t>etcd es la única fuente de verdad del cluster: guarda todos los objetos (Pods, Deployments, Secrets, ConfigMaps, RBAC, estado de los nodos) como pares clave-valor. Si etcd se corrompe o se pierde, el cluster deja de existir aunque los nodos sigan encendidos. Restaurar un snapshot devuelve el cluster exactamente al instante en que se tomó; todo lo creado después desaparece, y esa ventana de pérdida (el RPO) es el argumento para automatizar los backups.</a:t>
+            </a:r>
+          </a:p>
+          <a:p>
+            <a:pPr algn="l" marL="0" indent="0">
+              <a:lnSpc>
+                <a:spcPct val="128000"/>
+              </a:lnSpc>
+              <a:spcBef>
+                <a:spcPts val="0"/>
+              </a:spcBef>
+              <a:spcAft>
+                <a:spcPts val="400"/>
+              </a:spcAft>
+              <a:buNone/>
+            </a:pPr>
+            <a:r>
+              <a:rPr sz="950" b="0" i="0">
+                <a:solidFill>
+                  <a:srgbClr val="BDC9DB"/>
+                </a:solidFill>
+                <a:latin typeface="Segoe UI"/>
+              </a:rPr>
+              <a:t>No hace falta memorizar rutas ni puertos: el manifiesto del API server (/etc/kubernetes/manifests/kube-apiserver.yaml) declara en sus argumentos el endpoint de etcd y los tres certificados que usa para hablar con él (--etcd-cafile, --etcd-certfile, --etcd-keyfile, --etcd-servers). Un grep sobre ese archivo te da todo lo necesario.</a:t>
+            </a:r>
+          </a:p>
+          <a:p>
+            <a:pPr algn="l" marL="0" indent="0">
+              <a:lnSpc>
+                <a:spcPct val="128000"/>
+              </a:lnSpc>
+              <a:spcBef>
+                <a:spcPts val="0"/>
+              </a:spcBef>
+              <a:spcAft>
+                <a:spcPts val="400"/>
+              </a:spcAft>
+              <a:buNone/>
+            </a:pPr>
+            <a:r>
+              <a:rPr sz="950" b="0" i="0">
+                <a:solidFill>
+                  <a:srgbClr val="BDC9DB"/>
+                </a:solidFill>
+                <a:latin typeface="Segoe UI"/>
+              </a:rPr>
+              <a:t>El restore va SIEMPRE a un data-dir nuevo y con el control plane parado. El procedimiento: mover los manifiestos fuera de la carpeta para detener API server y etcd, ejecutar el restore hacia el directorio nuevo, reapuntar el hostPath del volumen de datos de etcd en su manifiesto, y devolver los manifiestos para que el kubelet lo levante todo.</a:t>
             </a:r>
           </a:p>
         </p:txBody>
@@ -10935,8 +11095,8 @@
         </p:nvSpPr>
         <p:spPr>
           <a:xfrm>
-            <a:off x="620000" y="2205000"/>
-            <a:ext cx="5316000" cy="2770000"/>
+            <a:off x="620000" y="1470000"/>
+            <a:ext cx="5316000" cy="2670000"/>
           </a:xfrm>
           <a:prstGeom prst="roundRect">
             <a:avLst>
@@ -10985,7 +11145,7 @@
         </p:nvSpPr>
         <p:spPr>
           <a:xfrm>
-            <a:off x="644000" y="2205000"/>
+            <a:off x="644000" y="1470000"/>
             <a:ext cx="5268000" cy="46000"/>
           </a:xfrm>
           <a:prstGeom prst="rect">
@@ -11031,7 +11191,7 @@
         </p:nvSpPr>
         <p:spPr>
           <a:xfrm>
-            <a:off x="880000" y="2465000"/>
+            <a:off x="880000" y="1730000"/>
             <a:ext cx="4796000" cy="570000"/>
           </a:xfrm>
           <a:prstGeom prst="rect">
@@ -11100,8 +11260,8 @@
         </p:nvSpPr>
         <p:spPr>
           <a:xfrm>
-            <a:off x="880000" y="3035000"/>
-            <a:ext cx="4796000" cy="1760000"/>
+            <a:off x="880000" y="2300000"/>
+            <a:ext cx="4796000" cy="1660000"/>
           </a:xfrm>
           <a:prstGeom prst="rect">
             <a:avLst/>
@@ -11220,8 +11380,8 @@
         </p:nvSpPr>
         <p:spPr>
           <a:xfrm>
-            <a:off x="6256000" y="2205000"/>
-            <a:ext cx="5316000" cy="2770000"/>
+            <a:off x="6256000" y="1470000"/>
+            <a:ext cx="5316000" cy="2670000"/>
           </a:xfrm>
           <a:prstGeom prst="roundRect">
             <a:avLst>
@@ -11270,7 +11430,7 @@
         </p:nvSpPr>
         <p:spPr>
           <a:xfrm>
-            <a:off x="6280000" y="2205000"/>
+            <a:off x="6280000" y="1470000"/>
             <a:ext cx="5268000" cy="46000"/>
           </a:xfrm>
           <a:prstGeom prst="rect">
@@ -11316,7 +11476,7 @@
         </p:nvSpPr>
         <p:spPr>
           <a:xfrm>
-            <a:off x="6516000" y="2465000"/>
+            <a:off x="6516000" y="1730000"/>
             <a:ext cx="4796000" cy="570000"/>
           </a:xfrm>
           <a:prstGeom prst="rect">
@@ -11385,8 +11545,8 @@
         </p:nvSpPr>
         <p:spPr>
           <a:xfrm>
-            <a:off x="6516000" y="3035000"/>
-            <a:ext cx="4796000" cy="1760000"/>
+            <a:off x="6516000" y="2300000"/>
+            <a:ext cx="4796000" cy="1660000"/>
           </a:xfrm>
           <a:prstGeom prst="rect">
             <a:avLst/>
@@ -11505,12 +11665,12 @@
         </p:nvSpPr>
         <p:spPr>
           <a:xfrm>
-            <a:off x="620000" y="5860000"/>
-            <a:ext cx="10952000" cy="470000"/>
+            <a:off x="620000" y="4310000"/>
+            <a:ext cx="10952000" cy="2000000"/>
           </a:xfrm>
           <a:prstGeom prst="roundRect">
             <a:avLst>
-              <a:gd name="adj" fmla="val 10000"/>
+              <a:gd name="adj" fmla="val 4500"/>
             </a:avLst>
           </a:prstGeom>
           <a:solidFill>
@@ -11555,8 +11715,8 @@
         </p:nvSpPr>
         <p:spPr>
           <a:xfrm>
-            <a:off x="650000" y="5884000"/>
-            <a:ext cx="40000" cy="422000"/>
+            <a:off x="646000" y="4332000"/>
+            <a:ext cx="40000" cy="1956000"/>
           </a:xfrm>
           <a:prstGeom prst="rect">
             <a:avLst/>
@@ -11601,8 +11761,8 @@
         </p:nvSpPr>
         <p:spPr>
           <a:xfrm>
-            <a:off x="860000" y="5860000"/>
-            <a:ext cx="10482000" cy="470000"/>
+            <a:off x="860000" y="4440000"/>
+            <a:ext cx="10522000" cy="1740000"/>
           </a:xfrm>
           <a:prstGeom prst="rect">
             <a:avLst/>
@@ -11610,31 +11770,100 @@
           <a:noFill/>
         </p:spPr>
         <p:txBody>
-          <a:bodyPr wrap="square" anchor="ctr" lIns="0" rIns="0" tIns="0" bIns="0">
+          <a:bodyPr wrap="square" anchor="t" lIns="0" rIns="0" tIns="0" bIns="0">
             <a:noAutofit/>
           </a:bodyPr>
           <a:lstStyle/>
           <a:p>
             <a:pPr algn="l" marL="0" indent="0">
               <a:lnSpc>
-                <a:spcPct val="116000"/>
-              </a:lnSpc>
-              <a:spcBef>
-                <a:spcPts val="0"/>
-              </a:spcBef>
-              <a:spcAft>
-                <a:spcPts val="0"/>
-              </a:spcAft>
-              <a:buNone/>
-            </a:pPr>
-            <a:r>
-              <a:rPr sz="1100" b="0" i="1">
+                <a:spcPct val="100000"/>
+              </a:lnSpc>
+              <a:spcBef>
+                <a:spcPts val="0"/>
+              </a:spcBef>
+              <a:spcAft>
+                <a:spcPts val="600"/>
+              </a:spcAft>
+              <a:buNone/>
+            </a:pPr>
+            <a:r>
+              <a:rPr sz="900" b="1" i="0" spc="200">
+                <a:solidFill>
+                  <a:srgbClr val="326CE5"/>
+                </a:solidFill>
+                <a:latin typeface="Segoe UI Semibold"/>
+              </a:rPr>
+              <a:t>TEORÍA</a:t>
+            </a:r>
+          </a:p>
+          <a:p>
+            <a:pPr algn="l" marL="0" indent="0">
+              <a:lnSpc>
+                <a:spcPct val="128000"/>
+              </a:lnSpc>
+              <a:spcBef>
+                <a:spcPts val="0"/>
+              </a:spcBef>
+              <a:spcAft>
+                <a:spcPts val="400"/>
+              </a:spcAft>
+              <a:buNone/>
+            </a:pPr>
+            <a:r>
+              <a:rPr sz="1000" b="0" i="0">
                 <a:solidFill>
                   <a:srgbClr val="BDC9DB"/>
                 </a:solidFill>
                 <a:latin typeface="Segoe UI"/>
               </a:rPr>
-              <a:t>ETCDCTL_API=3 ya no hace falta: v3 es el valor por defecto desde hace varias versiones.</a:t>
+              <a:t>Son dos binarios distintos con propósitos distintos y confundirlos hace perder tiempo en el examen. etcdctl es el cliente de red: habla con una instancia de etcd EN FUNCIONAMIENTO, así que necesita el endpoint y los certificados. Con él se comprueba la salud (endpoint health, endpoint status) y se toma el snapshot en caliente (snapshot save).</a:t>
+            </a:r>
+          </a:p>
+          <a:p>
+            <a:pPr algn="l" marL="0" indent="0">
+              <a:lnSpc>
+                <a:spcPct val="128000"/>
+              </a:lnSpc>
+              <a:spcBef>
+                <a:spcPts val="0"/>
+              </a:spcBef>
+              <a:spcAft>
+                <a:spcPts val="400"/>
+              </a:spcAft>
+              <a:buNone/>
+            </a:pPr>
+            <a:r>
+              <a:rPr sz="1000" b="0" i="0">
+                <a:solidFill>
+                  <a:srgbClr val="BDC9DB"/>
+                </a:solidFill>
+                <a:latin typeface="Segoe UI"/>
+              </a:rPr>
+              <a:t>etcdutl es la herramienta offline: trabaja directamente sobre el ARCHIVO .db del snapshot, sin cluster, sin endpoint y sin certificados. Con él se valida la integridad del snapshot (snapshot status) y se hace el restore (snapshot restore). Si un procedimiento te pide certificados para consultar el estado de un archivo, estás usando el binario equivocado.</a:t>
+            </a:r>
+          </a:p>
+          <a:p>
+            <a:pPr algn="l" marL="0" indent="0">
+              <a:lnSpc>
+                <a:spcPct val="128000"/>
+              </a:lnSpc>
+              <a:spcBef>
+                <a:spcPts val="0"/>
+              </a:spcBef>
+              <a:spcAft>
+                <a:spcPts val="400"/>
+              </a:spcAft>
+              <a:buNone/>
+            </a:pPr>
+            <a:r>
+              <a:rPr sz="1000" b="0" i="0">
+                <a:solidFill>
+                  <a:srgbClr val="BDC9DB"/>
+                </a:solidFill>
+                <a:latin typeface="Segoe UI"/>
+              </a:rPr>
+              <a:t>Dos notas de versión: snapshot restore en etcdctl está deprecado y avisa por consola —el comando correcto hoy es etcdutl snapshot restore—; y la variable ETCDCTL_API=3 ya no hace falta, porque la v3 es el valor por defecto desde hace varias versiones.</a:t>
             </a:r>
           </a:p>
         </p:txBody>
@@ -16058,7 +16287,7 @@
         </p:nvSpPr>
         <p:spPr>
           <a:xfrm>
-            <a:off x="636000" y="2428000"/>
+            <a:off x="636000" y="1751750"/>
             <a:ext cx="104000" cy="104000"/>
           </a:xfrm>
           <a:prstGeom prst="ellipse">
@@ -16102,8 +16331,8 @@
         </p:nvSpPr>
         <p:spPr>
           <a:xfrm>
-            <a:off x="880000" y="2010000"/>
-            <a:ext cx="5435040" cy="940000"/>
+            <a:off x="880000" y="1470000"/>
+            <a:ext cx="5435040" cy="667500"/>
           </a:xfrm>
           <a:prstGeom prst="rect">
             <a:avLst/>
@@ -16148,7 +16377,7 @@
         </p:nvSpPr>
         <p:spPr>
           <a:xfrm>
-            <a:off x="636000" y="3368000"/>
+            <a:off x="636000" y="2419250"/>
             <a:ext cx="104000" cy="104000"/>
           </a:xfrm>
           <a:prstGeom prst="ellipse">
@@ -16192,8 +16421,8 @@
         </p:nvSpPr>
         <p:spPr>
           <a:xfrm>
-            <a:off x="880000" y="2950000"/>
-            <a:ext cx="5435040" cy="940000"/>
+            <a:off x="880000" y="2137500"/>
+            <a:ext cx="5435040" cy="667500"/>
           </a:xfrm>
           <a:prstGeom prst="rect">
             <a:avLst/>
@@ -16238,7 +16467,7 @@
         </p:nvSpPr>
         <p:spPr>
           <a:xfrm>
-            <a:off x="636000" y="4308000"/>
+            <a:off x="636000" y="3086750"/>
             <a:ext cx="104000" cy="104000"/>
           </a:xfrm>
           <a:prstGeom prst="ellipse">
@@ -16282,8 +16511,8 @@
         </p:nvSpPr>
         <p:spPr>
           <a:xfrm>
-            <a:off x="880000" y="3890000"/>
-            <a:ext cx="5435040" cy="940000"/>
+            <a:off x="880000" y="2805000"/>
+            <a:ext cx="5435040" cy="667500"/>
           </a:xfrm>
           <a:prstGeom prst="rect">
             <a:avLst/>
@@ -16328,7 +16557,7 @@
         </p:nvSpPr>
         <p:spPr>
           <a:xfrm>
-            <a:off x="636000" y="5248000"/>
+            <a:off x="636000" y="3754250"/>
             <a:ext cx="104000" cy="104000"/>
           </a:xfrm>
           <a:prstGeom prst="ellipse">
@@ -16372,8 +16601,8 @@
         </p:nvSpPr>
         <p:spPr>
           <a:xfrm>
-            <a:off x="880000" y="4830000"/>
-            <a:ext cx="5435040" cy="940000"/>
+            <a:off x="880000" y="3472500"/>
+            <a:ext cx="5435040" cy="667500"/>
           </a:xfrm>
           <a:prstGeom prst="rect">
             <a:avLst/>
@@ -16418,8 +16647,8 @@
         </p:nvSpPr>
         <p:spPr>
           <a:xfrm>
-            <a:off x="6635040" y="2010000"/>
-            <a:ext cx="4936960" cy="3760000"/>
+            <a:off x="6635040" y="1470000"/>
+            <a:ext cx="4936960" cy="2670000"/>
           </a:xfrm>
           <a:prstGeom prst="roundRect">
             <a:avLst>
@@ -16468,7 +16697,7 @@
         </p:nvSpPr>
         <p:spPr>
           <a:xfrm>
-            <a:off x="6659040" y="2010000"/>
+            <a:off x="6659040" y="1470000"/>
             <a:ext cx="4888960" cy="46000"/>
           </a:xfrm>
           <a:prstGeom prst="rect">
@@ -16514,8 +16743,8 @@
         </p:nvSpPr>
         <p:spPr>
           <a:xfrm>
-            <a:off x="6875040" y="2250000"/>
-            <a:ext cx="4456960" cy="3280000"/>
+            <a:off x="6875040" y="1710000"/>
+            <a:ext cx="4456960" cy="2190000"/>
           </a:xfrm>
           <a:prstGeom prst="rect">
             <a:avLst/>
@@ -16644,6 +16873,217 @@
                 <a:latin typeface="Segoe UI"/>
               </a:rPr>
               <a:t>ClusterRoleBinding — a quién, en todo el cluster</a:t>
+            </a:r>
+          </a:p>
+        </p:txBody>
+      </p:sp>
+      <p:sp>
+        <p:nvSpPr>
+          <p:cNvPr id="20" name="Rounded Rectangle 19"/>
+          <p:cNvSpPr/>
+          <p:nvPr/>
+        </p:nvSpPr>
+        <p:spPr>
+          <a:xfrm>
+            <a:off x="620000" y="4310000"/>
+            <a:ext cx="10952000" cy="2000000"/>
+          </a:xfrm>
+          <a:prstGeom prst="roundRect">
+            <a:avLst>
+              <a:gd name="adj" fmla="val 4500"/>
+            </a:avLst>
+          </a:prstGeom>
+          <a:solidFill>
+            <a:srgbClr val="111A2C"/>
+          </a:solidFill>
+          <a:ln w="12700">
+            <a:solidFill>
+              <a:srgbClr val="26354E"/>
+            </a:solidFill>
+          </a:ln>
+          <a:effectLst/>
+        </p:spPr>
+        <p:style>
+          <a:lnRef idx="1">
+            <a:schemeClr val="accent1"/>
+          </a:lnRef>
+          <a:fillRef idx="3">
+            <a:schemeClr val="accent1"/>
+          </a:fillRef>
+          <a:effectRef idx="2">
+            <a:schemeClr val="accent1"/>
+          </a:effectRef>
+          <a:fontRef idx="minor">
+            <a:schemeClr val="lt1"/>
+          </a:fontRef>
+        </p:style>
+        <p:txBody>
+          <a:bodyPr rtlCol="0" anchor="ctr" lIns="0" rIns="0" tIns="0" bIns="0">
+            <a:noAutofit/>
+          </a:bodyPr>
+          <a:lstStyle/>
+          <a:p>
+            <a:pPr algn="ctr"/>
+          </a:p>
+        </p:txBody>
+      </p:sp>
+      <p:sp>
+        <p:nvSpPr>
+          <p:cNvPr id="21" name="Rectangle 20"/>
+          <p:cNvSpPr/>
+          <p:nvPr/>
+        </p:nvSpPr>
+        <p:spPr>
+          <a:xfrm>
+            <a:off x="646000" y="4332000"/>
+            <a:ext cx="40000" cy="1956000"/>
+          </a:xfrm>
+          <a:prstGeom prst="rect">
+            <a:avLst/>
+          </a:prstGeom>
+          <a:solidFill>
+            <a:srgbClr val="326CE5"/>
+          </a:solidFill>
+          <a:ln>
+            <a:noFill/>
+          </a:ln>
+          <a:effectLst/>
+        </p:spPr>
+        <p:style>
+          <a:lnRef idx="1">
+            <a:schemeClr val="accent1"/>
+          </a:lnRef>
+          <a:fillRef idx="3">
+            <a:schemeClr val="accent1"/>
+          </a:fillRef>
+          <a:effectRef idx="2">
+            <a:schemeClr val="accent1"/>
+          </a:effectRef>
+          <a:fontRef idx="minor">
+            <a:schemeClr val="lt1"/>
+          </a:fontRef>
+        </p:style>
+        <p:txBody>
+          <a:bodyPr rtlCol="0" anchor="ctr" lIns="0" rIns="0" tIns="0" bIns="0">
+            <a:noAutofit/>
+          </a:bodyPr>
+          <a:lstStyle/>
+          <a:p>
+            <a:pPr algn="ctr"/>
+          </a:p>
+        </p:txBody>
+      </p:sp>
+      <p:sp>
+        <p:nvSpPr>
+          <p:cNvPr id="22" name="TextBox 21"/>
+          <p:cNvSpPr txBox="1"/>
+          <p:nvPr/>
+        </p:nvSpPr>
+        <p:spPr>
+          <a:xfrm>
+            <a:off x="860000" y="4440000"/>
+            <a:ext cx="10522000" cy="1740000"/>
+          </a:xfrm>
+          <a:prstGeom prst="rect">
+            <a:avLst/>
+          </a:prstGeom>
+          <a:noFill/>
+        </p:spPr>
+        <p:txBody>
+          <a:bodyPr wrap="square" anchor="t" lIns="0" rIns="0" tIns="0" bIns="0">
+            <a:noAutofit/>
+          </a:bodyPr>
+          <a:lstStyle/>
+          <a:p>
+            <a:pPr algn="l" marL="0" indent="0">
+              <a:lnSpc>
+                <a:spcPct val="100000"/>
+              </a:lnSpc>
+              <a:spcBef>
+                <a:spcPts val="0"/>
+              </a:spcBef>
+              <a:spcAft>
+                <a:spcPts val="600"/>
+              </a:spcAft>
+              <a:buNone/>
+            </a:pPr>
+            <a:r>
+              <a:rPr sz="900" b="1" i="0" spc="200">
+                <a:solidFill>
+                  <a:srgbClr val="326CE5"/>
+                </a:solidFill>
+                <a:latin typeface="Segoe UI Semibold"/>
+              </a:rPr>
+              <a:t>TEORÍA</a:t>
+            </a:r>
+          </a:p>
+          <a:p>
+            <a:pPr algn="l" marL="0" indent="0">
+              <a:lnSpc>
+                <a:spcPct val="128000"/>
+              </a:lnSpc>
+              <a:spcBef>
+                <a:spcPts val="0"/>
+              </a:spcBef>
+              <a:spcAft>
+                <a:spcPts val="400"/>
+              </a:spcAft>
+              <a:buNone/>
+            </a:pPr>
+            <a:r>
+              <a:rPr sz="1000" b="0" i="0">
+                <a:solidFill>
+                  <a:srgbClr val="BDC9DB"/>
+                </a:solidFill>
+                <a:latin typeface="Segoe UI"/>
+              </a:rPr>
+              <a:t>RBAC (Role-Based Access Control) responde a una sola pregunta: ¿esta identidad puede ejecutar este verbo sobre este recurso, en este ámbito? Es whitelisting puro: todo lo que no se concede explícitamente está denegado, y no existen reglas de denegación. Los permisos son aditivos: si una identidad tiene varios bindings, sus permisos efectivos son la unión de todos, y el orden en que se evalúan no importa.</a:t>
+            </a:r>
+          </a:p>
+          <a:p>
+            <a:pPr algn="l" marL="0" indent="0">
+              <a:lnSpc>
+                <a:spcPct val="128000"/>
+              </a:lnSpc>
+              <a:spcBef>
+                <a:spcPts val="0"/>
+              </a:spcBef>
+              <a:spcAft>
+                <a:spcPts val="400"/>
+              </a:spcAft>
+              <a:buNone/>
+            </a:pPr>
+            <a:r>
+              <a:rPr sz="1000" b="0" i="0">
+                <a:solidFill>
+                  <a:srgbClr val="BDC9DB"/>
+                </a:solidFill>
+                <a:latin typeface="Segoe UI"/>
+              </a:rPr>
+              <a:t>Hay dos tipos de sujeto. Las ServiceAccounts sí son objetos del API, viven en un namespace y su identidad real es system:serviceaccount:&lt;ns&gt;:&lt;nombre&gt;. Los usuarios y grupos NO son objetos: no se crean con kubectl; existen únicamente dentro de los bindings y en los certificados o tokens que presenta el cliente al autenticarse.</a:t>
+            </a:r>
+          </a:p>
+          <a:p>
+            <a:pPr algn="l" marL="0" indent="0">
+              <a:lnSpc>
+                <a:spcPct val="128000"/>
+              </a:lnSpc>
+              <a:spcBef>
+                <a:spcPts val="0"/>
+              </a:spcBef>
+              <a:spcAft>
+                <a:spcPts val="400"/>
+              </a:spcAft>
+              <a:buNone/>
+            </a:pPr>
+            <a:r>
+              <a:rPr sz="1000" b="0" i="0">
+                <a:solidFill>
+                  <a:srgbClr val="BDC9DB"/>
+                </a:solidFill>
+                <a:latin typeface="Segoe UI"/>
+              </a:rPr>
+              <a:t>Cuatro objetos combinan el qué y el a-quién. Role y ClusterRole definen QUÉ se puede hacer (verbos sobre recursos); el Role está limitado a un namespace, el ClusterRole no tiene ámbito. RoleBinding y ClusterRoleBinding asignan un rol A UN SUJETO; el RoleBinding concede solo en su namespace, el ClusterRoleBinding en todo el cluster.</a:t>
             </a:r>
           </a:p>
         </p:txBody>
@@ -18040,12 +18480,12 @@
         </p:nvSpPr>
         <p:spPr>
           <a:xfrm>
-            <a:off x="620000" y="5910000"/>
-            <a:ext cx="10952000" cy="470000"/>
+            <a:off x="620000" y="4310000"/>
+            <a:ext cx="10952000" cy="2000000"/>
           </a:xfrm>
           <a:prstGeom prst="roundRect">
             <a:avLst>
-              <a:gd name="adj" fmla="val 10000"/>
+              <a:gd name="adj" fmla="val 4500"/>
             </a:avLst>
           </a:prstGeom>
           <a:solidFill>
@@ -18090,8 +18530,8 @@
         </p:nvSpPr>
         <p:spPr>
           <a:xfrm>
-            <a:off x="650000" y="5934000"/>
-            <a:ext cx="40000" cy="422000"/>
+            <a:off x="646000" y="4332000"/>
+            <a:ext cx="40000" cy="1956000"/>
           </a:xfrm>
           <a:prstGeom prst="rect">
             <a:avLst/>
@@ -18136,8 +18576,8 @@
         </p:nvSpPr>
         <p:spPr>
           <a:xfrm>
-            <a:off x="860000" y="5910000"/>
-            <a:ext cx="10482000" cy="470000"/>
+            <a:off x="860000" y="4440000"/>
+            <a:ext cx="10522000" cy="1740000"/>
           </a:xfrm>
           <a:prstGeom prst="rect">
             <a:avLst/>
@@ -18145,31 +18585,100 @@
           <a:noFill/>
         </p:spPr>
         <p:txBody>
-          <a:bodyPr wrap="square" anchor="ctr" lIns="0" rIns="0" tIns="0" bIns="0">
+          <a:bodyPr wrap="square" anchor="t" lIns="0" rIns="0" tIns="0" bIns="0">
             <a:noAutofit/>
           </a:bodyPr>
           <a:lstStyle/>
           <a:p>
             <a:pPr algn="l" marL="0" indent="0">
               <a:lnSpc>
-                <a:spcPct val="116000"/>
-              </a:lnSpc>
-              <a:spcBef>
-                <a:spcPts val="0"/>
-              </a:spcBef>
-              <a:spcAft>
-                <a:spcPts val="0"/>
-              </a:spcAft>
-              <a:buNone/>
-            </a:pPr>
-            <a:r>
-              <a:rPr sz="1100" b="0" i="1">
+                <a:spcPct val="100000"/>
+              </a:lnSpc>
+              <a:spcBef>
+                <a:spcPts val="0"/>
+              </a:spcBef>
+              <a:spcAft>
+                <a:spcPts val="600"/>
+              </a:spcAft>
+              <a:buNone/>
+            </a:pPr>
+            <a:r>
+              <a:rPr sz="900" b="1" i="0" spc="200">
+                <a:solidFill>
+                  <a:srgbClr val="326CE5"/>
+                </a:solidFill>
+                <a:latin typeface="Segoe UI Semibold"/>
+              </a:rPr>
+              <a:t>TEORÍA</a:t>
+            </a:r>
+          </a:p>
+          <a:p>
+            <a:pPr algn="l" marL="0" indent="0">
+              <a:lnSpc>
+                <a:spcPct val="128000"/>
+              </a:lnSpc>
+              <a:spcBef>
+                <a:spcPts val="0"/>
+              </a:spcBef>
+              <a:spcAft>
+                <a:spcPts val="400"/>
+              </a:spcAft>
+              <a:buNone/>
+            </a:pPr>
+            <a:r>
+              <a:rPr sz="1000" b="0" i="0">
                 <a:solidFill>
                   <a:srgbClr val="BDC9DB"/>
                 </a:solidFill>
                 <a:latin typeface="Segoe UI"/>
               </a:rPr>
-              <a:t>Poner un ClusterRoleBinding donde debía ir un RoleBinding es el fallo de RBAC más común y más caro en producción.</a:t>
+              <a:t>El alcance real de un permiso lo determina el BINDING, no el rol. Un Role con un RoleBinding concede solo en ese namespace, como cabe esperar. Un ClusterRole con un ClusterRoleBinding concede en todo el cluster, incluidos los recursos que no tienen namespace (nodos, PersistentVolumes, la propia definición de namespaces).</a:t>
+            </a:r>
+          </a:p>
+          <a:p>
+            <a:pPr algn="l" marL="0" indent="0">
+              <a:lnSpc>
+                <a:spcPct val="128000"/>
+              </a:lnSpc>
+              <a:spcBef>
+                <a:spcPts val="0"/>
+              </a:spcBef>
+              <a:spcAft>
+                <a:spcPts val="400"/>
+              </a:spcAft>
+              <a:buNone/>
+            </a:pPr>
+            <a:r>
+              <a:rPr sz="1000" b="0" i="0">
+                <a:solidFill>
+                  <a:srgbClr val="BDC9DB"/>
+                </a:solidFill>
+                <a:latin typeface="Segoe UI"/>
+              </a:rPr>
+              <a:t>La combinación potente y a la vez peligrosa es un ClusterRole con un RoleBinding: reutiliza una definición de permisos común (por ejemplo, «leer pods») pero la aplica solo dentro del namespace del binding. Es la forma correcta de dar permisos acotados sin repetir el mismo Role en cada namespace.</a:t>
+            </a:r>
+          </a:p>
+          <a:p>
+            <a:pPr algn="l" marL="0" indent="0">
+              <a:lnSpc>
+                <a:spcPct val="128000"/>
+              </a:lnSpc>
+              <a:spcBef>
+                <a:spcPts val="0"/>
+              </a:spcBef>
+              <a:spcAft>
+                <a:spcPts val="400"/>
+              </a:spcAft>
+              <a:buNone/>
+            </a:pPr>
+            <a:r>
+              <a:rPr sz="1000" b="0" i="0">
+                <a:solidFill>
+                  <a:srgbClr val="BDC9DB"/>
+                </a:solidFill>
+                <a:latin typeface="Segoe UI"/>
+              </a:rPr>
+              <a:t>La combinación inválida es un Role con un ClusterRoleBinding: el API la acepta sin error, pero no concede absolutamente nada. Y el error más caro en producción es poner un ClusterRoleBinding donde debía ir un RoleBinding: se cree que se ha dado acceso a un namespace y en realidad se ha dado a los treinta. Auditar siempre con kubectl auth can-i --as, nunca leyendo los YAML.</a:t>
             </a:r>
           </a:p>
         </p:txBody>
@@ -25498,7 +26007,7 @@
       </p:sp>
       <p:pic>
         <p:nvPicPr>
-          <p:cNvPr id="8" name="Picture 7" descr="deploy.png"/>
+          <p:cNvPr id="8" name="Picture 7" descr="control-plane.png"/>
           <p:cNvPicPr>
             <a:picLocks noChangeAspect="1"/>
           </p:cNvPicPr>
@@ -25528,7 +26037,7 @@
         </p:nvSpPr>
         <p:spPr>
           <a:xfrm>
-            <a:off x="636000" y="2128000"/>
+            <a:off x="636000" y="1751750"/>
             <a:ext cx="104000" cy="104000"/>
           </a:xfrm>
           <a:prstGeom prst="ellipse">
@@ -25572,8 +26081,8 @@
         </p:nvSpPr>
         <p:spPr>
           <a:xfrm>
-            <a:off x="880000" y="1710000"/>
-            <a:ext cx="5435040" cy="940000"/>
+            <a:off x="880000" y="1470000"/>
+            <a:ext cx="5435040" cy="667500"/>
           </a:xfrm>
           <a:prstGeom prst="rect">
             <a:avLst/>
@@ -25618,7 +26127,7 @@
         </p:nvSpPr>
         <p:spPr>
           <a:xfrm>
-            <a:off x="636000" y="3068000"/>
+            <a:off x="636000" y="2419250"/>
             <a:ext cx="104000" cy="104000"/>
           </a:xfrm>
           <a:prstGeom prst="ellipse">
@@ -25662,8 +26171,8 @@
         </p:nvSpPr>
         <p:spPr>
           <a:xfrm>
-            <a:off x="880000" y="2650000"/>
-            <a:ext cx="5435040" cy="940000"/>
+            <a:off x="880000" y="2137500"/>
+            <a:ext cx="5435040" cy="667500"/>
           </a:xfrm>
           <a:prstGeom prst="rect">
             <a:avLst/>
@@ -25708,7 +26217,7 @@
         </p:nvSpPr>
         <p:spPr>
           <a:xfrm>
-            <a:off x="636000" y="4008000"/>
+            <a:off x="636000" y="3086750"/>
             <a:ext cx="104000" cy="104000"/>
           </a:xfrm>
           <a:prstGeom prst="ellipse">
@@ -25752,8 +26261,8 @@
         </p:nvSpPr>
         <p:spPr>
           <a:xfrm>
-            <a:off x="880000" y="3590000"/>
-            <a:ext cx="5435040" cy="940000"/>
+            <a:off x="880000" y="2805000"/>
+            <a:ext cx="5435040" cy="667500"/>
           </a:xfrm>
           <a:prstGeom prst="rect">
             <a:avLst/>
@@ -25798,7 +26307,7 @@
         </p:nvSpPr>
         <p:spPr>
           <a:xfrm>
-            <a:off x="636000" y="4948000"/>
+            <a:off x="636000" y="3754250"/>
             <a:ext cx="104000" cy="104000"/>
           </a:xfrm>
           <a:prstGeom prst="ellipse">
@@ -25842,8 +26351,8 @@
         </p:nvSpPr>
         <p:spPr>
           <a:xfrm>
-            <a:off x="880000" y="4530000"/>
-            <a:ext cx="5435040" cy="940000"/>
+            <a:off x="880000" y="3472500"/>
+            <a:ext cx="5435040" cy="667500"/>
           </a:xfrm>
           <a:prstGeom prst="rect">
             <a:avLst/>
@@ -25888,8 +26397,8 @@
         </p:nvSpPr>
         <p:spPr>
           <a:xfrm>
-            <a:off x="6635040" y="1710000"/>
-            <a:ext cx="4936960" cy="3760000"/>
+            <a:off x="6635040" y="1470000"/>
+            <a:ext cx="4936960" cy="2670000"/>
           </a:xfrm>
           <a:prstGeom prst="roundRect">
             <a:avLst>
@@ -25938,8 +26447,8 @@
         </p:nvSpPr>
         <p:spPr>
           <a:xfrm>
-            <a:off x="6635040" y="2010000"/>
-            <a:ext cx="46000" cy="3460000"/>
+            <a:off x="6635040" y="1770000"/>
+            <a:ext cx="46000" cy="2370000"/>
           </a:xfrm>
           <a:prstGeom prst="rect">
             <a:avLst/>
@@ -25984,7 +26493,7 @@
         </p:nvSpPr>
         <p:spPr>
           <a:xfrm>
-            <a:off x="6825040" y="1770000"/>
+            <a:off x="6825040" y="1530000"/>
             <a:ext cx="4556960" cy="260000"/>
           </a:xfrm>
           <a:prstGeom prst="rect">
@@ -26030,7 +26539,7 @@
         </p:nvSpPr>
         <p:spPr>
           <a:xfrm>
-            <a:off x="6825040" y="2004000"/>
+            <a:off x="6825040" y="1764000"/>
             <a:ext cx="4556960" cy="10000"/>
           </a:xfrm>
           <a:prstGeom prst="rect">
@@ -26076,7 +26585,7 @@
         </p:nvSpPr>
         <p:spPr>
           <a:xfrm>
-            <a:off x="6865040" y="2200000"/>
+            <a:off x="6865040" y="1960000"/>
             <a:ext cx="4516960" cy="1586992"/>
           </a:xfrm>
           <a:prstGeom prst="rect">
@@ -26259,12 +26768,12 @@
         </p:nvSpPr>
         <p:spPr>
           <a:xfrm>
-            <a:off x="620000" y="5860000"/>
-            <a:ext cx="10952000" cy="470000"/>
+            <a:off x="620000" y="4310000"/>
+            <a:ext cx="10952000" cy="2000000"/>
           </a:xfrm>
           <a:prstGeom prst="roundRect">
             <a:avLst>
-              <a:gd name="adj" fmla="val 10000"/>
+              <a:gd name="adj" fmla="val 4500"/>
             </a:avLst>
           </a:prstGeom>
           <a:solidFill>
@@ -26309,8 +26818,8 @@
         </p:nvSpPr>
         <p:spPr>
           <a:xfrm>
-            <a:off x="650000" y="5884000"/>
-            <a:ext cx="40000" cy="422000"/>
+            <a:off x="646000" y="4332000"/>
+            <a:ext cx="40000" cy="1956000"/>
           </a:xfrm>
           <a:prstGeom prst="rect">
             <a:avLst/>
@@ -26355,8 +26864,8 @@
         </p:nvSpPr>
         <p:spPr>
           <a:xfrm>
-            <a:off x="860000" y="5860000"/>
-            <a:ext cx="10482000" cy="470000"/>
+            <a:off x="860000" y="4440000"/>
+            <a:ext cx="10522000" cy="1740000"/>
           </a:xfrm>
           <a:prstGeom prst="rect">
             <a:avLst/>
@@ -26364,31 +26873,100 @@
           <a:noFill/>
         </p:spPr>
         <p:txBody>
-          <a:bodyPr wrap="square" anchor="ctr" lIns="0" rIns="0" tIns="0" bIns="0">
+          <a:bodyPr wrap="square" anchor="t" lIns="0" rIns="0" tIns="0" bIns="0">
             <a:noAutofit/>
           </a:bodyPr>
           <a:lstStyle/>
           <a:p>
             <a:pPr algn="l" marL="0" indent="0">
               <a:lnSpc>
-                <a:spcPct val="116000"/>
-              </a:lnSpc>
-              <a:spcBef>
-                <a:spcPts val="0"/>
-              </a:spcBef>
-              <a:spcAft>
-                <a:spcPts val="0"/>
-              </a:spcAft>
-              <a:buNone/>
-            </a:pPr>
-            <a:r>
-              <a:rPr sz="1100" b="0" i="1">
+                <a:spcPct val="100000"/>
+              </a:lnSpc>
+              <a:spcBef>
+                <a:spcPts val="0"/>
+              </a:spcBef>
+              <a:spcAft>
+                <a:spcPts val="600"/>
+              </a:spcAft>
+              <a:buNone/>
+            </a:pPr>
+            <a:r>
+              <a:rPr sz="900" b="1" i="0" spc="200">
+                <a:solidFill>
+                  <a:srgbClr val="326CE5"/>
+                </a:solidFill>
+                <a:latin typeface="Segoe UI Semibold"/>
+              </a:rPr>
+              <a:t>TEORÍA</a:t>
+            </a:r>
+          </a:p>
+          <a:p>
+            <a:pPr algn="l" marL="0" indent="0">
+              <a:lnSpc>
+                <a:spcPct val="128000"/>
+              </a:lnSpc>
+              <a:spcBef>
+                <a:spcPts val="0"/>
+              </a:spcBef>
+              <a:spcAft>
+                <a:spcPts val="400"/>
+              </a:spcAft>
+              <a:buNone/>
+            </a:pPr>
+            <a:r>
+              <a:rPr sz="1000" b="0" i="0">
                 <a:solidFill>
                   <a:srgbClr val="BDC9DB"/>
                 </a:solidFill>
                 <a:latin typeface="Segoe UI"/>
               </a:rPr>
-              <a:t>Si kubectl no responde, la respuesta está en journalctl -u kubelet y en crictl. Nunca en kubectl.</a:t>
+              <a:t>En un cluster montado con kubeadm, los componentes del control plane —kube-apiserver, kube-controller-manager, kube-scheduler y etcd— no son Deployments ni los gestiona el propio Kubernetes. Son static Pods: el kubelet del nodo maestro vigila la carpeta /etc/kubernetes/manifests/, y por cada archivo YAML que encuentra allí crea y mantiene un Pod, sin pasar por el API server ni por el scheduler.</a:t>
+            </a:r>
+          </a:p>
+          <a:p>
+            <a:pPr algn="l" marL="0" indent="0">
+              <a:lnSpc>
+                <a:spcPct val="128000"/>
+              </a:lnSpc>
+              <a:spcBef>
+                <a:spcPts val="0"/>
+              </a:spcBef>
+              <a:spcAft>
+                <a:spcPts val="400"/>
+              </a:spcAft>
+              <a:buNone/>
+            </a:pPr>
+            <a:r>
+              <a:rPr sz="1000" b="0" i="0">
+                <a:solidFill>
+                  <a:srgbClr val="BDC9DB"/>
+                </a:solidFill>
+                <a:latin typeface="Segoe UI"/>
+              </a:rPr>
+              <a:t>Esto tiene consecuencias prácticas muy directas. No puedes borrar estos Pods con kubectl: el kubelet los recrea al instante. Sí puedes intervenir editando su manifiesto en esa carpeta —el kubelet detecta el cambio y reinicia el componente en segundos—, y esa es la palanca principal de recuperación cuando algo va mal.</a:t>
+            </a:r>
+          </a:p>
+          <a:p>
+            <a:pPr algn="l" marL="0" indent="0">
+              <a:lnSpc>
+                <a:spcPct val="128000"/>
+              </a:lnSpc>
+              <a:spcBef>
+                <a:spcPts val="0"/>
+              </a:spcBef>
+              <a:spcAft>
+                <a:spcPts val="400"/>
+              </a:spcAft>
+              <a:buNone/>
+            </a:pPr>
+            <a:r>
+              <a:rPr sz="1000" b="0" i="0">
+                <a:solidFill>
+                  <a:srgbClr val="BDC9DB"/>
+                </a:solidFill>
+                <a:latin typeface="Segoe UI"/>
+              </a:rPr>
+              <a:t>El kubelet, en cambio, es un servicio de systemd normal: sobrevive aunque el API server esté caído. Por eso, cuando kubectl no responde, el diagnóstico se hace por SSH al nodo con systemctl status kubelet, journalctl -u kubelet y crictl ps -a, nunca con kubectl.</a:t>
             </a:r>
           </a:p>
         </p:txBody>
@@ -26728,7 +27306,7 @@
         <p:spPr>
           <a:xfrm>
             <a:off x="620000" y="1470000"/>
-            <a:ext cx="10952000" cy="952500"/>
+            <a:ext cx="10952000" cy="540000"/>
           </a:xfrm>
           <a:prstGeom prst="roundRect">
             <a:avLst>
@@ -26777,7 +27355,7 @@
         </p:nvSpPr>
         <p:spPr>
           <a:xfrm>
-            <a:off x="840000" y="1781250"/>
+            <a:off x="840000" y="1575000"/>
             <a:ext cx="330000" cy="330000"/>
           </a:xfrm>
           <a:prstGeom prst="ellipse">
@@ -26844,7 +27422,7 @@
         <p:spPr>
           <a:xfrm>
             <a:off x="1370000" y="1470000"/>
-            <a:ext cx="2500000" cy="952500"/>
+            <a:ext cx="2500000" cy="540000"/>
           </a:xfrm>
           <a:prstGeom prst="rect">
             <a:avLst/>
@@ -26889,8 +27467,8 @@
         </p:nvSpPr>
         <p:spPr>
           <a:xfrm>
-            <a:off x="3970000" y="1679550"/>
-            <a:ext cx="8000" cy="533400"/>
+            <a:off x="3970000" y="1588800"/>
+            <a:ext cx="8000" cy="302400"/>
           </a:xfrm>
           <a:prstGeom prst="rect">
             <a:avLst/>
@@ -26936,7 +27514,7 @@
         <p:spPr>
           <a:xfrm>
             <a:off x="4170000" y="1470000"/>
-            <a:ext cx="7202000" cy="952500"/>
+            <a:ext cx="7202000" cy="540000"/>
           </a:xfrm>
           <a:prstGeom prst="rect">
             <a:avLst/>
@@ -26981,7 +27559,7 @@
         </p:nvSpPr>
         <p:spPr>
           <a:xfrm>
-            <a:off x="915000" y="2430500"/>
+            <a:off x="915000" y="2018000"/>
             <a:ext cx="180000" cy="154000"/>
           </a:xfrm>
           <a:prstGeom prst="rect">
@@ -27027,8 +27605,8 @@
         </p:nvSpPr>
         <p:spPr>
           <a:xfrm>
-            <a:off x="620000" y="2592500"/>
-            <a:ext cx="10952000" cy="952500"/>
+            <a:off x="620000" y="2180000"/>
+            <a:ext cx="10952000" cy="540000"/>
           </a:xfrm>
           <a:prstGeom prst="roundRect">
             <a:avLst>
@@ -27077,7 +27655,7 @@
         </p:nvSpPr>
         <p:spPr>
           <a:xfrm>
-            <a:off x="840000" y="2903750"/>
+            <a:off x="840000" y="2285000"/>
             <a:ext cx="330000" cy="330000"/>
           </a:xfrm>
           <a:prstGeom prst="ellipse">
@@ -27143,8 +27721,8 @@
         </p:nvSpPr>
         <p:spPr>
           <a:xfrm>
-            <a:off x="1370000" y="2592500"/>
-            <a:ext cx="2500000" cy="952500"/>
+            <a:off x="1370000" y="2180000"/>
+            <a:ext cx="2500000" cy="540000"/>
           </a:xfrm>
           <a:prstGeom prst="rect">
             <a:avLst/>
@@ -27189,8 +27767,8 @@
         </p:nvSpPr>
         <p:spPr>
           <a:xfrm>
-            <a:off x="3970000" y="2802050"/>
-            <a:ext cx="8000" cy="533400"/>
+            <a:off x="3970000" y="2298800"/>
+            <a:ext cx="8000" cy="302400"/>
           </a:xfrm>
           <a:prstGeom prst="rect">
             <a:avLst/>
@@ -27235,8 +27813,8 @@
         </p:nvSpPr>
         <p:spPr>
           <a:xfrm>
-            <a:off x="4170000" y="2592500"/>
-            <a:ext cx="7202000" cy="952500"/>
+            <a:off x="4170000" y="2180000"/>
+            <a:ext cx="7202000" cy="540000"/>
           </a:xfrm>
           <a:prstGeom prst="rect">
             <a:avLst/>
@@ -27281,7 +27859,7 @@
         </p:nvSpPr>
         <p:spPr>
           <a:xfrm>
-            <a:off x="915000" y="3553000"/>
+            <a:off x="915000" y="2728000"/>
             <a:ext cx="180000" cy="154000"/>
           </a:xfrm>
           <a:prstGeom prst="rect">
@@ -27327,8 +27905,8 @@
         </p:nvSpPr>
         <p:spPr>
           <a:xfrm>
-            <a:off x="620000" y="3715000"/>
-            <a:ext cx="10952000" cy="952500"/>
+            <a:off x="620000" y="2890000"/>
+            <a:ext cx="10952000" cy="540000"/>
           </a:xfrm>
           <a:prstGeom prst="roundRect">
             <a:avLst>
@@ -27377,7 +27955,7 @@
         </p:nvSpPr>
         <p:spPr>
           <a:xfrm>
-            <a:off x="840000" y="4026250"/>
+            <a:off x="840000" y="2995000"/>
             <a:ext cx="330000" cy="330000"/>
           </a:xfrm>
           <a:prstGeom prst="ellipse">
@@ -27443,8 +28021,8 @@
         </p:nvSpPr>
         <p:spPr>
           <a:xfrm>
-            <a:off x="1370000" y="3715000"/>
-            <a:ext cx="2500000" cy="952500"/>
+            <a:off x="1370000" y="2890000"/>
+            <a:ext cx="2500000" cy="540000"/>
           </a:xfrm>
           <a:prstGeom prst="rect">
             <a:avLst/>
@@ -27489,8 +28067,8 @@
         </p:nvSpPr>
         <p:spPr>
           <a:xfrm>
-            <a:off x="3970000" y="3924550"/>
-            <a:ext cx="8000" cy="533400"/>
+            <a:off x="3970000" y="3008800"/>
+            <a:ext cx="8000" cy="302400"/>
           </a:xfrm>
           <a:prstGeom prst="rect">
             <a:avLst/>
@@ -27535,8 +28113,8 @@
         </p:nvSpPr>
         <p:spPr>
           <a:xfrm>
-            <a:off x="4170000" y="3715000"/>
-            <a:ext cx="7202000" cy="952500"/>
+            <a:off x="4170000" y="2890000"/>
+            <a:ext cx="7202000" cy="540000"/>
           </a:xfrm>
           <a:prstGeom prst="rect">
             <a:avLst/>
@@ -27581,7 +28159,7 @@
         </p:nvSpPr>
         <p:spPr>
           <a:xfrm>
-            <a:off x="915000" y="4675500"/>
+            <a:off x="915000" y="3438000"/>
             <a:ext cx="180000" cy="154000"/>
           </a:xfrm>
           <a:prstGeom prst="rect">
@@ -27627,8 +28205,8 @@
         </p:nvSpPr>
         <p:spPr>
           <a:xfrm>
-            <a:off x="620000" y="4837500"/>
-            <a:ext cx="10952000" cy="952500"/>
+            <a:off x="620000" y="3600000"/>
+            <a:ext cx="10952000" cy="540000"/>
           </a:xfrm>
           <a:prstGeom prst="roundRect">
             <a:avLst>
@@ -27677,7 +28255,7 @@
         </p:nvSpPr>
         <p:spPr>
           <a:xfrm>
-            <a:off x="840000" y="5148750"/>
+            <a:off x="840000" y="3705000"/>
             <a:ext cx="330000" cy="330000"/>
           </a:xfrm>
           <a:prstGeom prst="ellipse">
@@ -27743,8 +28321,8 @@
         </p:nvSpPr>
         <p:spPr>
           <a:xfrm>
-            <a:off x="1370000" y="4837500"/>
-            <a:ext cx="2500000" cy="952500"/>
+            <a:off x="1370000" y="3600000"/>
+            <a:ext cx="2500000" cy="540000"/>
           </a:xfrm>
           <a:prstGeom prst="rect">
             <a:avLst/>
@@ -27789,8 +28367,8 @@
         </p:nvSpPr>
         <p:spPr>
           <a:xfrm>
-            <a:off x="3970000" y="5047050"/>
-            <a:ext cx="8000" cy="533400"/>
+            <a:off x="3970000" y="3718800"/>
+            <a:ext cx="8000" cy="302400"/>
           </a:xfrm>
           <a:prstGeom prst="rect">
             <a:avLst/>
@@ -27835,8 +28413,8 @@
         </p:nvSpPr>
         <p:spPr>
           <a:xfrm>
-            <a:off x="4170000" y="4837500"/>
-            <a:ext cx="7202000" cy="952500"/>
+            <a:off x="4170000" y="3600000"/>
+            <a:ext cx="7202000" cy="540000"/>
           </a:xfrm>
           <a:prstGeom prst="rect">
             <a:avLst/>
@@ -27881,12 +28459,12 @@
         </p:nvSpPr>
         <p:spPr>
           <a:xfrm>
-            <a:off x="620000" y="5910000"/>
-            <a:ext cx="10952000" cy="470000"/>
+            <a:off x="620000" y="4310000"/>
+            <a:ext cx="10952000" cy="2000000"/>
           </a:xfrm>
           <a:prstGeom prst="roundRect">
             <a:avLst>
-              <a:gd name="adj" fmla="val 10000"/>
+              <a:gd name="adj" fmla="val 4500"/>
             </a:avLst>
           </a:prstGeom>
           <a:solidFill>
@@ -27931,8 +28509,8 @@
         </p:nvSpPr>
         <p:spPr>
           <a:xfrm>
-            <a:off x="650000" y="5934000"/>
-            <a:ext cx="40000" cy="422000"/>
+            <a:off x="646000" y="4332000"/>
+            <a:ext cx="40000" cy="1956000"/>
           </a:xfrm>
           <a:prstGeom prst="rect">
             <a:avLst/>
@@ -27977,8 +28555,8 @@
         </p:nvSpPr>
         <p:spPr>
           <a:xfrm>
-            <a:off x="860000" y="5910000"/>
-            <a:ext cx="10482000" cy="470000"/>
+            <a:off x="860000" y="4440000"/>
+            <a:ext cx="10522000" cy="1740000"/>
           </a:xfrm>
           <a:prstGeom prst="rect">
             <a:avLst/>
@@ -27986,31 +28564,100 @@
           <a:noFill/>
         </p:spPr>
         <p:txBody>
-          <a:bodyPr wrap="square" anchor="ctr" lIns="0" rIns="0" tIns="0" bIns="0">
+          <a:bodyPr wrap="square" anchor="t" lIns="0" rIns="0" tIns="0" bIns="0">
             <a:noAutofit/>
           </a:bodyPr>
           <a:lstStyle/>
           <a:p>
             <a:pPr algn="l" marL="0" indent="0">
               <a:lnSpc>
-                <a:spcPct val="116000"/>
-              </a:lnSpc>
-              <a:spcBef>
-                <a:spcPts val="0"/>
-              </a:spcBef>
-              <a:spcAft>
-                <a:spcPts val="0"/>
-              </a:spcAft>
-              <a:buNone/>
-            </a:pPr>
-            <a:r>
-              <a:rPr sz="1100" b="0" i="1">
+                <a:spcPct val="100000"/>
+              </a:lnSpc>
+              <a:spcBef>
+                <a:spcPts val="0"/>
+              </a:spcBef>
+              <a:spcAft>
+                <a:spcPts val="600"/>
+              </a:spcAft>
+              <a:buNone/>
+            </a:pPr>
+            <a:r>
+              <a:rPr sz="900" b="1" i="0" spc="200">
+                <a:solidFill>
+                  <a:srgbClr val="326CE5"/>
+                </a:solidFill>
+                <a:latin typeface="Segoe UI Semibold"/>
+              </a:rPr>
+              <a:t>TEORÍA</a:t>
+            </a:r>
+          </a:p>
+          <a:p>
+            <a:pPr algn="l" marL="0" indent="0">
+              <a:lnSpc>
+                <a:spcPct val="128000"/>
+              </a:lnSpc>
+              <a:spcBef>
+                <a:spcPts val="0"/>
+              </a:spcBef>
+              <a:spcAft>
+                <a:spcPts val="400"/>
+              </a:spcAft>
+              <a:buNone/>
+            </a:pPr>
+            <a:r>
+              <a:rPr sz="1000" b="0" i="0">
                 <a:solidFill>
                   <a:srgbClr val="BDC9DB"/>
                 </a:solidFill>
                 <a:latin typeface="Segoe UI"/>
               </a:rPr>
-              <a:t>drain falla dos veces a propósito: DaemonSets (--ignore-daemonsets) y datos de emptyDir (--delete-emptydir-data). Lee el mensaje: te está diciendo qué autorizar.</a:t>
+              <a:t>Antes de tocar un nodo (actualizarlo, parchear el kernel, reiniciar el hardware) hay que sacarle la carga sin cortar el servicio. cordon marca el nodo como no programable: deja de aceptar Pods nuevos, pero los que ya corren siguen intactos. drain va más allá: además de acordonar, desaloja los Pods existentes para que sus controladores los recreen en otros nodos.</a:t>
+            </a:r>
+          </a:p>
+          <a:p>
+            <a:pPr algn="l" marL="0" indent="0">
+              <a:lnSpc>
+                <a:spcPct val="128000"/>
+              </a:lnSpc>
+              <a:spcBef>
+                <a:spcPts val="0"/>
+              </a:spcBef>
+              <a:spcAft>
+                <a:spcPts val="400"/>
+              </a:spcAft>
+              <a:buNone/>
+            </a:pPr>
+            <a:r>
+              <a:rPr sz="1000" b="0" i="0">
+                <a:solidFill>
+                  <a:srgbClr val="BDC9DB"/>
+                </a:solidFill>
+                <a:latin typeface="Segoe UI"/>
+              </a:rPr>
+              <a:t>drain se detiene a propósito en dos casos y hay que autorizarlos explícitamente. Con --ignore-daemonsets porque los Pods de un DaemonSet están atados a cada nodo y no tiene sentido moverlos. Con --delete-emptydir-data porque un emptyDir contiene datos que se perderán al recrear el Pod en otro sitio, y Kubernetes exige que confirmes que asumes esa pérdida. El mensaje de error te dice exactamente qué flag falta.</a:t>
+            </a:r>
+          </a:p>
+          <a:p>
+            <a:pPr algn="l" marL="0" indent="0">
+              <a:lnSpc>
+                <a:spcPct val="128000"/>
+              </a:lnSpc>
+              <a:spcBef>
+                <a:spcPts val="0"/>
+              </a:spcBef>
+              <a:spcAft>
+                <a:spcPts val="400"/>
+              </a:spcAft>
+              <a:buNone/>
+            </a:pPr>
+            <a:r>
+              <a:rPr sz="1000" b="0" i="0">
+                <a:solidFill>
+                  <a:srgbClr val="BDC9DB"/>
+                </a:solidFill>
+                <a:latin typeface="Segoe UI"/>
+              </a:rPr>
+              <a:t>uncordon revierte el acordonado y el nodo vuelve a aceptar Pods nuevos, pero los que se movieron NO regresan solos: el scheduler solo decide al crear un Pod, no reequilibra los que ya están colocados. Para repartir de nuevo hay que forzar la recreación, por ejemplo con kubectl rollout restart.</a:t>
             </a:r>
           </a:p>
         </p:txBody>
